--- a/slides/errorHandling.pptx
+++ b/slides/errorHandling.pptx
@@ -5,7 +5,7 @@
     <p:sldMasterId id="2147483648" r:id="rId1"/>
   </p:sldMasterIdLst>
   <p:notesMasterIdLst>
-    <p:notesMasterId r:id="rId52"/>
+    <p:notesMasterId r:id="rId54"/>
   </p:notesMasterIdLst>
   <p:sldIdLst>
     <p:sldId id="256" r:id="rId2"/>
@@ -20,44 +20,46 @@
     <p:sldId id="470" r:id="rId11"/>
     <p:sldId id="483" r:id="rId12"/>
     <p:sldId id="444" r:id="rId13"/>
-    <p:sldId id="476" r:id="rId14"/>
-    <p:sldId id="487" r:id="rId15"/>
-    <p:sldId id="484" r:id="rId16"/>
-    <p:sldId id="474" r:id="rId17"/>
-    <p:sldId id="477" r:id="rId18"/>
-    <p:sldId id="448" r:id="rId19"/>
-    <p:sldId id="498" r:id="rId20"/>
-    <p:sldId id="499" r:id="rId21"/>
-    <p:sldId id="478" r:id="rId22"/>
-    <p:sldId id="485" r:id="rId23"/>
-    <p:sldId id="475" r:id="rId24"/>
-    <p:sldId id="501" r:id="rId25"/>
-    <p:sldId id="458" r:id="rId26"/>
-    <p:sldId id="459" r:id="rId27"/>
-    <p:sldId id="445" r:id="rId28"/>
-    <p:sldId id="500" r:id="rId29"/>
-    <p:sldId id="486" r:id="rId30"/>
-    <p:sldId id="502" r:id="rId31"/>
-    <p:sldId id="463" r:id="rId32"/>
-    <p:sldId id="495" r:id="rId33"/>
-    <p:sldId id="464" r:id="rId34"/>
-    <p:sldId id="493" r:id="rId35"/>
-    <p:sldId id="494" r:id="rId36"/>
-    <p:sldId id="488" r:id="rId37"/>
-    <p:sldId id="462" r:id="rId38"/>
-    <p:sldId id="450" r:id="rId39"/>
-    <p:sldId id="490" r:id="rId40"/>
-    <p:sldId id="461" r:id="rId41"/>
-    <p:sldId id="489" r:id="rId42"/>
-    <p:sldId id="467" r:id="rId43"/>
-    <p:sldId id="497" r:id="rId44"/>
-    <p:sldId id="473" r:id="rId45"/>
-    <p:sldId id="471" r:id="rId46"/>
-    <p:sldId id="472" r:id="rId47"/>
-    <p:sldId id="452" r:id="rId48"/>
-    <p:sldId id="453" r:id="rId49"/>
-    <p:sldId id="454" r:id="rId50"/>
-    <p:sldId id="496" r:id="rId51"/>
+    <p:sldId id="503" r:id="rId14"/>
+    <p:sldId id="504" r:id="rId15"/>
+    <p:sldId id="476" r:id="rId16"/>
+    <p:sldId id="487" r:id="rId17"/>
+    <p:sldId id="484" r:id="rId18"/>
+    <p:sldId id="474" r:id="rId19"/>
+    <p:sldId id="477" r:id="rId20"/>
+    <p:sldId id="448" r:id="rId21"/>
+    <p:sldId id="498" r:id="rId22"/>
+    <p:sldId id="499" r:id="rId23"/>
+    <p:sldId id="478" r:id="rId24"/>
+    <p:sldId id="485" r:id="rId25"/>
+    <p:sldId id="475" r:id="rId26"/>
+    <p:sldId id="501" r:id="rId27"/>
+    <p:sldId id="458" r:id="rId28"/>
+    <p:sldId id="459" r:id="rId29"/>
+    <p:sldId id="445" r:id="rId30"/>
+    <p:sldId id="500" r:id="rId31"/>
+    <p:sldId id="486" r:id="rId32"/>
+    <p:sldId id="502" r:id="rId33"/>
+    <p:sldId id="463" r:id="rId34"/>
+    <p:sldId id="495" r:id="rId35"/>
+    <p:sldId id="464" r:id="rId36"/>
+    <p:sldId id="493" r:id="rId37"/>
+    <p:sldId id="494" r:id="rId38"/>
+    <p:sldId id="488" r:id="rId39"/>
+    <p:sldId id="462" r:id="rId40"/>
+    <p:sldId id="450" r:id="rId41"/>
+    <p:sldId id="490" r:id="rId42"/>
+    <p:sldId id="461" r:id="rId43"/>
+    <p:sldId id="489" r:id="rId44"/>
+    <p:sldId id="467" r:id="rId45"/>
+    <p:sldId id="497" r:id="rId46"/>
+    <p:sldId id="473" r:id="rId47"/>
+    <p:sldId id="471" r:id="rId48"/>
+    <p:sldId id="472" r:id="rId49"/>
+    <p:sldId id="452" r:id="rId50"/>
+    <p:sldId id="453" r:id="rId51"/>
+    <p:sldId id="454" r:id="rId52"/>
+    <p:sldId id="496" r:id="rId53"/>
   </p:sldIdLst>
   <p:sldSz cx="9144000" cy="6858000" type="screen4x3"/>
   <p:notesSz cx="6858000" cy="9144000"/>
@@ -3745,7 +3747,7 @@
             </a:extLst>
           </p:cNvPr>
           <p:cNvSpPr>
-            <a:spLocks noChangeArrowheads="1" noTextEdit="1"/>
+            <a:spLocks noGrp="1" noRot="1" noChangeAspect="1" noChangeArrowheads="1" noTextEdit="1"/>
           </p:cNvSpPr>
           <p:nvPr>
             <p:ph type="sldImg" idx="2"/>
@@ -4360,7 +4362,7 @@
             </a:extLst>
           </p:cNvPr>
           <p:cNvSpPr>
-            <a:spLocks noChangeArrowheads="1" noTextEdit="1"/>
+            <a:spLocks noGrp="1" noRot="1" noChangeAspect="1" noChangeArrowheads="1" noTextEdit="1"/>
           </p:cNvSpPr>
           <p:nvPr>
             <p:ph type="sldImg"/>
@@ -5454,7 +5456,7 @@
             <a:fld id="{B8878590-D9CC-4987-BFF8-AB70E6ABF17B}" type="slidenum">
               <a:rPr lang="en-US" altLang="en-US" smtClean="0"/>
               <a:pPr/>
-              <a:t>50</a:t>
+              <a:t>52</a:t>
             </a:fld>
             <a:endParaRPr lang="en-US" altLang="en-US"/>
           </a:p>
@@ -5660,7 +5662,7 @@
             <a:fld id="{B8878590-D9CC-4987-BFF8-AB70E6ABF17B}" type="slidenum">
               <a:rPr lang="en-US" altLang="en-US" smtClean="0"/>
               <a:pPr/>
-              <a:t>14</a:t>
+              <a:t>16</a:t>
             </a:fld>
             <a:endParaRPr lang="en-US" altLang="en-US"/>
           </a:p>
@@ -5774,7 +5776,7 @@
             <a:fld id="{B8878590-D9CC-4987-BFF8-AB70E6ABF17B}" type="slidenum">
               <a:rPr lang="en-US" altLang="en-US" smtClean="0"/>
               <a:pPr/>
-              <a:t>23</a:t>
+              <a:t>25</a:t>
             </a:fld>
             <a:endParaRPr lang="en-US" altLang="en-US"/>
           </a:p>
@@ -5888,7 +5890,7 @@
             <a:fld id="{B8878590-D9CC-4987-BFF8-AB70E6ABF17B}" type="slidenum">
               <a:rPr lang="en-US" altLang="en-US" smtClean="0"/>
               <a:pPr/>
-              <a:t>24</a:t>
+              <a:t>26</a:t>
             </a:fld>
             <a:endParaRPr lang="en-US" altLang="en-US"/>
           </a:p>
@@ -6328,7 +6330,7 @@
             <a:fld id="{B8878590-D9CC-4987-BFF8-AB70E6ABF17B}" type="slidenum">
               <a:rPr lang="en-US" altLang="en-US" smtClean="0"/>
               <a:pPr/>
-              <a:t>25</a:t>
+              <a:t>27</a:t>
             </a:fld>
             <a:endParaRPr lang="en-US" altLang="en-US"/>
           </a:p>
@@ -6625,7 +6627,7 @@
                   <a:spcPct val="0"/>
                 </a:spcBef>
               </a:pPr>
-              <a:t>27</a:t>
+              <a:t>29</a:t>
             </a:fld>
             <a:endParaRPr lang="en-US" altLang="en-US"/>
           </a:p>
@@ -6924,7 +6926,7 @@
                   <a:spcPct val="0"/>
                 </a:spcBef>
               </a:pPr>
-              <a:t>28</a:t>
+              <a:t>30</a:t>
             </a:fld>
             <a:endParaRPr lang="en-US" altLang="en-US"/>
           </a:p>
@@ -7717,7 +7719,7 @@
             <a:fld id="{B8878590-D9CC-4987-BFF8-AB70E6ABF17B}" type="slidenum">
               <a:rPr lang="en-US" altLang="en-US" smtClean="0"/>
               <a:pPr/>
-              <a:t>40</a:t>
+              <a:t>42</a:t>
             </a:fld>
             <a:endParaRPr lang="en-US" altLang="en-US"/>
           </a:p>
@@ -7933,7 +7935,7 @@
             <a:fld id="{B8878590-D9CC-4987-BFF8-AB70E6ABF17B}" type="slidenum">
               <a:rPr lang="en-US" altLang="en-US" smtClean="0"/>
               <a:pPr/>
-              <a:t>46</a:t>
+              <a:t>48</a:t>
             </a:fld>
             <a:endParaRPr lang="en-US" altLang="en-US"/>
           </a:p>
@@ -13362,6 +13364,281 @@
       </p:grpSpPr>
       <p:sp>
         <p:nvSpPr>
+          <p:cNvPr id="2" name="Title 1">
+            <a:extLst>
+              <a:ext uri="{FF2B5EF4-FFF2-40B4-BE49-F238E27FC236}">
+                <a16:creationId xmlns:a16="http://schemas.microsoft.com/office/drawing/2014/main" id="{BC9976FC-046F-DC28-05C5-48A1FBB12FBD}"/>
+              </a:ext>
+            </a:extLst>
+          </p:cNvPr>
+          <p:cNvSpPr>
+            <a:spLocks noGrp="1"/>
+          </p:cNvSpPr>
+          <p:nvPr>
+            <p:ph type="title"/>
+          </p:nvPr>
+        </p:nvSpPr>
+        <p:spPr/>
+        <p:txBody>
+          <a:bodyPr/>
+          <a:lstStyle/>
+          <a:p>
+            <a:r>
+              <a:rPr lang="en-US" dirty="0"/>
+              <a:t>Choose the name to use</a:t>
+            </a:r>
+          </a:p>
+        </p:txBody>
+      </p:sp>
+      <p:sp>
+        <p:nvSpPr>
+          <p:cNvPr id="3" name="Content Placeholder 2">
+            <a:extLst>
+              <a:ext uri="{FF2B5EF4-FFF2-40B4-BE49-F238E27FC236}">
+                <a16:creationId xmlns:a16="http://schemas.microsoft.com/office/drawing/2014/main" id="{2943E409-0F1D-A581-2EAE-B5567ED6C7A3}"/>
+              </a:ext>
+            </a:extLst>
+          </p:cNvPr>
+          <p:cNvSpPr>
+            <a:spLocks noGrp="1"/>
+          </p:cNvSpPr>
+          <p:nvPr>
+            <p:ph idx="1"/>
+          </p:nvPr>
+        </p:nvSpPr>
+        <p:spPr/>
+        <p:txBody>
+          <a:bodyPr/>
+          <a:lstStyle/>
+          <a:p>
+            <a:pPr marL="0" indent="0">
+              <a:buNone/>
+            </a:pPr>
+            <a:r>
+              <a:rPr lang="en-US" altLang="en-US" dirty="0"/>
+              <a:t>Determine the name of the exception that occurs if you try to describe a file that doesn't exist.</a:t>
+            </a:r>
+          </a:p>
+          <a:p>
+            <a:pPr marL="0" indent="0">
+              <a:buNone/>
+            </a:pPr>
+            <a:endParaRPr lang="en-US" altLang="en-US" dirty="0"/>
+          </a:p>
+          <a:p>
+            <a:pPr marL="0" indent="0">
+              <a:buNone/>
+            </a:pPr>
+            <a:r>
+              <a:rPr lang="en-US" altLang="en-US" dirty="0"/>
+              <a:t>import arcpy</a:t>
+            </a:r>
+          </a:p>
+          <a:p>
+            <a:pPr marL="0" indent="0">
+              <a:buNone/>
+            </a:pPr>
+            <a:r>
+              <a:rPr lang="en-US" altLang="en-US" dirty="0" err="1"/>
+              <a:t>arcpy.Describe</a:t>
+            </a:r>
+            <a:r>
+              <a:rPr lang="en-US" altLang="en-US" dirty="0"/>
+              <a:t>("C:/not_a_file.tif")</a:t>
+            </a:r>
+          </a:p>
+          <a:p>
+            <a:pPr marL="0" indent="0">
+              <a:buNone/>
+            </a:pPr>
+            <a:endParaRPr lang="en-US" dirty="0"/>
+          </a:p>
+        </p:txBody>
+      </p:sp>
+    </p:spTree>
+    <p:extLst>
+      <p:ext uri="{BB962C8B-B14F-4D97-AF65-F5344CB8AC3E}">
+        <p14:creationId xmlns:p14="http://schemas.microsoft.com/office/powerpoint/2010/main" val="3990579283"/>
+      </p:ext>
+    </p:extLst>
+  </p:cSld>
+  <p:clrMapOvr>
+    <a:masterClrMapping/>
+  </p:clrMapOvr>
+</p:sld>
+</file>
+
+<file path=ppt/slides/slide14.xml><?xml version="1.0" encoding="utf-8"?>
+<p:sld xmlns:a="http://schemas.openxmlformats.org/drawingml/2006/main" xmlns:r="http://schemas.openxmlformats.org/officeDocument/2006/relationships" xmlns:p="http://schemas.openxmlformats.org/presentationml/2006/main">
+  <p:cSld>
+    <p:spTree>
+      <p:nvGrpSpPr>
+        <p:cNvPr id="1" name="">
+          <a:extLst>
+            <a:ext uri="{FF2B5EF4-FFF2-40B4-BE49-F238E27FC236}">
+              <a16:creationId xmlns:a16="http://schemas.microsoft.com/office/drawing/2014/main" id="{F8493CB0-0B27-287B-25FC-4CB8BFF5C6A9}"/>
+            </a:ext>
+          </a:extLst>
+        </p:cNvPr>
+        <p:cNvGrpSpPr/>
+        <p:nvPr/>
+      </p:nvGrpSpPr>
+      <p:grpSpPr>
+        <a:xfrm>
+          <a:off x="0" y="0"/>
+          <a:ext cx="0" cy="0"/>
+          <a:chOff x="0" y="0"/>
+          <a:chExt cx="0" cy="0"/>
+        </a:xfrm>
+      </p:grpSpPr>
+      <p:sp>
+        <p:nvSpPr>
+          <p:cNvPr id="2" name="Title 1">
+            <a:extLst>
+              <a:ext uri="{FF2B5EF4-FFF2-40B4-BE49-F238E27FC236}">
+                <a16:creationId xmlns:a16="http://schemas.microsoft.com/office/drawing/2014/main" id="{E85AA9E4-71BA-25EA-9C79-893A08DAEC6A}"/>
+              </a:ext>
+            </a:extLst>
+          </p:cNvPr>
+          <p:cNvSpPr>
+            <a:spLocks noGrp="1"/>
+          </p:cNvSpPr>
+          <p:nvPr>
+            <p:ph type="title"/>
+          </p:nvPr>
+        </p:nvSpPr>
+        <p:spPr/>
+        <p:txBody>
+          <a:bodyPr/>
+          <a:lstStyle/>
+          <a:p>
+            <a:r>
+              <a:rPr lang="en-US" dirty="0"/>
+              <a:t>Choose the name to use</a:t>
+            </a:r>
+          </a:p>
+        </p:txBody>
+      </p:sp>
+      <p:sp>
+        <p:nvSpPr>
+          <p:cNvPr id="3" name="Content Placeholder 2">
+            <a:extLst>
+              <a:ext uri="{FF2B5EF4-FFF2-40B4-BE49-F238E27FC236}">
+                <a16:creationId xmlns:a16="http://schemas.microsoft.com/office/drawing/2014/main" id="{C7B81FB7-9A4C-8930-CEB8-20DFD3795520}"/>
+              </a:ext>
+            </a:extLst>
+          </p:cNvPr>
+          <p:cNvSpPr>
+            <a:spLocks noGrp="1"/>
+          </p:cNvSpPr>
+          <p:nvPr>
+            <p:ph idx="1"/>
+          </p:nvPr>
+        </p:nvSpPr>
+        <p:spPr/>
+        <p:txBody>
+          <a:bodyPr/>
+          <a:lstStyle/>
+          <a:p>
+            <a:pPr marL="0" indent="0">
+              <a:buNone/>
+            </a:pPr>
+            <a:r>
+              <a:rPr lang="en-US" altLang="en-US" dirty="0"/>
+              <a:t>Determine the name of the exception that occurs if you try to describe a file that doesn't exist.</a:t>
+            </a:r>
+          </a:p>
+          <a:p>
+            <a:pPr marL="0" indent="0">
+              <a:buNone/>
+            </a:pPr>
+            <a:endParaRPr lang="en-US" altLang="en-US" dirty="0"/>
+          </a:p>
+          <a:p>
+            <a:pPr marL="0" indent="0">
+              <a:buNone/>
+            </a:pPr>
+            <a:r>
+              <a:rPr lang="en-US" altLang="en-US" dirty="0"/>
+              <a:t>import arcpy</a:t>
+            </a:r>
+          </a:p>
+          <a:p>
+            <a:pPr marL="0" indent="0">
+              <a:buNone/>
+            </a:pPr>
+            <a:r>
+              <a:rPr lang="en-US" altLang="en-US" dirty="0" err="1"/>
+              <a:t>arcpy.Describe</a:t>
+            </a:r>
+            <a:r>
+              <a:rPr lang="en-US" altLang="en-US" dirty="0"/>
+              <a:t>("C:/not_a_file.tif")</a:t>
+            </a:r>
+          </a:p>
+          <a:p>
+            <a:pPr marL="0" indent="0">
+              <a:buNone/>
+            </a:pPr>
+            <a:endParaRPr lang="en-US" dirty="0"/>
+          </a:p>
+          <a:p>
+            <a:pPr marL="0" indent="0">
+              <a:buNone/>
+            </a:pPr>
+            <a:r>
+              <a:rPr lang="en-US" sz="1800" dirty="0" err="1">
+                <a:solidFill>
+                  <a:srgbClr val="FF0066"/>
+                </a:solidFill>
+                <a:latin typeface="Consolas" panose="020B0609020204030204" pitchFamily="49" charset="0"/>
+              </a:rPr>
+              <a:t>OSError</a:t>
+            </a:r>
+            <a:r>
+              <a:rPr lang="en-US" sz="1800" dirty="0">
+                <a:solidFill>
+                  <a:srgbClr val="FF0066"/>
+                </a:solidFill>
+                <a:latin typeface="Consolas" panose="020B0609020204030204" pitchFamily="49" charset="0"/>
+              </a:rPr>
+              <a:t>: "C:/not_a_file.tif" does not exist</a:t>
+            </a:r>
+          </a:p>
+        </p:txBody>
+      </p:sp>
+    </p:spTree>
+    <p:extLst>
+      <p:ext uri="{BB962C8B-B14F-4D97-AF65-F5344CB8AC3E}">
+        <p14:creationId xmlns:p14="http://schemas.microsoft.com/office/powerpoint/2010/main" val="3536938123"/>
+      </p:ext>
+    </p:extLst>
+  </p:cSld>
+  <p:clrMapOvr>
+    <a:masterClrMapping/>
+  </p:clrMapOvr>
+</p:sld>
+</file>
+
+<file path=ppt/slides/slide15.xml><?xml version="1.0" encoding="utf-8"?>
+<p:sld xmlns:a="http://schemas.openxmlformats.org/drawingml/2006/main" xmlns:r="http://schemas.openxmlformats.org/officeDocument/2006/relationships" xmlns:p="http://schemas.openxmlformats.org/presentationml/2006/main">
+  <p:cSld>
+    <p:spTree>
+      <p:nvGrpSpPr>
+        <p:cNvPr id="1" name=""/>
+        <p:cNvGrpSpPr/>
+        <p:nvPr/>
+      </p:nvGrpSpPr>
+      <p:grpSpPr>
+        <a:xfrm>
+          <a:off x="0" y="0"/>
+          <a:ext cx="0" cy="0"/>
+          <a:chOff x="0" y="0"/>
+          <a:chExt cx="0" cy="0"/>
+        </a:xfrm>
+      </p:grpSpPr>
+      <p:sp>
+        <p:nvSpPr>
           <p:cNvPr id="9218" name="Title 1">
             <a:extLst>
               <a:ext uri="{FF2B5EF4-FFF2-40B4-BE49-F238E27FC236}">
@@ -14017,7 +14294,7 @@
 </p:sld>
 </file>
 
-<file path=ppt/slides/slide14.xml><?xml version="1.0" encoding="utf-8"?>
+<file path=ppt/slides/slide16.xml><?xml version="1.0" encoding="utf-8"?>
 <p:sld xmlns:a="http://schemas.openxmlformats.org/drawingml/2006/main" xmlns:r="http://schemas.openxmlformats.org/officeDocument/2006/relationships" xmlns:p="http://schemas.openxmlformats.org/presentationml/2006/main">
   <p:cSld>
     <p:bg>
@@ -15643,7 +15920,7 @@
 </p:sld>
 </file>
 
-<file path=ppt/slides/slide15.xml><?xml version="1.0" encoding="utf-8"?>
+<file path=ppt/slides/slide17.xml><?xml version="1.0" encoding="utf-8"?>
 <p:sld xmlns:a="http://schemas.openxmlformats.org/drawingml/2006/main" xmlns:r="http://schemas.openxmlformats.org/officeDocument/2006/relationships" xmlns:p="http://schemas.openxmlformats.org/presentationml/2006/main">
   <p:cSld>
     <p:spTree>
@@ -15723,7 +16000,7 @@
 </p:sld>
 </file>
 
-<file path=ppt/slides/slide16.xml><?xml version="1.0" encoding="utf-8"?>
+<file path=ppt/slides/slide18.xml><?xml version="1.0" encoding="utf-8"?>
 <p:sld xmlns:a="http://schemas.openxmlformats.org/drawingml/2006/main" xmlns:r="http://schemas.openxmlformats.org/officeDocument/2006/relationships" xmlns:p="http://schemas.openxmlformats.org/presentationml/2006/main">
   <p:cSld>
     <p:spTree>
@@ -16628,7 +16905,7 @@
 </p:sld>
 </file>
 
-<file path=ppt/slides/slide17.xml><?xml version="1.0" encoding="utf-8"?>
+<file path=ppt/slides/slide19.xml><?xml version="1.0" encoding="utf-8"?>
 <p:sld xmlns:a="http://schemas.openxmlformats.org/drawingml/2006/main" xmlns:r="http://schemas.openxmlformats.org/officeDocument/2006/relationships" xmlns:p="http://schemas.openxmlformats.org/presentationml/2006/main">
   <p:cSld>
     <p:spTree>
@@ -17340,1216 +17617,6 @@
     <p:extLst>
       <p:ext uri="{BB962C8B-B14F-4D97-AF65-F5344CB8AC3E}">
         <p14:creationId xmlns:p14="http://schemas.microsoft.com/office/powerpoint/2010/main" val="493095395"/>
-      </p:ext>
-    </p:extLst>
-  </p:cSld>
-  <p:clrMapOvr>
-    <a:masterClrMapping/>
-  </p:clrMapOvr>
-</p:sld>
-</file>
-
-<file path=ppt/slides/slide18.xml><?xml version="1.0" encoding="utf-8"?>
-<p:sld xmlns:a="http://schemas.openxmlformats.org/drawingml/2006/main" xmlns:r="http://schemas.openxmlformats.org/officeDocument/2006/relationships" xmlns:p="http://schemas.openxmlformats.org/presentationml/2006/main">
-  <p:cSld>
-    <p:spTree>
-      <p:nvGrpSpPr>
-        <p:cNvPr id="1" name=""/>
-        <p:cNvGrpSpPr/>
-        <p:nvPr/>
-      </p:nvGrpSpPr>
-      <p:grpSpPr>
-        <a:xfrm>
-          <a:off x="0" y="0"/>
-          <a:ext cx="0" cy="0"/>
-          <a:chOff x="0" y="0"/>
-          <a:chExt cx="0" cy="0"/>
-        </a:xfrm>
-      </p:grpSpPr>
-      <p:sp>
-        <p:nvSpPr>
-          <p:cNvPr id="13315" name="Rectangle 2">
-            <a:extLst>
-              <a:ext uri="{FF2B5EF4-FFF2-40B4-BE49-F238E27FC236}">
-                <a16:creationId xmlns:a16="http://schemas.microsoft.com/office/drawing/2014/main" id="{DCC1ED6B-0C5B-73D1-0709-68D3E9686B53}"/>
-              </a:ext>
-            </a:extLst>
-          </p:cNvPr>
-          <p:cNvSpPr>
-            <a:spLocks noGrp="1" noChangeArrowheads="1"/>
-          </p:cNvSpPr>
-          <p:nvPr>
-            <p:ph type="title"/>
-          </p:nvPr>
-        </p:nvSpPr>
-        <p:spPr/>
-        <p:txBody>
-          <a:bodyPr/>
-          <a:lstStyle/>
-          <a:p>
-            <a:pPr eaLnBrk="1" hangingPunct="1">
-              <a:defRPr/>
-            </a:pPr>
-            <a:r>
-              <a:rPr lang="en-US" altLang="en-US" sz="3200" dirty="0"/>
-              <a:t>Flow description </a:t>
-            </a:r>
-          </a:p>
-        </p:txBody>
-      </p:sp>
-      <p:sp>
-        <p:nvSpPr>
-          <p:cNvPr id="16388" name="Rectangle 3">
-            <a:extLst>
-              <a:ext uri="{FF2B5EF4-FFF2-40B4-BE49-F238E27FC236}">
-                <a16:creationId xmlns:a16="http://schemas.microsoft.com/office/drawing/2014/main" id="{C010A1E0-19D2-CD18-797E-14EAF6E322A5}"/>
-              </a:ext>
-            </a:extLst>
-          </p:cNvPr>
-          <p:cNvSpPr>
-            <a:spLocks noGrp="1" noChangeArrowheads="1"/>
-          </p:cNvSpPr>
-          <p:nvPr>
-            <p:ph type="body" idx="1"/>
-          </p:nvPr>
-        </p:nvSpPr>
-        <p:spPr/>
-        <p:txBody>
-          <a:bodyPr/>
-          <a:lstStyle/>
-          <a:p>
-            <a:pPr eaLnBrk="1" hangingPunct="1"/>
-            <a:r>
-              <a:rPr lang="en-US" altLang="en-US" sz="1800" dirty="0"/>
-              <a:t>If an exception occurs during execution of the try clause, the rest of the clause is skipped. Then if its type matches the exception named after the except keyword, the except clause is executed, and then execution continues after the try statement. </a:t>
-            </a:r>
-          </a:p>
-          <a:p>
-            <a:pPr eaLnBrk="1" hangingPunct="1"/>
-            <a:endParaRPr lang="en-US" altLang="en-US" sz="1800" dirty="0"/>
-          </a:p>
-          <a:p>
-            <a:pPr eaLnBrk="1" hangingPunct="1"/>
-            <a:r>
-              <a:rPr lang="en-US" altLang="en-US" sz="1800" dirty="0"/>
-              <a:t>If an exception occurs which does not match the exception named in the except clause, it is passed on to outer try statements; if no handler is found, it is an unhandled </a:t>
-            </a:r>
-            <a:r>
-              <a:rPr lang="en-US" altLang="en-US" sz="1800" i="1" dirty="0"/>
-              <a:t>exception</a:t>
-            </a:r>
-            <a:r>
-              <a:rPr lang="en-US" altLang="en-US" sz="1800" dirty="0"/>
-              <a:t> and execution stops with a Traceback message.</a:t>
-            </a:r>
-            <a:endParaRPr lang="en-US" altLang="en-US" dirty="0"/>
-          </a:p>
-        </p:txBody>
-      </p:sp>
-    </p:spTree>
-  </p:cSld>
-  <p:clrMapOvr>
-    <a:masterClrMapping/>
-  </p:clrMapOvr>
-</p:sld>
-</file>
-
-<file path=ppt/slides/slide19.xml><?xml version="1.0" encoding="utf-8"?>
-<p:sld xmlns:a="http://schemas.openxmlformats.org/drawingml/2006/main" xmlns:r="http://schemas.openxmlformats.org/officeDocument/2006/relationships" xmlns:p="http://schemas.openxmlformats.org/presentationml/2006/main">
-  <p:cSld>
-    <p:spTree>
-      <p:nvGrpSpPr>
-        <p:cNvPr id="1" name=""/>
-        <p:cNvGrpSpPr/>
-        <p:nvPr/>
-      </p:nvGrpSpPr>
-      <p:grpSpPr>
-        <a:xfrm>
-          <a:off x="0" y="0"/>
-          <a:ext cx="0" cy="0"/>
-          <a:chOff x="0" y="0"/>
-          <a:chExt cx="0" cy="0"/>
-        </a:xfrm>
-      </p:grpSpPr>
-      <p:sp>
-        <p:nvSpPr>
-          <p:cNvPr id="13315" name="Rectangle 2">
-            <a:extLst>
-              <a:ext uri="{FF2B5EF4-FFF2-40B4-BE49-F238E27FC236}">
-                <a16:creationId xmlns:a16="http://schemas.microsoft.com/office/drawing/2014/main" id="{DCC1ED6B-0C5B-73D1-0709-68D3E9686B53}"/>
-              </a:ext>
-            </a:extLst>
-          </p:cNvPr>
-          <p:cNvSpPr>
-            <a:spLocks noGrp="1" noChangeArrowheads="1"/>
-          </p:cNvSpPr>
-          <p:nvPr>
-            <p:ph type="title"/>
-          </p:nvPr>
-        </p:nvSpPr>
-        <p:spPr/>
-        <p:txBody>
-          <a:bodyPr/>
-          <a:lstStyle/>
-          <a:p>
-            <a:pPr eaLnBrk="1" hangingPunct="1">
-              <a:defRPr/>
-            </a:pPr>
-            <a:r>
-              <a:rPr lang="en-US" altLang="en-US" sz="3200" dirty="0"/>
-              <a:t>Hands-on:  Flow with named exceptions </a:t>
-            </a:r>
-          </a:p>
-        </p:txBody>
-      </p:sp>
-      <p:sp>
-        <p:nvSpPr>
-          <p:cNvPr id="16389" name="Text Box 4">
-            <a:extLst>
-              <a:ext uri="{FF2B5EF4-FFF2-40B4-BE49-F238E27FC236}">
-                <a16:creationId xmlns:a16="http://schemas.microsoft.com/office/drawing/2014/main" id="{44303321-29AB-C68F-B232-31A1E5488E6F}"/>
-              </a:ext>
-            </a:extLst>
-          </p:cNvPr>
-          <p:cNvSpPr txBox="1">
-            <a:spLocks noChangeArrowheads="1"/>
-          </p:cNvSpPr>
-          <p:nvPr/>
-        </p:nvSpPr>
-        <p:spPr bwMode="auto">
-          <a:xfrm>
-            <a:off x="4038600" y="3156552"/>
-            <a:ext cx="3915612" cy="2902333"/>
-          </a:xfrm>
-          <a:prstGeom prst="rect">
-            <a:avLst/>
-          </a:prstGeom>
-          <a:noFill/>
-          <a:ln>
-            <a:noFill/>
-          </a:ln>
-          <a:effectLst/>
-          <a:extLst>
-            <a:ext uri="{909E8E84-426E-40DD-AFC4-6F175D3DCCD1}">
-              <a14:hiddenFill xmlns:a14="http://schemas.microsoft.com/office/drawing/2010/main">
-                <a:solidFill>
-                  <a:schemeClr val="accent1"/>
-                </a:solidFill>
-              </a14:hiddenFill>
-            </a:ext>
-            <a:ext uri="{91240B29-F687-4F45-9708-019B960494DF}">
-              <a14:hiddenLine xmlns:a14="http://schemas.microsoft.com/office/drawing/2010/main" w="9525">
-                <a:solidFill>
-                  <a:schemeClr val="tx1"/>
-                </a:solidFill>
-                <a:miter lim="800000"/>
-                <a:headEnd/>
-                <a:tailEnd/>
-              </a14:hiddenLine>
-            </a:ext>
-            <a:ext uri="{AF507438-7753-43E0-B8FC-AC1667EBCBE1}">
-              <a14:hiddenEffects xmlns:a14="http://schemas.microsoft.com/office/drawing/2010/main">
-                <a:effectLst>
-                  <a:outerShdw dist="35921" dir="2700000" algn="ctr" rotWithShape="0">
-                    <a:schemeClr val="bg2"/>
-                  </a:outerShdw>
-                </a:effectLst>
-              </a14:hiddenEffects>
-            </a:ext>
-          </a:extLst>
-        </p:spPr>
-        <p:txBody>
-          <a:bodyPr wrap="square">
-            <a:spAutoFit/>
-          </a:bodyPr>
-          <a:lstStyle>
-            <a:lvl1pPr>
-              <a:spcBef>
-                <a:spcPct val="20000"/>
-              </a:spcBef>
-              <a:buChar char="•"/>
-              <a:defRPr sz="3200">
-                <a:solidFill>
-                  <a:schemeClr val="tx1"/>
-                </a:solidFill>
-                <a:latin typeface="Arial" panose="020B0604020202020204" pitchFamily="34" charset="0"/>
-              </a:defRPr>
-            </a:lvl1pPr>
-            <a:lvl2pPr marL="742950" indent="-285750">
-              <a:spcBef>
-                <a:spcPct val="20000"/>
-              </a:spcBef>
-              <a:defRPr sz="2800">
-                <a:solidFill>
-                  <a:schemeClr val="tx1"/>
-                </a:solidFill>
-                <a:latin typeface="Arial" panose="020B0604020202020204" pitchFamily="34" charset="0"/>
-              </a:defRPr>
-            </a:lvl2pPr>
-            <a:lvl3pPr marL="1143000" indent="-228600">
-              <a:spcBef>
-                <a:spcPct val="20000"/>
-              </a:spcBef>
-              <a:buChar char="•"/>
-              <a:defRPr sz="2400">
-                <a:solidFill>
-                  <a:schemeClr val="tx1"/>
-                </a:solidFill>
-                <a:latin typeface="Arial" panose="020B0604020202020204" pitchFamily="34" charset="0"/>
-              </a:defRPr>
-            </a:lvl3pPr>
-            <a:lvl4pPr marL="1600200" indent="-228600">
-              <a:spcBef>
-                <a:spcPct val="20000"/>
-              </a:spcBef>
-              <a:buChar char="–"/>
-              <a:defRPr sz="2000">
-                <a:solidFill>
-                  <a:schemeClr val="tx1"/>
-                </a:solidFill>
-                <a:latin typeface="Arial" panose="020B0604020202020204" pitchFamily="34" charset="0"/>
-              </a:defRPr>
-            </a:lvl4pPr>
-            <a:lvl5pPr marL="2057400" indent="-228600">
-              <a:spcBef>
-                <a:spcPct val="20000"/>
-              </a:spcBef>
-              <a:buChar char="»"/>
-              <a:defRPr sz="2000">
-                <a:solidFill>
-                  <a:schemeClr val="tx1"/>
-                </a:solidFill>
-                <a:latin typeface="Arial" panose="020B0604020202020204" pitchFamily="34" charset="0"/>
-              </a:defRPr>
-            </a:lvl5pPr>
-            <a:lvl6pPr marL="2514600" indent="-228600" eaLnBrk="0" fontAlgn="base" hangingPunct="0">
-              <a:spcBef>
-                <a:spcPct val="20000"/>
-              </a:spcBef>
-              <a:spcAft>
-                <a:spcPct val="0"/>
-              </a:spcAft>
-              <a:buChar char="»"/>
-              <a:defRPr sz="2000">
-                <a:solidFill>
-                  <a:schemeClr val="tx1"/>
-                </a:solidFill>
-                <a:latin typeface="Arial" panose="020B0604020202020204" pitchFamily="34" charset="0"/>
-              </a:defRPr>
-            </a:lvl6pPr>
-            <a:lvl7pPr marL="2971800" indent="-228600" eaLnBrk="0" fontAlgn="base" hangingPunct="0">
-              <a:spcBef>
-                <a:spcPct val="20000"/>
-              </a:spcBef>
-              <a:spcAft>
-                <a:spcPct val="0"/>
-              </a:spcAft>
-              <a:buChar char="»"/>
-              <a:defRPr sz="2000">
-                <a:solidFill>
-                  <a:schemeClr val="tx1"/>
-                </a:solidFill>
-                <a:latin typeface="Arial" panose="020B0604020202020204" pitchFamily="34" charset="0"/>
-              </a:defRPr>
-            </a:lvl7pPr>
-            <a:lvl8pPr marL="3429000" indent="-228600" eaLnBrk="0" fontAlgn="base" hangingPunct="0">
-              <a:spcBef>
-                <a:spcPct val="20000"/>
-              </a:spcBef>
-              <a:spcAft>
-                <a:spcPct val="0"/>
-              </a:spcAft>
-              <a:buChar char="»"/>
-              <a:defRPr sz="2000">
-                <a:solidFill>
-                  <a:schemeClr val="tx1"/>
-                </a:solidFill>
-                <a:latin typeface="Arial" panose="020B0604020202020204" pitchFamily="34" charset="0"/>
-              </a:defRPr>
-            </a:lvl8pPr>
-            <a:lvl9pPr marL="3886200" indent="-228600" eaLnBrk="0" fontAlgn="base" hangingPunct="0">
-              <a:spcBef>
-                <a:spcPct val="20000"/>
-              </a:spcBef>
-              <a:spcAft>
-                <a:spcPct val="0"/>
-              </a:spcAft>
-              <a:buChar char="»"/>
-              <a:defRPr sz="2000">
-                <a:solidFill>
-                  <a:schemeClr val="tx1"/>
-                </a:solidFill>
-                <a:latin typeface="Arial" panose="020B0604020202020204" pitchFamily="34" charset="0"/>
-              </a:defRPr>
-            </a:lvl9pPr>
-          </a:lstStyle>
-          <a:p>
-            <a:pPr>
-              <a:buNone/>
-            </a:pPr>
-            <a:r>
-              <a:rPr lang="en-US" sz="1100" b="0" dirty="0">
-                <a:solidFill>
-                  <a:srgbClr val="6A9955"/>
-                </a:solidFill>
-                <a:effectLst/>
-                <a:latin typeface="Consolas" panose="020B0609020204030204" pitchFamily="49" charset="0"/>
-              </a:rPr>
-              <a:t># slopeTry.py</a:t>
-            </a:r>
-            <a:endParaRPr lang="en-US" sz="1100" b="0" dirty="0">
-              <a:solidFill>
-                <a:srgbClr val="D4D4D4"/>
-              </a:solidFill>
-              <a:effectLst/>
-              <a:latin typeface="Consolas" panose="020B0609020204030204" pitchFamily="49" charset="0"/>
-            </a:endParaRPr>
-          </a:p>
-          <a:p>
-            <a:pPr>
-              <a:buNone/>
-            </a:pPr>
-            <a:r>
-              <a:rPr lang="en-US" sz="1100" b="0" dirty="0">
-                <a:solidFill>
-                  <a:srgbClr val="569CD6"/>
-                </a:solidFill>
-                <a:effectLst/>
-                <a:latin typeface="Consolas" panose="020B0609020204030204" pitchFamily="49" charset="0"/>
-              </a:rPr>
-              <a:t>import</a:t>
-            </a:r>
-            <a:r>
-              <a:rPr lang="en-US" sz="1100" b="0" dirty="0">
-                <a:solidFill>
-                  <a:srgbClr val="D4D4D4"/>
-                </a:solidFill>
-                <a:effectLst/>
-                <a:latin typeface="Consolas" panose="020B0609020204030204" pitchFamily="49" charset="0"/>
-              </a:rPr>
-              <a:t> sys </a:t>
-            </a:r>
-          </a:p>
-          <a:p>
-            <a:pPr>
-              <a:buNone/>
-            </a:pPr>
-            <a:r>
-              <a:rPr lang="en-US" sz="1100" b="0" dirty="0">
-                <a:solidFill>
-                  <a:srgbClr val="D4D4D4"/>
-                </a:solidFill>
-                <a:effectLst/>
-                <a:latin typeface="Consolas" panose="020B0609020204030204" pitchFamily="49" charset="0"/>
-              </a:rPr>
-              <a:t>rise = </a:t>
-            </a:r>
-            <a:r>
-              <a:rPr lang="en-US" sz="1100" b="0" dirty="0" err="1">
-                <a:solidFill>
-                  <a:srgbClr val="D4D4D4"/>
-                </a:solidFill>
-                <a:effectLst/>
-                <a:latin typeface="Consolas" panose="020B0609020204030204" pitchFamily="49" charset="0"/>
-              </a:rPr>
-              <a:t>sys.argv</a:t>
-            </a:r>
-            <a:r>
-              <a:rPr lang="en-US" sz="1100" b="0" dirty="0">
-                <a:solidFill>
-                  <a:srgbClr val="D4D4D4"/>
-                </a:solidFill>
-                <a:effectLst/>
-                <a:latin typeface="Consolas" panose="020B0609020204030204" pitchFamily="49" charset="0"/>
-              </a:rPr>
-              <a:t>[</a:t>
-            </a:r>
-            <a:r>
-              <a:rPr lang="en-US" sz="1100" b="0" dirty="0">
-                <a:solidFill>
-                  <a:srgbClr val="B5CEA8"/>
-                </a:solidFill>
-                <a:effectLst/>
-                <a:latin typeface="Consolas" panose="020B0609020204030204" pitchFamily="49" charset="0"/>
-              </a:rPr>
-              <a:t>1</a:t>
-            </a:r>
-            <a:r>
-              <a:rPr lang="en-US" sz="1100" b="0" dirty="0">
-                <a:solidFill>
-                  <a:srgbClr val="D4D4D4"/>
-                </a:solidFill>
-                <a:effectLst/>
-                <a:latin typeface="Consolas" panose="020B0609020204030204" pitchFamily="49" charset="0"/>
-              </a:rPr>
-              <a:t>] </a:t>
-            </a:r>
-          </a:p>
-          <a:p>
-            <a:pPr>
-              <a:buNone/>
-            </a:pPr>
-            <a:r>
-              <a:rPr lang="en-US" sz="1100" b="0" dirty="0">
-                <a:solidFill>
-                  <a:srgbClr val="D4D4D4"/>
-                </a:solidFill>
-                <a:effectLst/>
-                <a:latin typeface="Consolas" panose="020B0609020204030204" pitchFamily="49" charset="0"/>
-              </a:rPr>
-              <a:t>run = </a:t>
-            </a:r>
-            <a:r>
-              <a:rPr lang="en-US" sz="1100" b="0" dirty="0" err="1">
-                <a:solidFill>
-                  <a:srgbClr val="D4D4D4"/>
-                </a:solidFill>
-                <a:effectLst/>
-                <a:latin typeface="Consolas" panose="020B0609020204030204" pitchFamily="49" charset="0"/>
-              </a:rPr>
-              <a:t>sys.argv</a:t>
-            </a:r>
-            <a:r>
-              <a:rPr lang="en-US" sz="1100" b="0" dirty="0">
-                <a:solidFill>
-                  <a:srgbClr val="D4D4D4"/>
-                </a:solidFill>
-                <a:effectLst/>
-                <a:latin typeface="Consolas" panose="020B0609020204030204" pitchFamily="49" charset="0"/>
-              </a:rPr>
-              <a:t>[</a:t>
-            </a:r>
-            <a:r>
-              <a:rPr lang="en-US" sz="1100" b="0" dirty="0">
-                <a:solidFill>
-                  <a:srgbClr val="B5CEA8"/>
-                </a:solidFill>
-                <a:effectLst/>
-                <a:latin typeface="Consolas" panose="020B0609020204030204" pitchFamily="49" charset="0"/>
-              </a:rPr>
-              <a:t>2</a:t>
-            </a:r>
-            <a:r>
-              <a:rPr lang="en-US" sz="1100" b="0" dirty="0">
-                <a:solidFill>
-                  <a:srgbClr val="D4D4D4"/>
-                </a:solidFill>
-                <a:effectLst/>
-                <a:latin typeface="Consolas" panose="020B0609020204030204" pitchFamily="49" charset="0"/>
-              </a:rPr>
-              <a:t>]</a:t>
-            </a:r>
-          </a:p>
-          <a:p>
-            <a:pPr>
-              <a:buNone/>
-            </a:pPr>
-            <a:r>
-              <a:rPr lang="en-US" sz="1100" b="0" dirty="0">
-                <a:solidFill>
-                  <a:srgbClr val="569CD6"/>
-                </a:solidFill>
-                <a:effectLst/>
-                <a:latin typeface="Consolas" panose="020B0609020204030204" pitchFamily="49" charset="0"/>
-              </a:rPr>
-              <a:t>try</a:t>
-            </a:r>
-            <a:r>
-              <a:rPr lang="en-US" sz="1100" b="0" dirty="0">
-                <a:solidFill>
-                  <a:srgbClr val="D4D4D4"/>
-                </a:solidFill>
-                <a:effectLst/>
-                <a:latin typeface="Consolas" panose="020B0609020204030204" pitchFamily="49" charset="0"/>
-              </a:rPr>
-              <a:t>:</a:t>
-            </a:r>
-          </a:p>
-          <a:p>
-            <a:pPr>
-              <a:buNone/>
-            </a:pPr>
-            <a:r>
-              <a:rPr lang="en-US" sz="1100" b="0" dirty="0">
-                <a:solidFill>
-                  <a:srgbClr val="D4D4D4"/>
-                </a:solidFill>
-                <a:effectLst/>
-                <a:latin typeface="Consolas" panose="020B0609020204030204" pitchFamily="49" charset="0"/>
-              </a:rPr>
-              <a:t>    print (</a:t>
-            </a:r>
-            <a:r>
-              <a:rPr lang="en-US" sz="1100" b="0" dirty="0" err="1">
-                <a:solidFill>
-                  <a:srgbClr val="569CD6"/>
-                </a:solidFill>
-                <a:effectLst/>
-                <a:latin typeface="Consolas" panose="020B0609020204030204" pitchFamily="49" charset="0"/>
-              </a:rPr>
-              <a:t>f</a:t>
-            </a:r>
-            <a:r>
-              <a:rPr lang="en-US" sz="1100" b="0" dirty="0" err="1">
-                <a:solidFill>
-                  <a:srgbClr val="CE9178"/>
-                </a:solidFill>
-                <a:effectLst/>
-                <a:latin typeface="Consolas" panose="020B0609020204030204" pitchFamily="49" charset="0"/>
-              </a:rPr>
-              <a:t>"Rise</a:t>
-            </a:r>
-            <a:r>
-              <a:rPr lang="en-US" sz="1100" b="0" dirty="0">
-                <a:solidFill>
-                  <a:srgbClr val="CE9178"/>
-                </a:solidFill>
-                <a:effectLst/>
-                <a:latin typeface="Consolas" panose="020B0609020204030204" pitchFamily="49" charset="0"/>
-              </a:rPr>
-              <a:t>: </a:t>
-            </a:r>
-            <a:r>
-              <a:rPr lang="en-US" sz="1100" b="0" dirty="0">
-                <a:solidFill>
-                  <a:srgbClr val="D4D4D4"/>
-                </a:solidFill>
-                <a:effectLst/>
-                <a:latin typeface="Consolas" panose="020B0609020204030204" pitchFamily="49" charset="0"/>
-              </a:rPr>
-              <a:t>{rise}</a:t>
-            </a:r>
-            <a:r>
-              <a:rPr lang="en-US" sz="1100" b="0" dirty="0">
-                <a:solidFill>
-                  <a:srgbClr val="CE9178"/>
-                </a:solidFill>
-                <a:effectLst/>
-                <a:latin typeface="Consolas" panose="020B0609020204030204" pitchFamily="49" charset="0"/>
-              </a:rPr>
-              <a:t>   Run: </a:t>
-            </a:r>
-            <a:r>
-              <a:rPr lang="en-US" sz="1100" b="0" dirty="0">
-                <a:solidFill>
-                  <a:srgbClr val="D4D4D4"/>
-                </a:solidFill>
-                <a:effectLst/>
-                <a:latin typeface="Consolas" panose="020B0609020204030204" pitchFamily="49" charset="0"/>
-              </a:rPr>
-              <a:t>{run}</a:t>
-            </a:r>
-            <a:r>
-              <a:rPr lang="en-US" sz="1100" b="0" dirty="0">
-                <a:solidFill>
-                  <a:srgbClr val="CE9178"/>
-                </a:solidFill>
-                <a:effectLst/>
-                <a:latin typeface="Consolas" panose="020B0609020204030204" pitchFamily="49" charset="0"/>
-              </a:rPr>
-              <a:t>"</a:t>
-            </a:r>
-            <a:r>
-              <a:rPr lang="en-US" sz="1100" b="0" dirty="0">
-                <a:solidFill>
-                  <a:srgbClr val="D4D4D4"/>
-                </a:solidFill>
-                <a:effectLst/>
-                <a:latin typeface="Consolas" panose="020B0609020204030204" pitchFamily="49" charset="0"/>
-              </a:rPr>
-              <a:t>)</a:t>
-            </a:r>
-          </a:p>
-          <a:p>
-            <a:pPr>
-              <a:buNone/>
-            </a:pPr>
-            <a:r>
-              <a:rPr lang="en-US" sz="1100" b="0" dirty="0">
-                <a:solidFill>
-                  <a:srgbClr val="D4D4D4"/>
-                </a:solidFill>
-                <a:effectLst/>
-                <a:latin typeface="Consolas" panose="020B0609020204030204" pitchFamily="49" charset="0"/>
-              </a:rPr>
-              <a:t>    slope = float(rise)/float(run)</a:t>
-            </a:r>
-          </a:p>
-          <a:p>
-            <a:pPr>
-              <a:buNone/>
-            </a:pPr>
-            <a:r>
-              <a:rPr lang="en-US" sz="1100" b="0" dirty="0">
-                <a:solidFill>
-                  <a:srgbClr val="D4D4D4"/>
-                </a:solidFill>
-                <a:effectLst/>
-                <a:latin typeface="Consolas" panose="020B0609020204030204" pitchFamily="49" charset="0"/>
-              </a:rPr>
-              <a:t>    print(</a:t>
-            </a:r>
-            <a:r>
-              <a:rPr lang="en-US" sz="1100" b="0" dirty="0">
-                <a:solidFill>
-                  <a:srgbClr val="CE9178"/>
-                </a:solidFill>
-                <a:effectLst/>
-                <a:latin typeface="Consolas" panose="020B0609020204030204" pitchFamily="49" charset="0"/>
-              </a:rPr>
-              <a:t>"Slope = rise/run"</a:t>
-            </a:r>
-            <a:r>
-              <a:rPr lang="en-US" sz="1100" b="0" dirty="0">
-                <a:solidFill>
-                  <a:srgbClr val="D4D4D4"/>
-                </a:solidFill>
-                <a:effectLst/>
-                <a:latin typeface="Consolas" panose="020B0609020204030204" pitchFamily="49" charset="0"/>
-              </a:rPr>
-              <a:t>)</a:t>
-            </a:r>
-          </a:p>
-          <a:p>
-            <a:pPr>
-              <a:buNone/>
-            </a:pPr>
-            <a:r>
-              <a:rPr lang="en-US" sz="1100" b="0" dirty="0">
-                <a:solidFill>
-                  <a:srgbClr val="569CD6"/>
-                </a:solidFill>
-                <a:effectLst/>
-                <a:latin typeface="Consolas" panose="020B0609020204030204" pitchFamily="49" charset="0"/>
-              </a:rPr>
-              <a:t>except</a:t>
-            </a:r>
-            <a:r>
-              <a:rPr lang="en-US" sz="1100" b="0" dirty="0">
-                <a:solidFill>
-                  <a:srgbClr val="D4D4D4"/>
-                </a:solidFill>
-                <a:effectLst/>
-                <a:latin typeface="Consolas" panose="020B0609020204030204" pitchFamily="49" charset="0"/>
-              </a:rPr>
-              <a:t> </a:t>
-            </a:r>
-            <a:r>
-              <a:rPr lang="en-US" sz="1100" b="0" dirty="0" err="1">
-                <a:solidFill>
-                  <a:srgbClr val="D4D4D4"/>
-                </a:solidFill>
-                <a:effectLst/>
-                <a:latin typeface="Consolas" panose="020B0609020204030204" pitchFamily="49" charset="0"/>
-              </a:rPr>
-              <a:t>ZeroDivisionError</a:t>
-            </a:r>
-            <a:r>
-              <a:rPr lang="en-US" sz="1100" b="0" dirty="0">
-                <a:solidFill>
-                  <a:srgbClr val="D4D4D4"/>
-                </a:solidFill>
-                <a:effectLst/>
-                <a:latin typeface="Consolas" panose="020B0609020204030204" pitchFamily="49" charset="0"/>
-              </a:rPr>
-              <a:t>:</a:t>
-            </a:r>
-          </a:p>
-          <a:p>
-            <a:pPr>
-              <a:buNone/>
-            </a:pPr>
-            <a:r>
-              <a:rPr lang="en-US" sz="1100" b="0" dirty="0">
-                <a:solidFill>
-                  <a:srgbClr val="D4D4D4"/>
-                </a:solidFill>
-                <a:effectLst/>
-                <a:latin typeface="Consolas" panose="020B0609020204030204" pitchFamily="49" charset="0"/>
-              </a:rPr>
-              <a:t>    slope = </a:t>
-            </a:r>
-            <a:r>
-              <a:rPr lang="en-US" sz="1100" b="0" dirty="0">
-                <a:solidFill>
-                  <a:srgbClr val="CE9178"/>
-                </a:solidFill>
-                <a:effectLst/>
-                <a:latin typeface="Consolas" panose="020B0609020204030204" pitchFamily="49" charset="0"/>
-              </a:rPr>
-              <a:t>"Undefined (line is vertical) "</a:t>
-            </a:r>
-            <a:endParaRPr lang="en-US" sz="1100" b="0" dirty="0">
-              <a:solidFill>
-                <a:srgbClr val="D4D4D4"/>
-              </a:solidFill>
-              <a:effectLst/>
-              <a:latin typeface="Consolas" panose="020B0609020204030204" pitchFamily="49" charset="0"/>
-            </a:endParaRPr>
-          </a:p>
-          <a:p>
-            <a:pPr>
-              <a:buNone/>
-            </a:pPr>
-            <a:r>
-              <a:rPr lang="en-US" sz="1100" b="0" dirty="0">
-                <a:solidFill>
-                  <a:srgbClr val="569CD6"/>
-                </a:solidFill>
-                <a:effectLst/>
-                <a:latin typeface="Consolas" panose="020B0609020204030204" pitchFamily="49" charset="0"/>
-              </a:rPr>
-              <a:t>except</a:t>
-            </a:r>
-            <a:r>
-              <a:rPr lang="en-US" sz="1100" b="0" dirty="0">
-                <a:solidFill>
-                  <a:srgbClr val="D4D4D4"/>
-                </a:solidFill>
-                <a:effectLst/>
-                <a:latin typeface="Consolas" panose="020B0609020204030204" pitchFamily="49" charset="0"/>
-              </a:rPr>
-              <a:t> </a:t>
-            </a:r>
-            <a:r>
-              <a:rPr lang="en-US" sz="1100" b="0" dirty="0" err="1">
-                <a:solidFill>
-                  <a:srgbClr val="D4D4D4"/>
-                </a:solidFill>
-                <a:effectLst/>
-                <a:latin typeface="Consolas" panose="020B0609020204030204" pitchFamily="49" charset="0"/>
-              </a:rPr>
-              <a:t>ValueError</a:t>
-            </a:r>
-            <a:r>
-              <a:rPr lang="en-US" sz="1100" b="0" dirty="0">
-                <a:solidFill>
-                  <a:srgbClr val="D4D4D4"/>
-                </a:solidFill>
-                <a:effectLst/>
-                <a:latin typeface="Consolas" panose="020B0609020204030204" pitchFamily="49" charset="0"/>
-              </a:rPr>
-              <a:t>:</a:t>
-            </a:r>
-          </a:p>
-          <a:p>
-            <a:pPr>
-              <a:buNone/>
-            </a:pPr>
-            <a:r>
-              <a:rPr lang="en-US" sz="1100" b="0" dirty="0">
-                <a:solidFill>
-                  <a:srgbClr val="D4D4D4"/>
-                </a:solidFill>
-                <a:effectLst/>
-                <a:latin typeface="Consolas" panose="020B0609020204030204" pitchFamily="49" charset="0"/>
-              </a:rPr>
-              <a:t>    print(</a:t>
-            </a:r>
-            <a:r>
-              <a:rPr lang="en-US" sz="1100" b="0" dirty="0">
-                <a:solidFill>
-                  <a:srgbClr val="CE9178"/>
-                </a:solidFill>
-                <a:effectLst/>
-                <a:latin typeface="Consolas" panose="020B0609020204030204" pitchFamily="49" charset="0"/>
-              </a:rPr>
-              <a:t>"Usage: &lt;numeric rise&gt; &lt;numeric run&gt;"</a:t>
-            </a:r>
-            <a:r>
-              <a:rPr lang="en-US" sz="1100" b="0" dirty="0">
-                <a:solidFill>
-                  <a:srgbClr val="D4D4D4"/>
-                </a:solidFill>
-                <a:effectLst/>
-                <a:latin typeface="Consolas" panose="020B0609020204030204" pitchFamily="49" charset="0"/>
-              </a:rPr>
-              <a:t>)</a:t>
-            </a:r>
-          </a:p>
-          <a:p>
-            <a:pPr>
-              <a:buNone/>
-            </a:pPr>
-            <a:r>
-              <a:rPr lang="en-US" sz="1100" b="0" dirty="0">
-                <a:solidFill>
-                  <a:srgbClr val="D4D4D4"/>
-                </a:solidFill>
-                <a:effectLst/>
-                <a:latin typeface="Consolas" panose="020B0609020204030204" pitchFamily="49" charset="0"/>
-              </a:rPr>
-              <a:t>    slope = </a:t>
-            </a:r>
-            <a:r>
-              <a:rPr lang="en-US" sz="1100" b="0" dirty="0">
-                <a:solidFill>
-                  <a:srgbClr val="CE9178"/>
-                </a:solidFill>
-                <a:effectLst/>
-                <a:latin typeface="Consolas" panose="020B0609020204030204" pitchFamily="49" charset="0"/>
-              </a:rPr>
-              <a:t>"Not found"</a:t>
-            </a:r>
-            <a:endParaRPr lang="en-US" sz="1100" b="0" dirty="0">
-              <a:solidFill>
-                <a:srgbClr val="D4D4D4"/>
-              </a:solidFill>
-              <a:effectLst/>
-              <a:latin typeface="Consolas" panose="020B0609020204030204" pitchFamily="49" charset="0"/>
-            </a:endParaRPr>
-          </a:p>
-          <a:p>
-            <a:pPr>
-              <a:buNone/>
-            </a:pPr>
-            <a:r>
-              <a:rPr lang="en-US" sz="1100" b="0" dirty="0">
-                <a:solidFill>
-                  <a:srgbClr val="D4D4D4"/>
-                </a:solidFill>
-                <a:effectLst/>
-                <a:latin typeface="Consolas" panose="020B0609020204030204" pitchFamily="49" charset="0"/>
-              </a:rPr>
-              <a:t>print (</a:t>
-            </a:r>
-            <a:r>
-              <a:rPr lang="en-US" sz="1100" b="0" dirty="0" err="1">
-                <a:solidFill>
-                  <a:srgbClr val="569CD6"/>
-                </a:solidFill>
-                <a:effectLst/>
-                <a:latin typeface="Consolas" panose="020B0609020204030204" pitchFamily="49" charset="0"/>
-              </a:rPr>
-              <a:t>f</a:t>
-            </a:r>
-            <a:r>
-              <a:rPr lang="en-US" sz="1100" b="0" dirty="0" err="1">
-                <a:solidFill>
-                  <a:srgbClr val="CE9178"/>
-                </a:solidFill>
-                <a:effectLst/>
-                <a:latin typeface="Consolas" panose="020B0609020204030204" pitchFamily="49" charset="0"/>
-              </a:rPr>
-              <a:t>"Slope</a:t>
-            </a:r>
-            <a:r>
-              <a:rPr lang="en-US" sz="1100" b="0" dirty="0">
-                <a:solidFill>
-                  <a:srgbClr val="CE9178"/>
-                </a:solidFill>
-                <a:effectLst/>
-                <a:latin typeface="Consolas" panose="020B0609020204030204" pitchFamily="49" charset="0"/>
-              </a:rPr>
-              <a:t>: </a:t>
-            </a:r>
-            <a:r>
-              <a:rPr lang="en-US" sz="1100" b="0" dirty="0">
-                <a:solidFill>
-                  <a:srgbClr val="D4D4D4"/>
-                </a:solidFill>
-                <a:effectLst/>
-                <a:latin typeface="Consolas" panose="020B0609020204030204" pitchFamily="49" charset="0"/>
-              </a:rPr>
-              <a:t>{slope}</a:t>
-            </a:r>
-            <a:r>
-              <a:rPr lang="en-US" sz="1100" b="0" dirty="0">
-                <a:solidFill>
-                  <a:srgbClr val="CE9178"/>
-                </a:solidFill>
-                <a:effectLst/>
-                <a:latin typeface="Consolas" panose="020B0609020204030204" pitchFamily="49" charset="0"/>
-              </a:rPr>
-              <a:t>"</a:t>
-            </a:r>
-            <a:r>
-              <a:rPr lang="en-US" sz="1100" b="0" dirty="0">
-                <a:solidFill>
-                  <a:srgbClr val="D4D4D4"/>
-                </a:solidFill>
-                <a:effectLst/>
-                <a:latin typeface="Consolas" panose="020B0609020204030204" pitchFamily="49" charset="0"/>
-              </a:rPr>
-              <a:t>)</a:t>
-            </a:r>
-          </a:p>
-        </p:txBody>
-      </p:sp>
-      <p:sp>
-        <p:nvSpPr>
-          <p:cNvPr id="3" name="TextBox 2">
-            <a:extLst>
-              <a:ext uri="{FF2B5EF4-FFF2-40B4-BE49-F238E27FC236}">
-                <a16:creationId xmlns:a16="http://schemas.microsoft.com/office/drawing/2014/main" id="{0234EA5E-4FFC-867D-B4FC-BAABEF7C353E}"/>
-              </a:ext>
-            </a:extLst>
-          </p:cNvPr>
-          <p:cNvSpPr txBox="1"/>
-          <p:nvPr/>
-        </p:nvSpPr>
-        <p:spPr>
-          <a:xfrm>
-            <a:off x="490622" y="914400"/>
-            <a:ext cx="7891378" cy="3693319"/>
-          </a:xfrm>
-          <a:prstGeom prst="rect">
-            <a:avLst/>
-          </a:prstGeom>
-          <a:noFill/>
-        </p:spPr>
-        <p:txBody>
-          <a:bodyPr wrap="square">
-            <a:spAutoFit/>
-          </a:bodyPr>
-          <a:lstStyle/>
-          <a:p>
-            <a:pPr algn="l">
-              <a:buFont typeface="+mj-lt"/>
-              <a:buAutoNum type="arabicPeriod"/>
-            </a:pPr>
-            <a:r>
-              <a:rPr lang="en-US" dirty="0">
-                <a:solidFill>
-                  <a:srgbClr val="B8B8B8"/>
-                </a:solidFill>
-                <a:latin typeface="Open Sans" panose="020B0606030504020204" pitchFamily="34" charset="0"/>
-              </a:rPr>
-              <a:t> Open sample script slopeTry.py</a:t>
-            </a:r>
-          </a:p>
-          <a:p>
-            <a:pPr algn="l"/>
-            <a:r>
-              <a:rPr lang="en-US" dirty="0">
-                <a:solidFill>
-                  <a:srgbClr val="B8B8B8"/>
-                </a:solidFill>
-                <a:latin typeface="Open Sans" panose="020B0606030504020204" pitchFamily="34" charset="0"/>
-              </a:rPr>
-              <a:t>(C:\</a:t>
-            </a:r>
-            <a:r>
-              <a:rPr lang="en-US" dirty="0" err="1">
-                <a:solidFill>
-                  <a:srgbClr val="B8B8B8"/>
-                </a:solidFill>
-                <a:latin typeface="Open Sans" panose="020B0606030504020204" pitchFamily="34" charset="0"/>
-              </a:rPr>
-              <a:t>gispy</a:t>
-            </a:r>
-            <a:r>
-              <a:rPr lang="en-US" dirty="0">
-                <a:solidFill>
-                  <a:srgbClr val="B8B8B8"/>
-                </a:solidFill>
-                <a:latin typeface="Open Sans" panose="020B0606030504020204" pitchFamily="34" charset="0"/>
-              </a:rPr>
-              <a:t>\</a:t>
-            </a:r>
-            <a:r>
-              <a:rPr lang="en-US" dirty="0" err="1">
-                <a:solidFill>
-                  <a:srgbClr val="B8B8B8"/>
-                </a:solidFill>
-                <a:latin typeface="Open Sans" panose="020B0606030504020204" pitchFamily="34" charset="0"/>
-              </a:rPr>
-              <a:t>sample_scripts</a:t>
-            </a:r>
-            <a:r>
-              <a:rPr lang="en-US" dirty="0">
-                <a:solidFill>
-                  <a:srgbClr val="B8B8B8"/>
-                </a:solidFill>
-                <a:latin typeface="Open Sans" panose="020B0606030504020204" pitchFamily="34" charset="0"/>
-              </a:rPr>
-              <a:t>\ch14)</a:t>
-            </a:r>
-          </a:p>
-          <a:p>
-            <a:pPr algn="l"/>
-            <a:endParaRPr lang="en-US" dirty="0">
-              <a:solidFill>
-                <a:srgbClr val="B8B8B8"/>
-              </a:solidFill>
-              <a:latin typeface="Open Sans" panose="020B0606030504020204" pitchFamily="34" charset="0"/>
-            </a:endParaRPr>
-          </a:p>
-          <a:p>
-            <a:pPr algn="l"/>
-            <a:r>
-              <a:rPr lang="en-US" b="0" i="0" dirty="0">
-                <a:solidFill>
-                  <a:srgbClr val="B8B8B8"/>
-                </a:solidFill>
-                <a:effectLst/>
-                <a:latin typeface="Open Sans" panose="020B0606030504020204" pitchFamily="34" charset="0"/>
-              </a:rPr>
-              <a:t>2. </a:t>
-            </a:r>
-            <a:r>
-              <a:rPr lang="en-US" dirty="0">
-                <a:solidFill>
-                  <a:srgbClr val="B8B8B8"/>
-                </a:solidFill>
-                <a:latin typeface="Open Sans" panose="020B0606030504020204" pitchFamily="34" charset="0"/>
-              </a:rPr>
-              <a:t>S</a:t>
-            </a:r>
-            <a:r>
-              <a:rPr lang="en-US" b="0" i="0" dirty="0">
-                <a:solidFill>
-                  <a:srgbClr val="B8B8B8"/>
-                </a:solidFill>
-                <a:effectLst/>
-                <a:latin typeface="Open Sans" panose="020B0606030504020204" pitchFamily="34" charset="0"/>
-              </a:rPr>
-              <a:t>tep through in the debugger </a:t>
-            </a:r>
-            <a:r>
-              <a:rPr lang="en-US" dirty="0">
-                <a:solidFill>
-                  <a:srgbClr val="B8B8B8"/>
-                </a:solidFill>
-                <a:latin typeface="Open Sans" panose="020B0606030504020204" pitchFamily="34" charset="0"/>
-              </a:rPr>
-              <a:t>with four use</a:t>
-            </a:r>
-            <a:r>
-              <a:rPr lang="en-US" b="0" i="0" dirty="0">
-                <a:solidFill>
-                  <a:srgbClr val="B8B8B8"/>
-                </a:solidFill>
-                <a:effectLst/>
-                <a:latin typeface="Open Sans" panose="020B0606030504020204" pitchFamily="34" charset="0"/>
-              </a:rPr>
-              <a:t> cases (a-d below). Note the behavior in each case.  </a:t>
-            </a:r>
-          </a:p>
-          <a:p>
-            <a:pPr algn="l"/>
-            <a:endParaRPr lang="en-US" dirty="0">
-              <a:solidFill>
-                <a:srgbClr val="B8B8B8"/>
-              </a:solidFill>
-              <a:latin typeface="Open Sans" panose="020B0606030504020204" pitchFamily="34" charset="0"/>
-            </a:endParaRPr>
-          </a:p>
-          <a:p>
-            <a:pPr algn="l"/>
-            <a:r>
-              <a:rPr lang="en-US" b="0" i="0" dirty="0">
-                <a:solidFill>
-                  <a:srgbClr val="B8B8B8"/>
-                </a:solidFill>
-                <a:effectLst/>
-                <a:latin typeface="Open Sans" panose="020B0606030504020204" pitchFamily="34" charset="0"/>
-              </a:rPr>
-              <a:t>User arguments:</a:t>
-            </a:r>
-          </a:p>
-          <a:p>
-            <a:pPr algn="l"/>
-            <a:r>
-              <a:rPr lang="en-US" b="0" i="0" dirty="0">
-                <a:solidFill>
-                  <a:srgbClr val="B8B8B8"/>
-                </a:solidFill>
-                <a:effectLst/>
-                <a:latin typeface="Open Sans" panose="020B0606030504020204" pitchFamily="34" charset="0"/>
-              </a:rPr>
-              <a:t>a</a:t>
-            </a:r>
-            <a:r>
-              <a:rPr lang="en-US" dirty="0">
-                <a:solidFill>
-                  <a:srgbClr val="B8B8B8"/>
-                </a:solidFill>
-                <a:latin typeface="Open Sans" panose="020B0606030504020204" pitchFamily="34" charset="0"/>
-              </a:rPr>
-              <a:t>)</a:t>
-            </a:r>
-            <a:r>
-              <a:rPr lang="en-US" b="0" i="0" dirty="0">
-                <a:solidFill>
-                  <a:srgbClr val="B8B8B8"/>
-                </a:solidFill>
-                <a:effectLst/>
-                <a:latin typeface="Open Sans" panose="020B0606030504020204" pitchFamily="34" charset="0"/>
-              </a:rPr>
-              <a:t>  12  6</a:t>
-            </a:r>
-          </a:p>
-          <a:p>
-            <a:pPr algn="l"/>
-            <a:r>
-              <a:rPr lang="en-US" b="0" i="0" dirty="0">
-                <a:solidFill>
-                  <a:srgbClr val="B8B8B8"/>
-                </a:solidFill>
-                <a:effectLst/>
-                <a:latin typeface="Open Sans" panose="020B0606030504020204" pitchFamily="34" charset="0"/>
-              </a:rPr>
-              <a:t>b)  12  0</a:t>
-            </a:r>
-          </a:p>
-          <a:p>
-            <a:pPr algn="l"/>
-            <a:r>
-              <a:rPr lang="en-US" b="0" i="0" dirty="0">
-                <a:solidFill>
-                  <a:srgbClr val="B8B8B8"/>
-                </a:solidFill>
-                <a:effectLst/>
-                <a:latin typeface="Open Sans" panose="020B0606030504020204" pitchFamily="34" charset="0"/>
-              </a:rPr>
-              <a:t>c)   twelve six</a:t>
-            </a:r>
-          </a:p>
-          <a:p>
-            <a:pPr algn="l"/>
-            <a:r>
-              <a:rPr lang="en-US" b="0" i="0" dirty="0">
-                <a:solidFill>
-                  <a:srgbClr val="B8B8B8"/>
-                </a:solidFill>
-                <a:effectLst/>
-                <a:latin typeface="Open Sans" panose="020B0606030504020204" pitchFamily="34" charset="0"/>
-              </a:rPr>
-              <a:t>d)  12</a:t>
-            </a:r>
-            <a:br>
-              <a:rPr lang="en-US" b="1" i="0" dirty="0">
-                <a:solidFill>
-                  <a:srgbClr val="B8B8B8"/>
-                </a:solidFill>
-                <a:effectLst/>
-                <a:latin typeface="Open Sans" panose="020B0606030504020204" pitchFamily="34" charset="0"/>
-              </a:rPr>
-            </a:br>
-            <a:br>
-              <a:rPr lang="en-US" b="1" i="0" dirty="0">
-                <a:solidFill>
-                  <a:srgbClr val="B8B8B8"/>
-                </a:solidFill>
-                <a:effectLst/>
-                <a:latin typeface="Open Sans" panose="020B0606030504020204" pitchFamily="34" charset="0"/>
-              </a:rPr>
-            </a:br>
-            <a:endParaRPr lang="en-US" b="0" i="0" dirty="0">
-              <a:solidFill>
-                <a:srgbClr val="B8B8B8"/>
-              </a:solidFill>
-              <a:effectLst/>
-              <a:latin typeface="Open Sans" panose="020B0606030504020204" pitchFamily="34" charset="0"/>
-            </a:endParaRPr>
-          </a:p>
-        </p:txBody>
-      </p:sp>
-    </p:spTree>
-    <p:extLst>
-      <p:ext uri="{BB962C8B-B14F-4D97-AF65-F5344CB8AC3E}">
-        <p14:creationId xmlns:p14="http://schemas.microsoft.com/office/powerpoint/2010/main" val="2930008104"/>
       </p:ext>
     </p:extLst>
   </p:cSld>
@@ -18880,53 +17947,17 @@
           <a:chExt cx="0" cy="0"/>
         </a:xfrm>
       </p:grpSpPr>
-      <p:pic>
-        <p:nvPicPr>
-          <p:cNvPr id="7" name="Picture 6" descr="A picture containing diagram&#10;&#10;Description automatically generated">
+      <p:sp>
+        <p:nvSpPr>
+          <p:cNvPr id="13315" name="Rectangle 2">
             <a:extLst>
               <a:ext uri="{FF2B5EF4-FFF2-40B4-BE49-F238E27FC236}">
-                <a16:creationId xmlns:a16="http://schemas.microsoft.com/office/drawing/2014/main" id="{63013A48-177C-684B-0287-D16FB97BFE6C}"/>
-              </a:ext>
-            </a:extLst>
-          </p:cNvPr>
-          <p:cNvPicPr>
-            <a:picLocks noChangeAspect="1"/>
-          </p:cNvPicPr>
-          <p:nvPr/>
-        </p:nvPicPr>
-        <p:blipFill>
-          <a:blip r:embed="rId2">
-            <a:extLst>
-              <a:ext uri="{28A0092B-C50C-407E-A947-70E740481C1C}">
-                <a14:useLocalDpi xmlns:a14="http://schemas.microsoft.com/office/drawing/2010/main" val="0"/>
-              </a:ext>
-            </a:extLst>
-          </a:blip>
-          <a:stretch>
-            <a:fillRect/>
-          </a:stretch>
-        </p:blipFill>
-        <p:spPr>
-          <a:xfrm>
-            <a:off x="4953000" y="914400"/>
-            <a:ext cx="3908081" cy="5268138"/>
-          </a:xfrm>
-          <a:prstGeom prst="rect">
-            <a:avLst/>
-          </a:prstGeom>
-        </p:spPr>
-      </p:pic>
-      <p:sp>
-        <p:nvSpPr>
-          <p:cNvPr id="11266" name="Title 1">
-            <a:extLst>
-              <a:ext uri="{FF2B5EF4-FFF2-40B4-BE49-F238E27FC236}">
-                <a16:creationId xmlns:a16="http://schemas.microsoft.com/office/drawing/2014/main" id="{5FB49DC6-DEC6-A3B3-0ED2-BB8B65FA40CC}"/>
+                <a16:creationId xmlns:a16="http://schemas.microsoft.com/office/drawing/2014/main" id="{DCC1ED6B-0C5B-73D1-0709-68D3E9686B53}"/>
               </a:ext>
             </a:extLst>
           </p:cNvPr>
           <p:cNvSpPr>
-            <a:spLocks noGrp="1"/>
+            <a:spLocks noGrp="1" noChangeArrowheads="1"/>
           </p:cNvSpPr>
           <p:nvPr>
             <p:ph type="title"/>
@@ -18937,16 +17968,891 @@
           <a:bodyPr/>
           <a:lstStyle/>
           <a:p>
+            <a:pPr eaLnBrk="1" hangingPunct="1">
+              <a:defRPr/>
+            </a:pPr>
+            <a:r>
+              <a:rPr lang="en-US" altLang="en-US" sz="3200" dirty="0"/>
+              <a:t>Flow description </a:t>
+            </a:r>
+          </a:p>
+        </p:txBody>
+      </p:sp>
+      <p:sp>
+        <p:nvSpPr>
+          <p:cNvPr id="16388" name="Rectangle 3">
+            <a:extLst>
+              <a:ext uri="{FF2B5EF4-FFF2-40B4-BE49-F238E27FC236}">
+                <a16:creationId xmlns:a16="http://schemas.microsoft.com/office/drawing/2014/main" id="{C010A1E0-19D2-CD18-797E-14EAF6E322A5}"/>
+              </a:ext>
+            </a:extLst>
+          </p:cNvPr>
+          <p:cNvSpPr>
+            <a:spLocks noGrp="1" noChangeArrowheads="1"/>
+          </p:cNvSpPr>
+          <p:nvPr>
+            <p:ph type="body" idx="1"/>
+          </p:nvPr>
+        </p:nvSpPr>
+        <p:spPr/>
+        <p:txBody>
+          <a:bodyPr/>
+          <a:lstStyle/>
+          <a:p>
+            <a:pPr eaLnBrk="1" hangingPunct="1"/>
+            <a:r>
+              <a:rPr lang="en-US" altLang="en-US" sz="1800" dirty="0"/>
+              <a:t>If an exception occurs during execution of the try clause, the rest of the clause is skipped. Then if its type matches the exception named after the except keyword, the except clause is executed, and then execution continues after the try statement. </a:t>
+            </a:r>
+          </a:p>
+          <a:p>
+            <a:pPr eaLnBrk="1" hangingPunct="1"/>
+            <a:endParaRPr lang="en-US" altLang="en-US" sz="1800" dirty="0"/>
+          </a:p>
+          <a:p>
+            <a:pPr eaLnBrk="1" hangingPunct="1"/>
+            <a:r>
+              <a:rPr lang="en-US" altLang="en-US" sz="1800" dirty="0"/>
+              <a:t>If an exception occurs which does not match the exception named in the except clause, it is passed on to outer try statements; if no handler is found, it is an unhandled </a:t>
+            </a:r>
+            <a:r>
+              <a:rPr lang="en-US" altLang="en-US" sz="1800" i="1" dirty="0"/>
+              <a:t>exception</a:t>
+            </a:r>
+            <a:r>
+              <a:rPr lang="en-US" altLang="en-US" sz="1800" dirty="0"/>
+              <a:t> and execution stops with a Traceback message.</a:t>
+            </a:r>
+            <a:endParaRPr lang="en-US" altLang="en-US" dirty="0"/>
+          </a:p>
+        </p:txBody>
+      </p:sp>
+    </p:spTree>
+  </p:cSld>
+  <p:clrMapOvr>
+    <a:masterClrMapping/>
+  </p:clrMapOvr>
+</p:sld>
+</file>
+
+<file path=ppt/slides/slide21.xml><?xml version="1.0" encoding="utf-8"?>
+<p:sld xmlns:a="http://schemas.openxmlformats.org/drawingml/2006/main" xmlns:r="http://schemas.openxmlformats.org/officeDocument/2006/relationships" xmlns:p="http://schemas.openxmlformats.org/presentationml/2006/main">
+  <p:cSld>
+    <p:spTree>
+      <p:nvGrpSpPr>
+        <p:cNvPr id="1" name=""/>
+        <p:cNvGrpSpPr/>
+        <p:nvPr/>
+      </p:nvGrpSpPr>
+      <p:grpSpPr>
+        <a:xfrm>
+          <a:off x="0" y="0"/>
+          <a:ext cx="0" cy="0"/>
+          <a:chOff x="0" y="0"/>
+          <a:chExt cx="0" cy="0"/>
+        </a:xfrm>
+      </p:grpSpPr>
+      <p:sp>
+        <p:nvSpPr>
+          <p:cNvPr id="13315" name="Rectangle 2">
+            <a:extLst>
+              <a:ext uri="{FF2B5EF4-FFF2-40B4-BE49-F238E27FC236}">
+                <a16:creationId xmlns:a16="http://schemas.microsoft.com/office/drawing/2014/main" id="{DCC1ED6B-0C5B-73D1-0709-68D3E9686B53}"/>
+              </a:ext>
+            </a:extLst>
+          </p:cNvPr>
+          <p:cNvSpPr>
+            <a:spLocks noGrp="1" noChangeArrowheads="1"/>
+          </p:cNvSpPr>
+          <p:nvPr>
+            <p:ph type="title"/>
+          </p:nvPr>
+        </p:nvSpPr>
+        <p:spPr/>
+        <p:txBody>
+          <a:bodyPr/>
+          <a:lstStyle/>
+          <a:p>
+            <a:pPr eaLnBrk="1" hangingPunct="1">
+              <a:defRPr/>
+            </a:pPr>
+            <a:r>
+              <a:rPr lang="en-US" altLang="en-US" sz="3200" dirty="0"/>
+              <a:t>Hands-on:  Flow with named exceptions </a:t>
+            </a:r>
+          </a:p>
+        </p:txBody>
+      </p:sp>
+      <p:sp>
+        <p:nvSpPr>
+          <p:cNvPr id="16389" name="Text Box 4">
+            <a:extLst>
+              <a:ext uri="{FF2B5EF4-FFF2-40B4-BE49-F238E27FC236}">
+                <a16:creationId xmlns:a16="http://schemas.microsoft.com/office/drawing/2014/main" id="{44303321-29AB-C68F-B232-31A1E5488E6F}"/>
+              </a:ext>
+            </a:extLst>
+          </p:cNvPr>
+          <p:cNvSpPr txBox="1">
+            <a:spLocks noChangeArrowheads="1"/>
+          </p:cNvSpPr>
+          <p:nvPr/>
+        </p:nvSpPr>
+        <p:spPr bwMode="auto">
+          <a:xfrm>
+            <a:off x="4038600" y="3156552"/>
+            <a:ext cx="3915612" cy="2902333"/>
+          </a:xfrm>
+          <a:prstGeom prst="rect">
+            <a:avLst/>
+          </a:prstGeom>
+          <a:noFill/>
+          <a:ln>
+            <a:noFill/>
+          </a:ln>
+          <a:effectLst/>
+          <a:extLst>
+            <a:ext uri="{909E8E84-426E-40DD-AFC4-6F175D3DCCD1}">
+              <a14:hiddenFill xmlns:a14="http://schemas.microsoft.com/office/drawing/2010/main">
+                <a:solidFill>
+                  <a:schemeClr val="accent1"/>
+                </a:solidFill>
+              </a14:hiddenFill>
+            </a:ext>
+            <a:ext uri="{91240B29-F687-4F45-9708-019B960494DF}">
+              <a14:hiddenLine xmlns:a14="http://schemas.microsoft.com/office/drawing/2010/main" w="9525">
+                <a:solidFill>
+                  <a:schemeClr val="tx1"/>
+                </a:solidFill>
+                <a:miter lim="800000"/>
+                <a:headEnd/>
+                <a:tailEnd/>
+              </a14:hiddenLine>
+            </a:ext>
+            <a:ext uri="{AF507438-7753-43E0-B8FC-AC1667EBCBE1}">
+              <a14:hiddenEffects xmlns:a14="http://schemas.microsoft.com/office/drawing/2010/main">
+                <a:effectLst>
+                  <a:outerShdw dist="35921" dir="2700000" algn="ctr" rotWithShape="0">
+                    <a:schemeClr val="bg2"/>
+                  </a:outerShdw>
+                </a:effectLst>
+              </a14:hiddenEffects>
+            </a:ext>
+          </a:extLst>
+        </p:spPr>
+        <p:txBody>
+          <a:bodyPr wrap="square">
+            <a:spAutoFit/>
+          </a:bodyPr>
+          <a:lstStyle>
+            <a:lvl1pPr>
+              <a:spcBef>
+                <a:spcPct val="20000"/>
+              </a:spcBef>
+              <a:buChar char="•"/>
+              <a:defRPr sz="3200">
+                <a:solidFill>
+                  <a:schemeClr val="tx1"/>
+                </a:solidFill>
+                <a:latin typeface="Arial" panose="020B0604020202020204" pitchFamily="34" charset="0"/>
+              </a:defRPr>
+            </a:lvl1pPr>
+            <a:lvl2pPr marL="742950" indent="-285750">
+              <a:spcBef>
+                <a:spcPct val="20000"/>
+              </a:spcBef>
+              <a:defRPr sz="2800">
+                <a:solidFill>
+                  <a:schemeClr val="tx1"/>
+                </a:solidFill>
+                <a:latin typeface="Arial" panose="020B0604020202020204" pitchFamily="34" charset="0"/>
+              </a:defRPr>
+            </a:lvl2pPr>
+            <a:lvl3pPr marL="1143000" indent="-228600">
+              <a:spcBef>
+                <a:spcPct val="20000"/>
+              </a:spcBef>
+              <a:buChar char="•"/>
+              <a:defRPr sz="2400">
+                <a:solidFill>
+                  <a:schemeClr val="tx1"/>
+                </a:solidFill>
+                <a:latin typeface="Arial" panose="020B0604020202020204" pitchFamily="34" charset="0"/>
+              </a:defRPr>
+            </a:lvl3pPr>
+            <a:lvl4pPr marL="1600200" indent="-228600">
+              <a:spcBef>
+                <a:spcPct val="20000"/>
+              </a:spcBef>
+              <a:buChar char="–"/>
+              <a:defRPr sz="2000">
+                <a:solidFill>
+                  <a:schemeClr val="tx1"/>
+                </a:solidFill>
+                <a:latin typeface="Arial" panose="020B0604020202020204" pitchFamily="34" charset="0"/>
+              </a:defRPr>
+            </a:lvl4pPr>
+            <a:lvl5pPr marL="2057400" indent="-228600">
+              <a:spcBef>
+                <a:spcPct val="20000"/>
+              </a:spcBef>
+              <a:buChar char="»"/>
+              <a:defRPr sz="2000">
+                <a:solidFill>
+                  <a:schemeClr val="tx1"/>
+                </a:solidFill>
+                <a:latin typeface="Arial" panose="020B0604020202020204" pitchFamily="34" charset="0"/>
+              </a:defRPr>
+            </a:lvl5pPr>
+            <a:lvl6pPr marL="2514600" indent="-228600" eaLnBrk="0" fontAlgn="base" hangingPunct="0">
+              <a:spcBef>
+                <a:spcPct val="20000"/>
+              </a:spcBef>
+              <a:spcAft>
+                <a:spcPct val="0"/>
+              </a:spcAft>
+              <a:buChar char="»"/>
+              <a:defRPr sz="2000">
+                <a:solidFill>
+                  <a:schemeClr val="tx1"/>
+                </a:solidFill>
+                <a:latin typeface="Arial" panose="020B0604020202020204" pitchFamily="34" charset="0"/>
+              </a:defRPr>
+            </a:lvl6pPr>
+            <a:lvl7pPr marL="2971800" indent="-228600" eaLnBrk="0" fontAlgn="base" hangingPunct="0">
+              <a:spcBef>
+                <a:spcPct val="20000"/>
+              </a:spcBef>
+              <a:spcAft>
+                <a:spcPct val="0"/>
+              </a:spcAft>
+              <a:buChar char="»"/>
+              <a:defRPr sz="2000">
+                <a:solidFill>
+                  <a:schemeClr val="tx1"/>
+                </a:solidFill>
+                <a:latin typeface="Arial" panose="020B0604020202020204" pitchFamily="34" charset="0"/>
+              </a:defRPr>
+            </a:lvl7pPr>
+            <a:lvl8pPr marL="3429000" indent="-228600" eaLnBrk="0" fontAlgn="base" hangingPunct="0">
+              <a:spcBef>
+                <a:spcPct val="20000"/>
+              </a:spcBef>
+              <a:spcAft>
+                <a:spcPct val="0"/>
+              </a:spcAft>
+              <a:buChar char="»"/>
+              <a:defRPr sz="2000">
+                <a:solidFill>
+                  <a:schemeClr val="tx1"/>
+                </a:solidFill>
+                <a:latin typeface="Arial" panose="020B0604020202020204" pitchFamily="34" charset="0"/>
+              </a:defRPr>
+            </a:lvl8pPr>
+            <a:lvl9pPr marL="3886200" indent="-228600" eaLnBrk="0" fontAlgn="base" hangingPunct="0">
+              <a:spcBef>
+                <a:spcPct val="20000"/>
+              </a:spcBef>
+              <a:spcAft>
+                <a:spcPct val="0"/>
+              </a:spcAft>
+              <a:buChar char="»"/>
+              <a:defRPr sz="2000">
+                <a:solidFill>
+                  <a:schemeClr val="tx1"/>
+                </a:solidFill>
+                <a:latin typeface="Arial" panose="020B0604020202020204" pitchFamily="34" charset="0"/>
+              </a:defRPr>
+            </a:lvl9pPr>
+          </a:lstStyle>
+          <a:p>
             <a:pPr>
-              <a:defRPr/>
-            </a:pPr>
-            <a:r>
-              <a:rPr lang="en-US" altLang="en-US" dirty="0" err="1"/>
-              <a:t>slopeTry</a:t>
-            </a:r>
-            <a:r>
-              <a:rPr lang="en-US" altLang="en-US" dirty="0"/>
-              <a:t> process</a:t>
+              <a:buNone/>
+            </a:pPr>
+            <a:r>
+              <a:rPr lang="en-US" sz="1100" b="0" dirty="0">
+                <a:solidFill>
+                  <a:srgbClr val="6A9955"/>
+                </a:solidFill>
+                <a:effectLst/>
+                <a:latin typeface="Consolas" panose="020B0609020204030204" pitchFamily="49" charset="0"/>
+              </a:rPr>
+              <a:t># slopeTry.py</a:t>
+            </a:r>
+            <a:endParaRPr lang="en-US" sz="1100" b="0" dirty="0">
+              <a:solidFill>
+                <a:srgbClr val="D4D4D4"/>
+              </a:solidFill>
+              <a:effectLst/>
+              <a:latin typeface="Consolas" panose="020B0609020204030204" pitchFamily="49" charset="0"/>
+            </a:endParaRPr>
+          </a:p>
+          <a:p>
+            <a:pPr>
+              <a:buNone/>
+            </a:pPr>
+            <a:r>
+              <a:rPr lang="en-US" sz="1100" b="0" dirty="0">
+                <a:solidFill>
+                  <a:srgbClr val="569CD6"/>
+                </a:solidFill>
+                <a:effectLst/>
+                <a:latin typeface="Consolas" panose="020B0609020204030204" pitchFamily="49" charset="0"/>
+              </a:rPr>
+              <a:t>import</a:t>
+            </a:r>
+            <a:r>
+              <a:rPr lang="en-US" sz="1100" b="0" dirty="0">
+                <a:solidFill>
+                  <a:srgbClr val="D4D4D4"/>
+                </a:solidFill>
+                <a:effectLst/>
+                <a:latin typeface="Consolas" panose="020B0609020204030204" pitchFamily="49" charset="0"/>
+              </a:rPr>
+              <a:t> sys </a:t>
+            </a:r>
+          </a:p>
+          <a:p>
+            <a:pPr>
+              <a:buNone/>
+            </a:pPr>
+            <a:r>
+              <a:rPr lang="en-US" sz="1100" b="0" dirty="0">
+                <a:solidFill>
+                  <a:srgbClr val="D4D4D4"/>
+                </a:solidFill>
+                <a:effectLst/>
+                <a:latin typeface="Consolas" panose="020B0609020204030204" pitchFamily="49" charset="0"/>
+              </a:rPr>
+              <a:t>rise = </a:t>
+            </a:r>
+            <a:r>
+              <a:rPr lang="en-US" sz="1100" b="0" dirty="0" err="1">
+                <a:solidFill>
+                  <a:srgbClr val="D4D4D4"/>
+                </a:solidFill>
+                <a:effectLst/>
+                <a:latin typeface="Consolas" panose="020B0609020204030204" pitchFamily="49" charset="0"/>
+              </a:rPr>
+              <a:t>sys.argv</a:t>
+            </a:r>
+            <a:r>
+              <a:rPr lang="en-US" sz="1100" b="0" dirty="0">
+                <a:solidFill>
+                  <a:srgbClr val="D4D4D4"/>
+                </a:solidFill>
+                <a:effectLst/>
+                <a:latin typeface="Consolas" panose="020B0609020204030204" pitchFamily="49" charset="0"/>
+              </a:rPr>
+              <a:t>[</a:t>
+            </a:r>
+            <a:r>
+              <a:rPr lang="en-US" sz="1100" b="0" dirty="0">
+                <a:solidFill>
+                  <a:srgbClr val="B5CEA8"/>
+                </a:solidFill>
+                <a:effectLst/>
+                <a:latin typeface="Consolas" panose="020B0609020204030204" pitchFamily="49" charset="0"/>
+              </a:rPr>
+              <a:t>1</a:t>
+            </a:r>
+            <a:r>
+              <a:rPr lang="en-US" sz="1100" b="0" dirty="0">
+                <a:solidFill>
+                  <a:srgbClr val="D4D4D4"/>
+                </a:solidFill>
+                <a:effectLst/>
+                <a:latin typeface="Consolas" panose="020B0609020204030204" pitchFamily="49" charset="0"/>
+              </a:rPr>
+              <a:t>] </a:t>
+            </a:r>
+          </a:p>
+          <a:p>
+            <a:pPr>
+              <a:buNone/>
+            </a:pPr>
+            <a:r>
+              <a:rPr lang="en-US" sz="1100" b="0" dirty="0">
+                <a:solidFill>
+                  <a:srgbClr val="D4D4D4"/>
+                </a:solidFill>
+                <a:effectLst/>
+                <a:latin typeface="Consolas" panose="020B0609020204030204" pitchFamily="49" charset="0"/>
+              </a:rPr>
+              <a:t>run = </a:t>
+            </a:r>
+            <a:r>
+              <a:rPr lang="en-US" sz="1100" b="0" dirty="0" err="1">
+                <a:solidFill>
+                  <a:srgbClr val="D4D4D4"/>
+                </a:solidFill>
+                <a:effectLst/>
+                <a:latin typeface="Consolas" panose="020B0609020204030204" pitchFamily="49" charset="0"/>
+              </a:rPr>
+              <a:t>sys.argv</a:t>
+            </a:r>
+            <a:r>
+              <a:rPr lang="en-US" sz="1100" b="0" dirty="0">
+                <a:solidFill>
+                  <a:srgbClr val="D4D4D4"/>
+                </a:solidFill>
+                <a:effectLst/>
+                <a:latin typeface="Consolas" panose="020B0609020204030204" pitchFamily="49" charset="0"/>
+              </a:rPr>
+              <a:t>[</a:t>
+            </a:r>
+            <a:r>
+              <a:rPr lang="en-US" sz="1100" b="0" dirty="0">
+                <a:solidFill>
+                  <a:srgbClr val="B5CEA8"/>
+                </a:solidFill>
+                <a:effectLst/>
+                <a:latin typeface="Consolas" panose="020B0609020204030204" pitchFamily="49" charset="0"/>
+              </a:rPr>
+              <a:t>2</a:t>
+            </a:r>
+            <a:r>
+              <a:rPr lang="en-US" sz="1100" b="0" dirty="0">
+                <a:solidFill>
+                  <a:srgbClr val="D4D4D4"/>
+                </a:solidFill>
+                <a:effectLst/>
+                <a:latin typeface="Consolas" panose="020B0609020204030204" pitchFamily="49" charset="0"/>
+              </a:rPr>
+              <a:t>]</a:t>
+            </a:r>
+          </a:p>
+          <a:p>
+            <a:pPr>
+              <a:buNone/>
+            </a:pPr>
+            <a:r>
+              <a:rPr lang="en-US" sz="1100" b="0" dirty="0">
+                <a:solidFill>
+                  <a:srgbClr val="569CD6"/>
+                </a:solidFill>
+                <a:effectLst/>
+                <a:latin typeface="Consolas" panose="020B0609020204030204" pitchFamily="49" charset="0"/>
+              </a:rPr>
+              <a:t>try</a:t>
+            </a:r>
+            <a:r>
+              <a:rPr lang="en-US" sz="1100" b="0" dirty="0">
+                <a:solidFill>
+                  <a:srgbClr val="D4D4D4"/>
+                </a:solidFill>
+                <a:effectLst/>
+                <a:latin typeface="Consolas" panose="020B0609020204030204" pitchFamily="49" charset="0"/>
+              </a:rPr>
+              <a:t>:</a:t>
+            </a:r>
+          </a:p>
+          <a:p>
+            <a:pPr>
+              <a:buNone/>
+            </a:pPr>
+            <a:r>
+              <a:rPr lang="en-US" sz="1100" b="0" dirty="0">
+                <a:solidFill>
+                  <a:srgbClr val="D4D4D4"/>
+                </a:solidFill>
+                <a:effectLst/>
+                <a:latin typeface="Consolas" panose="020B0609020204030204" pitchFamily="49" charset="0"/>
+              </a:rPr>
+              <a:t>    print (</a:t>
+            </a:r>
+            <a:r>
+              <a:rPr lang="en-US" sz="1100" b="0" dirty="0" err="1">
+                <a:solidFill>
+                  <a:srgbClr val="569CD6"/>
+                </a:solidFill>
+                <a:effectLst/>
+                <a:latin typeface="Consolas" panose="020B0609020204030204" pitchFamily="49" charset="0"/>
+              </a:rPr>
+              <a:t>f</a:t>
+            </a:r>
+            <a:r>
+              <a:rPr lang="en-US" sz="1100" b="0" dirty="0" err="1">
+                <a:solidFill>
+                  <a:srgbClr val="CE9178"/>
+                </a:solidFill>
+                <a:effectLst/>
+                <a:latin typeface="Consolas" panose="020B0609020204030204" pitchFamily="49" charset="0"/>
+              </a:rPr>
+              <a:t>"Rise</a:t>
+            </a:r>
+            <a:r>
+              <a:rPr lang="en-US" sz="1100" b="0" dirty="0">
+                <a:solidFill>
+                  <a:srgbClr val="CE9178"/>
+                </a:solidFill>
+                <a:effectLst/>
+                <a:latin typeface="Consolas" panose="020B0609020204030204" pitchFamily="49" charset="0"/>
+              </a:rPr>
+              <a:t>: </a:t>
+            </a:r>
+            <a:r>
+              <a:rPr lang="en-US" sz="1100" b="0" dirty="0">
+                <a:solidFill>
+                  <a:srgbClr val="D4D4D4"/>
+                </a:solidFill>
+                <a:effectLst/>
+                <a:latin typeface="Consolas" panose="020B0609020204030204" pitchFamily="49" charset="0"/>
+              </a:rPr>
+              <a:t>{rise}</a:t>
+            </a:r>
+            <a:r>
+              <a:rPr lang="en-US" sz="1100" b="0" dirty="0">
+                <a:solidFill>
+                  <a:srgbClr val="CE9178"/>
+                </a:solidFill>
+                <a:effectLst/>
+                <a:latin typeface="Consolas" panose="020B0609020204030204" pitchFamily="49" charset="0"/>
+              </a:rPr>
+              <a:t>   Run: </a:t>
+            </a:r>
+            <a:r>
+              <a:rPr lang="en-US" sz="1100" b="0" dirty="0">
+                <a:solidFill>
+                  <a:srgbClr val="D4D4D4"/>
+                </a:solidFill>
+                <a:effectLst/>
+                <a:latin typeface="Consolas" panose="020B0609020204030204" pitchFamily="49" charset="0"/>
+              </a:rPr>
+              <a:t>{run}</a:t>
+            </a:r>
+            <a:r>
+              <a:rPr lang="en-US" sz="1100" b="0" dirty="0">
+                <a:solidFill>
+                  <a:srgbClr val="CE9178"/>
+                </a:solidFill>
+                <a:effectLst/>
+                <a:latin typeface="Consolas" panose="020B0609020204030204" pitchFamily="49" charset="0"/>
+              </a:rPr>
+              <a:t>"</a:t>
+            </a:r>
+            <a:r>
+              <a:rPr lang="en-US" sz="1100" b="0" dirty="0">
+                <a:solidFill>
+                  <a:srgbClr val="D4D4D4"/>
+                </a:solidFill>
+                <a:effectLst/>
+                <a:latin typeface="Consolas" panose="020B0609020204030204" pitchFamily="49" charset="0"/>
+              </a:rPr>
+              <a:t>)</a:t>
+            </a:r>
+          </a:p>
+          <a:p>
+            <a:pPr>
+              <a:buNone/>
+            </a:pPr>
+            <a:r>
+              <a:rPr lang="en-US" sz="1100" b="0" dirty="0">
+                <a:solidFill>
+                  <a:srgbClr val="D4D4D4"/>
+                </a:solidFill>
+                <a:effectLst/>
+                <a:latin typeface="Consolas" panose="020B0609020204030204" pitchFamily="49" charset="0"/>
+              </a:rPr>
+              <a:t>    slope = float(rise)/float(run)</a:t>
+            </a:r>
+          </a:p>
+          <a:p>
+            <a:pPr>
+              <a:buNone/>
+            </a:pPr>
+            <a:r>
+              <a:rPr lang="en-US" sz="1100" b="0" dirty="0">
+                <a:solidFill>
+                  <a:srgbClr val="D4D4D4"/>
+                </a:solidFill>
+                <a:effectLst/>
+                <a:latin typeface="Consolas" panose="020B0609020204030204" pitchFamily="49" charset="0"/>
+              </a:rPr>
+              <a:t>    print(</a:t>
+            </a:r>
+            <a:r>
+              <a:rPr lang="en-US" sz="1100" b="0" dirty="0">
+                <a:solidFill>
+                  <a:srgbClr val="CE9178"/>
+                </a:solidFill>
+                <a:effectLst/>
+                <a:latin typeface="Consolas" panose="020B0609020204030204" pitchFamily="49" charset="0"/>
+              </a:rPr>
+              <a:t>"Slope = rise/run"</a:t>
+            </a:r>
+            <a:r>
+              <a:rPr lang="en-US" sz="1100" b="0" dirty="0">
+                <a:solidFill>
+                  <a:srgbClr val="D4D4D4"/>
+                </a:solidFill>
+                <a:effectLst/>
+                <a:latin typeface="Consolas" panose="020B0609020204030204" pitchFamily="49" charset="0"/>
+              </a:rPr>
+              <a:t>)</a:t>
+            </a:r>
+          </a:p>
+          <a:p>
+            <a:pPr>
+              <a:buNone/>
+            </a:pPr>
+            <a:r>
+              <a:rPr lang="en-US" sz="1100" b="0" dirty="0">
+                <a:solidFill>
+                  <a:srgbClr val="569CD6"/>
+                </a:solidFill>
+                <a:effectLst/>
+                <a:latin typeface="Consolas" panose="020B0609020204030204" pitchFamily="49" charset="0"/>
+              </a:rPr>
+              <a:t>except</a:t>
+            </a:r>
+            <a:r>
+              <a:rPr lang="en-US" sz="1100" b="0" dirty="0">
+                <a:solidFill>
+                  <a:srgbClr val="D4D4D4"/>
+                </a:solidFill>
+                <a:effectLst/>
+                <a:latin typeface="Consolas" panose="020B0609020204030204" pitchFamily="49" charset="0"/>
+              </a:rPr>
+              <a:t> </a:t>
+            </a:r>
+            <a:r>
+              <a:rPr lang="en-US" sz="1100" b="0" dirty="0" err="1">
+                <a:solidFill>
+                  <a:srgbClr val="D4D4D4"/>
+                </a:solidFill>
+                <a:effectLst/>
+                <a:latin typeface="Consolas" panose="020B0609020204030204" pitchFamily="49" charset="0"/>
+              </a:rPr>
+              <a:t>ZeroDivisionError</a:t>
+            </a:r>
+            <a:r>
+              <a:rPr lang="en-US" sz="1100" b="0" dirty="0">
+                <a:solidFill>
+                  <a:srgbClr val="D4D4D4"/>
+                </a:solidFill>
+                <a:effectLst/>
+                <a:latin typeface="Consolas" panose="020B0609020204030204" pitchFamily="49" charset="0"/>
+              </a:rPr>
+              <a:t>:</a:t>
+            </a:r>
+          </a:p>
+          <a:p>
+            <a:pPr>
+              <a:buNone/>
+            </a:pPr>
+            <a:r>
+              <a:rPr lang="en-US" sz="1100" b="0" dirty="0">
+                <a:solidFill>
+                  <a:srgbClr val="D4D4D4"/>
+                </a:solidFill>
+                <a:effectLst/>
+                <a:latin typeface="Consolas" panose="020B0609020204030204" pitchFamily="49" charset="0"/>
+              </a:rPr>
+              <a:t>    slope = </a:t>
+            </a:r>
+            <a:r>
+              <a:rPr lang="en-US" sz="1100" b="0" dirty="0">
+                <a:solidFill>
+                  <a:srgbClr val="CE9178"/>
+                </a:solidFill>
+                <a:effectLst/>
+                <a:latin typeface="Consolas" panose="020B0609020204030204" pitchFamily="49" charset="0"/>
+              </a:rPr>
+              <a:t>"Undefined (line is vertical) "</a:t>
+            </a:r>
+            <a:endParaRPr lang="en-US" sz="1100" b="0" dirty="0">
+              <a:solidFill>
+                <a:srgbClr val="D4D4D4"/>
+              </a:solidFill>
+              <a:effectLst/>
+              <a:latin typeface="Consolas" panose="020B0609020204030204" pitchFamily="49" charset="0"/>
+            </a:endParaRPr>
+          </a:p>
+          <a:p>
+            <a:pPr>
+              <a:buNone/>
+            </a:pPr>
+            <a:r>
+              <a:rPr lang="en-US" sz="1100" b="0" dirty="0">
+                <a:solidFill>
+                  <a:srgbClr val="569CD6"/>
+                </a:solidFill>
+                <a:effectLst/>
+                <a:latin typeface="Consolas" panose="020B0609020204030204" pitchFamily="49" charset="0"/>
+              </a:rPr>
+              <a:t>except</a:t>
+            </a:r>
+            <a:r>
+              <a:rPr lang="en-US" sz="1100" b="0" dirty="0">
+                <a:solidFill>
+                  <a:srgbClr val="D4D4D4"/>
+                </a:solidFill>
+                <a:effectLst/>
+                <a:latin typeface="Consolas" panose="020B0609020204030204" pitchFamily="49" charset="0"/>
+              </a:rPr>
+              <a:t> </a:t>
+            </a:r>
+            <a:r>
+              <a:rPr lang="en-US" sz="1100" b="0" dirty="0" err="1">
+                <a:solidFill>
+                  <a:srgbClr val="D4D4D4"/>
+                </a:solidFill>
+                <a:effectLst/>
+                <a:latin typeface="Consolas" panose="020B0609020204030204" pitchFamily="49" charset="0"/>
+              </a:rPr>
+              <a:t>ValueError</a:t>
+            </a:r>
+            <a:r>
+              <a:rPr lang="en-US" sz="1100" b="0" dirty="0">
+                <a:solidFill>
+                  <a:srgbClr val="D4D4D4"/>
+                </a:solidFill>
+                <a:effectLst/>
+                <a:latin typeface="Consolas" panose="020B0609020204030204" pitchFamily="49" charset="0"/>
+              </a:rPr>
+              <a:t>:</a:t>
+            </a:r>
+          </a:p>
+          <a:p>
+            <a:pPr>
+              <a:buNone/>
+            </a:pPr>
+            <a:r>
+              <a:rPr lang="en-US" sz="1100" b="0" dirty="0">
+                <a:solidFill>
+                  <a:srgbClr val="D4D4D4"/>
+                </a:solidFill>
+                <a:effectLst/>
+                <a:latin typeface="Consolas" panose="020B0609020204030204" pitchFamily="49" charset="0"/>
+              </a:rPr>
+              <a:t>    print(</a:t>
+            </a:r>
+            <a:r>
+              <a:rPr lang="en-US" sz="1100" b="0" dirty="0">
+                <a:solidFill>
+                  <a:srgbClr val="CE9178"/>
+                </a:solidFill>
+                <a:effectLst/>
+                <a:latin typeface="Consolas" panose="020B0609020204030204" pitchFamily="49" charset="0"/>
+              </a:rPr>
+              <a:t>"Usage: &lt;numeric rise&gt; &lt;numeric run&gt;"</a:t>
+            </a:r>
+            <a:r>
+              <a:rPr lang="en-US" sz="1100" b="0" dirty="0">
+                <a:solidFill>
+                  <a:srgbClr val="D4D4D4"/>
+                </a:solidFill>
+                <a:effectLst/>
+                <a:latin typeface="Consolas" panose="020B0609020204030204" pitchFamily="49" charset="0"/>
+              </a:rPr>
+              <a:t>)</a:t>
+            </a:r>
+          </a:p>
+          <a:p>
+            <a:pPr>
+              <a:buNone/>
+            </a:pPr>
+            <a:r>
+              <a:rPr lang="en-US" sz="1100" b="0" dirty="0">
+                <a:solidFill>
+                  <a:srgbClr val="D4D4D4"/>
+                </a:solidFill>
+                <a:effectLst/>
+                <a:latin typeface="Consolas" panose="020B0609020204030204" pitchFamily="49" charset="0"/>
+              </a:rPr>
+              <a:t>    slope = </a:t>
+            </a:r>
+            <a:r>
+              <a:rPr lang="en-US" sz="1100" b="0" dirty="0">
+                <a:solidFill>
+                  <a:srgbClr val="CE9178"/>
+                </a:solidFill>
+                <a:effectLst/>
+                <a:latin typeface="Consolas" panose="020B0609020204030204" pitchFamily="49" charset="0"/>
+              </a:rPr>
+              <a:t>"Not found"</a:t>
+            </a:r>
+            <a:endParaRPr lang="en-US" sz="1100" b="0" dirty="0">
+              <a:solidFill>
+                <a:srgbClr val="D4D4D4"/>
+              </a:solidFill>
+              <a:effectLst/>
+              <a:latin typeface="Consolas" panose="020B0609020204030204" pitchFamily="49" charset="0"/>
+            </a:endParaRPr>
+          </a:p>
+          <a:p>
+            <a:pPr>
+              <a:buNone/>
+            </a:pPr>
+            <a:r>
+              <a:rPr lang="en-US" sz="1100" b="0" dirty="0">
+                <a:solidFill>
+                  <a:srgbClr val="D4D4D4"/>
+                </a:solidFill>
+                <a:effectLst/>
+                <a:latin typeface="Consolas" panose="020B0609020204030204" pitchFamily="49" charset="0"/>
+              </a:rPr>
+              <a:t>print (</a:t>
+            </a:r>
+            <a:r>
+              <a:rPr lang="en-US" sz="1100" b="0" dirty="0" err="1">
+                <a:solidFill>
+                  <a:srgbClr val="569CD6"/>
+                </a:solidFill>
+                <a:effectLst/>
+                <a:latin typeface="Consolas" panose="020B0609020204030204" pitchFamily="49" charset="0"/>
+              </a:rPr>
+              <a:t>f</a:t>
+            </a:r>
+            <a:r>
+              <a:rPr lang="en-US" sz="1100" b="0" dirty="0" err="1">
+                <a:solidFill>
+                  <a:srgbClr val="CE9178"/>
+                </a:solidFill>
+                <a:effectLst/>
+                <a:latin typeface="Consolas" panose="020B0609020204030204" pitchFamily="49" charset="0"/>
+              </a:rPr>
+              <a:t>"Slope</a:t>
+            </a:r>
+            <a:r>
+              <a:rPr lang="en-US" sz="1100" b="0" dirty="0">
+                <a:solidFill>
+                  <a:srgbClr val="CE9178"/>
+                </a:solidFill>
+                <a:effectLst/>
+                <a:latin typeface="Consolas" panose="020B0609020204030204" pitchFamily="49" charset="0"/>
+              </a:rPr>
+              <a:t>: </a:t>
+            </a:r>
+            <a:r>
+              <a:rPr lang="en-US" sz="1100" b="0" dirty="0">
+                <a:solidFill>
+                  <a:srgbClr val="D4D4D4"/>
+                </a:solidFill>
+                <a:effectLst/>
+                <a:latin typeface="Consolas" panose="020B0609020204030204" pitchFamily="49" charset="0"/>
+              </a:rPr>
+              <a:t>{slope}</a:t>
+            </a:r>
+            <a:r>
+              <a:rPr lang="en-US" sz="1100" b="0" dirty="0">
+                <a:solidFill>
+                  <a:srgbClr val="CE9178"/>
+                </a:solidFill>
+                <a:effectLst/>
+                <a:latin typeface="Consolas" panose="020B0609020204030204" pitchFamily="49" charset="0"/>
+              </a:rPr>
+              <a:t>"</a:t>
+            </a:r>
+            <a:r>
+              <a:rPr lang="en-US" sz="1100" b="0" dirty="0">
+                <a:solidFill>
+                  <a:srgbClr val="D4D4D4"/>
+                </a:solidFill>
+                <a:effectLst/>
+                <a:latin typeface="Consolas" panose="020B0609020204030204" pitchFamily="49" charset="0"/>
+              </a:rPr>
+              <a:t>)</a:t>
             </a:r>
           </a:p>
         </p:txBody>
@@ -18956,7 +18862,7 @@
           <p:cNvPr id="3" name="TextBox 2">
             <a:extLst>
               <a:ext uri="{FF2B5EF4-FFF2-40B4-BE49-F238E27FC236}">
-                <a16:creationId xmlns:a16="http://schemas.microsoft.com/office/drawing/2014/main" id="{A4F3DD98-4E4E-AE1E-38A2-525365B4A2ED}"/>
+                <a16:creationId xmlns:a16="http://schemas.microsoft.com/office/drawing/2014/main" id="{0234EA5E-4FFC-867D-B4FC-BAABEF7C353E}"/>
               </a:ext>
             </a:extLst>
           </p:cNvPr>
@@ -18965,8 +18871,8 @@
         </p:nvSpPr>
         <p:spPr>
           <a:xfrm>
-            <a:off x="381000" y="1206277"/>
-            <a:ext cx="5638800" cy="2862322"/>
+            <a:off x="490622" y="914400"/>
+            <a:ext cx="7891378" cy="3693319"/>
           </a:xfrm>
           <a:prstGeom prst="rect">
             <a:avLst/>
@@ -18979,922 +18885,252 @@
           </a:bodyPr>
           <a:lstStyle/>
           <a:p>
-            <a:pPr>
-              <a:buNone/>
-            </a:pPr>
-            <a:r>
-              <a:rPr lang="en-US" sz="1200" b="0" dirty="0">
-                <a:solidFill>
-                  <a:srgbClr val="6A9955"/>
-                </a:solidFill>
-                <a:effectLst/>
-                <a:latin typeface="Consolas" panose="020B0609020204030204" pitchFamily="49" charset="0"/>
-              </a:rPr>
-              <a:t># slopeTry.py</a:t>
-            </a:r>
-            <a:endParaRPr lang="en-US" sz="1200" b="0" dirty="0">
+            <a:pPr algn="l">
+              <a:buFont typeface="+mj-lt"/>
+              <a:buAutoNum type="arabicPeriod"/>
+            </a:pPr>
+            <a:r>
+              <a:rPr lang="en-US" dirty="0">
+                <a:solidFill>
+                  <a:srgbClr val="B8B8B8"/>
+                </a:solidFill>
+                <a:latin typeface="Open Sans" panose="020B0606030504020204" pitchFamily="34" charset="0"/>
+              </a:rPr>
+              <a:t> Open sample script slopeTry.py</a:t>
+            </a:r>
+          </a:p>
+          <a:p>
+            <a:pPr algn="l"/>
+            <a:r>
+              <a:rPr lang="en-US" dirty="0">
+                <a:solidFill>
+                  <a:srgbClr val="B8B8B8"/>
+                </a:solidFill>
+                <a:latin typeface="Open Sans" panose="020B0606030504020204" pitchFamily="34" charset="0"/>
+              </a:rPr>
+              <a:t>(C:\</a:t>
+            </a:r>
+            <a:r>
+              <a:rPr lang="en-US" dirty="0" err="1">
+                <a:solidFill>
+                  <a:srgbClr val="B8B8B8"/>
+                </a:solidFill>
+                <a:latin typeface="Open Sans" panose="020B0606030504020204" pitchFamily="34" charset="0"/>
+              </a:rPr>
+              <a:t>gispy</a:t>
+            </a:r>
+            <a:r>
+              <a:rPr lang="en-US" dirty="0">
+                <a:solidFill>
+                  <a:srgbClr val="B8B8B8"/>
+                </a:solidFill>
+                <a:latin typeface="Open Sans" panose="020B0606030504020204" pitchFamily="34" charset="0"/>
+              </a:rPr>
+              <a:t>\</a:t>
+            </a:r>
+            <a:r>
+              <a:rPr lang="en-US" dirty="0" err="1">
+                <a:solidFill>
+                  <a:srgbClr val="B8B8B8"/>
+                </a:solidFill>
+                <a:latin typeface="Open Sans" panose="020B0606030504020204" pitchFamily="34" charset="0"/>
+              </a:rPr>
+              <a:t>sample_scripts</a:t>
+            </a:r>
+            <a:r>
+              <a:rPr lang="en-US" dirty="0">
+                <a:solidFill>
+                  <a:srgbClr val="B8B8B8"/>
+                </a:solidFill>
+                <a:latin typeface="Open Sans" panose="020B0606030504020204" pitchFamily="34" charset="0"/>
+              </a:rPr>
+              <a:t>\ch14)</a:t>
+            </a:r>
+          </a:p>
+          <a:p>
+            <a:pPr algn="l"/>
+            <a:endParaRPr lang="en-US" dirty="0">
               <a:solidFill>
-                <a:srgbClr val="D4D4D4"/>
+                <a:srgbClr val="B8B8B8"/>
+              </a:solidFill>
+              <a:latin typeface="Open Sans" panose="020B0606030504020204" pitchFamily="34" charset="0"/>
+            </a:endParaRPr>
+          </a:p>
+          <a:p>
+            <a:pPr algn="l"/>
+            <a:r>
+              <a:rPr lang="en-US" b="0" i="0" dirty="0">
+                <a:solidFill>
+                  <a:srgbClr val="B8B8B8"/>
+                </a:solidFill>
+                <a:effectLst/>
+                <a:latin typeface="Open Sans" panose="020B0606030504020204" pitchFamily="34" charset="0"/>
+              </a:rPr>
+              <a:t>2. </a:t>
+            </a:r>
+            <a:r>
+              <a:rPr lang="en-US" dirty="0">
+                <a:solidFill>
+                  <a:srgbClr val="B8B8B8"/>
+                </a:solidFill>
+                <a:latin typeface="Open Sans" panose="020B0606030504020204" pitchFamily="34" charset="0"/>
+              </a:rPr>
+              <a:t>S</a:t>
+            </a:r>
+            <a:r>
+              <a:rPr lang="en-US" b="0" i="0" dirty="0">
+                <a:solidFill>
+                  <a:srgbClr val="B8B8B8"/>
+                </a:solidFill>
+                <a:effectLst/>
+                <a:latin typeface="Open Sans" panose="020B0606030504020204" pitchFamily="34" charset="0"/>
+              </a:rPr>
+              <a:t>tep through in the debugger </a:t>
+            </a:r>
+            <a:r>
+              <a:rPr lang="en-US" dirty="0">
+                <a:solidFill>
+                  <a:srgbClr val="B8B8B8"/>
+                </a:solidFill>
+                <a:latin typeface="Open Sans" panose="020B0606030504020204" pitchFamily="34" charset="0"/>
+              </a:rPr>
+              <a:t>with four use</a:t>
+            </a:r>
+            <a:r>
+              <a:rPr lang="en-US" b="0" i="0" dirty="0">
+                <a:solidFill>
+                  <a:srgbClr val="B8B8B8"/>
+                </a:solidFill>
+                <a:effectLst/>
+                <a:latin typeface="Open Sans" panose="020B0606030504020204" pitchFamily="34" charset="0"/>
+              </a:rPr>
+              <a:t> cases (a-d below). Note the behavior in each case.  </a:t>
+            </a:r>
+          </a:p>
+          <a:p>
+            <a:pPr algn="l"/>
+            <a:endParaRPr lang="en-US" dirty="0">
+              <a:solidFill>
+                <a:srgbClr val="B8B8B8"/>
+              </a:solidFill>
+              <a:latin typeface="Open Sans" panose="020B0606030504020204" pitchFamily="34" charset="0"/>
+            </a:endParaRPr>
+          </a:p>
+          <a:p>
+            <a:pPr algn="l"/>
+            <a:r>
+              <a:rPr lang="en-US" b="0" i="0" dirty="0">
+                <a:solidFill>
+                  <a:srgbClr val="B8B8B8"/>
+                </a:solidFill>
+                <a:effectLst/>
+                <a:latin typeface="Open Sans" panose="020B0606030504020204" pitchFamily="34" charset="0"/>
+              </a:rPr>
+              <a:t>User arguments:</a:t>
+            </a:r>
+          </a:p>
+          <a:p>
+            <a:pPr algn="l"/>
+            <a:r>
+              <a:rPr lang="en-US" b="0" i="0" dirty="0">
+                <a:solidFill>
+                  <a:srgbClr val="B8B8B8"/>
+                </a:solidFill>
+                <a:effectLst/>
+                <a:latin typeface="Open Sans" panose="020B0606030504020204" pitchFamily="34" charset="0"/>
+              </a:rPr>
+              <a:t>a</a:t>
+            </a:r>
+            <a:r>
+              <a:rPr lang="en-US" dirty="0">
+                <a:solidFill>
+                  <a:srgbClr val="B8B8B8"/>
+                </a:solidFill>
+                <a:latin typeface="Open Sans" panose="020B0606030504020204" pitchFamily="34" charset="0"/>
+              </a:rPr>
+              <a:t>)</a:t>
+            </a:r>
+            <a:r>
+              <a:rPr lang="en-US" b="0" i="0" dirty="0">
+                <a:solidFill>
+                  <a:srgbClr val="B8B8B8"/>
+                </a:solidFill>
+                <a:effectLst/>
+                <a:latin typeface="Open Sans" panose="020B0606030504020204" pitchFamily="34" charset="0"/>
+              </a:rPr>
+              <a:t>  12  6</a:t>
+            </a:r>
+          </a:p>
+          <a:p>
+            <a:pPr algn="l"/>
+            <a:r>
+              <a:rPr lang="en-US" b="0" i="0" dirty="0">
+                <a:solidFill>
+                  <a:srgbClr val="B8B8B8"/>
+                </a:solidFill>
+                <a:effectLst/>
+                <a:latin typeface="Open Sans" panose="020B0606030504020204" pitchFamily="34" charset="0"/>
+              </a:rPr>
+              <a:t>b)  12  0</a:t>
+            </a:r>
+          </a:p>
+          <a:p>
+            <a:pPr algn="l"/>
+            <a:r>
+              <a:rPr lang="en-US" b="0" i="0" dirty="0">
+                <a:solidFill>
+                  <a:srgbClr val="B8B8B8"/>
+                </a:solidFill>
+                <a:effectLst/>
+                <a:latin typeface="Open Sans" panose="020B0606030504020204" pitchFamily="34" charset="0"/>
+              </a:rPr>
+              <a:t>c)   twelve six</a:t>
+            </a:r>
+          </a:p>
+          <a:p>
+            <a:pPr algn="l"/>
+            <a:r>
+              <a:rPr lang="en-US" b="0" i="0" dirty="0">
+                <a:solidFill>
+                  <a:srgbClr val="B8B8B8"/>
+                </a:solidFill>
+                <a:effectLst/>
+                <a:latin typeface="Open Sans" panose="020B0606030504020204" pitchFamily="34" charset="0"/>
+              </a:rPr>
+              <a:t>d)  12</a:t>
+            </a:r>
+            <a:br>
+              <a:rPr lang="en-US" b="1" i="0" dirty="0">
+                <a:solidFill>
+                  <a:srgbClr val="B8B8B8"/>
+                </a:solidFill>
+                <a:effectLst/>
+                <a:latin typeface="Open Sans" panose="020B0606030504020204" pitchFamily="34" charset="0"/>
+              </a:rPr>
+            </a:br>
+            <a:br>
+              <a:rPr lang="en-US" b="1" i="0" dirty="0">
+                <a:solidFill>
+                  <a:srgbClr val="B8B8B8"/>
+                </a:solidFill>
+                <a:effectLst/>
+                <a:latin typeface="Open Sans" panose="020B0606030504020204" pitchFamily="34" charset="0"/>
+              </a:rPr>
+            </a:br>
+            <a:endParaRPr lang="en-US" b="0" i="0" dirty="0">
+              <a:solidFill>
+                <a:srgbClr val="B8B8B8"/>
               </a:solidFill>
               <a:effectLst/>
-              <a:latin typeface="Consolas" panose="020B0609020204030204" pitchFamily="49" charset="0"/>
+              <a:latin typeface="Open Sans" panose="020B0606030504020204" pitchFamily="34" charset="0"/>
             </a:endParaRPr>
-          </a:p>
-          <a:p>
-            <a:pPr>
-              <a:buNone/>
-            </a:pPr>
-            <a:r>
-              <a:rPr lang="en-US" sz="1200" b="0" dirty="0">
-                <a:solidFill>
-                  <a:srgbClr val="569CD6"/>
-                </a:solidFill>
-                <a:effectLst/>
-                <a:latin typeface="Consolas" panose="020B0609020204030204" pitchFamily="49" charset="0"/>
-              </a:rPr>
-              <a:t>import</a:t>
-            </a:r>
-            <a:r>
-              <a:rPr lang="en-US" sz="1200" b="0" dirty="0">
-                <a:solidFill>
-                  <a:srgbClr val="D4D4D4"/>
-                </a:solidFill>
-                <a:effectLst/>
-                <a:latin typeface="Consolas" panose="020B0609020204030204" pitchFamily="49" charset="0"/>
-              </a:rPr>
-              <a:t> sys </a:t>
-            </a:r>
-          </a:p>
-          <a:p>
-            <a:pPr>
-              <a:buNone/>
-            </a:pPr>
-            <a:r>
-              <a:rPr lang="en-US" sz="1200" b="0" dirty="0">
-                <a:solidFill>
-                  <a:srgbClr val="D4D4D4"/>
-                </a:solidFill>
-                <a:effectLst/>
-                <a:latin typeface="Consolas" panose="020B0609020204030204" pitchFamily="49" charset="0"/>
-              </a:rPr>
-              <a:t>rise = </a:t>
-            </a:r>
-            <a:r>
-              <a:rPr lang="en-US" sz="1200" b="0" dirty="0" err="1">
-                <a:solidFill>
-                  <a:srgbClr val="D4D4D4"/>
-                </a:solidFill>
-                <a:effectLst/>
-                <a:latin typeface="Consolas" panose="020B0609020204030204" pitchFamily="49" charset="0"/>
-              </a:rPr>
-              <a:t>sys.argv</a:t>
-            </a:r>
-            <a:r>
-              <a:rPr lang="en-US" sz="1200" b="0" dirty="0">
-                <a:solidFill>
-                  <a:srgbClr val="D4D4D4"/>
-                </a:solidFill>
-                <a:effectLst/>
-                <a:latin typeface="Consolas" panose="020B0609020204030204" pitchFamily="49" charset="0"/>
-              </a:rPr>
-              <a:t>[</a:t>
-            </a:r>
-            <a:r>
-              <a:rPr lang="en-US" sz="1200" b="0" dirty="0">
-                <a:solidFill>
-                  <a:srgbClr val="B5CEA8"/>
-                </a:solidFill>
-                <a:effectLst/>
-                <a:latin typeface="Consolas" panose="020B0609020204030204" pitchFamily="49" charset="0"/>
-              </a:rPr>
-              <a:t>1</a:t>
-            </a:r>
-            <a:r>
-              <a:rPr lang="en-US" sz="1200" b="0" dirty="0">
-                <a:solidFill>
-                  <a:srgbClr val="D4D4D4"/>
-                </a:solidFill>
-                <a:effectLst/>
-                <a:latin typeface="Consolas" panose="020B0609020204030204" pitchFamily="49" charset="0"/>
-              </a:rPr>
-              <a:t>] </a:t>
-            </a:r>
-          </a:p>
-          <a:p>
-            <a:pPr>
-              <a:buNone/>
-            </a:pPr>
-            <a:r>
-              <a:rPr lang="en-US" sz="1200" b="0" dirty="0">
-                <a:solidFill>
-                  <a:srgbClr val="D4D4D4"/>
-                </a:solidFill>
-                <a:effectLst/>
-                <a:latin typeface="Consolas" panose="020B0609020204030204" pitchFamily="49" charset="0"/>
-              </a:rPr>
-              <a:t>run = sys.argv[</a:t>
-            </a:r>
-            <a:r>
-              <a:rPr lang="en-US" sz="1200" b="0" dirty="0">
-                <a:solidFill>
-                  <a:srgbClr val="B5CEA8"/>
-                </a:solidFill>
-                <a:effectLst/>
-                <a:latin typeface="Consolas" panose="020B0609020204030204" pitchFamily="49" charset="0"/>
-              </a:rPr>
-              <a:t>2</a:t>
-            </a:r>
-            <a:r>
-              <a:rPr lang="en-US" sz="1200" b="0" dirty="0">
-                <a:solidFill>
-                  <a:srgbClr val="D4D4D4"/>
-                </a:solidFill>
-                <a:effectLst/>
-                <a:latin typeface="Consolas" panose="020B0609020204030204" pitchFamily="49" charset="0"/>
-              </a:rPr>
-              <a:t>]</a:t>
-            </a:r>
-          </a:p>
-          <a:p>
-            <a:pPr>
-              <a:buNone/>
-            </a:pPr>
-            <a:r>
-              <a:rPr lang="en-US" sz="1200" dirty="0">
-                <a:solidFill>
-                  <a:srgbClr val="D4D4D4"/>
-                </a:solidFill>
-                <a:latin typeface="Consolas" panose="020B0609020204030204" pitchFamily="49" charset="0"/>
-              </a:rPr>
-              <a:t>slope = </a:t>
-            </a:r>
-            <a:r>
-              <a:rPr lang="en-US" sz="1200" b="0" dirty="0">
-                <a:solidFill>
-                  <a:srgbClr val="CE9178"/>
-                </a:solidFill>
-                <a:effectLst/>
-                <a:latin typeface="Consolas" panose="020B0609020204030204" pitchFamily="49" charset="0"/>
-              </a:rPr>
-              <a:t>"Unknown"</a:t>
-            </a:r>
-            <a:endParaRPr lang="en-US" sz="1200" b="0" dirty="0">
-              <a:solidFill>
-                <a:srgbClr val="D4D4D4"/>
-              </a:solidFill>
-              <a:effectLst/>
-              <a:latin typeface="Consolas" panose="020B0609020204030204" pitchFamily="49" charset="0"/>
-            </a:endParaRPr>
-          </a:p>
-          <a:p>
-            <a:pPr>
-              <a:buNone/>
-            </a:pPr>
-            <a:r>
-              <a:rPr lang="en-US" sz="1200" b="0" dirty="0">
-                <a:solidFill>
-                  <a:srgbClr val="569CD6"/>
-                </a:solidFill>
-                <a:effectLst/>
-                <a:latin typeface="Consolas" panose="020B0609020204030204" pitchFamily="49" charset="0"/>
-              </a:rPr>
-              <a:t>try</a:t>
-            </a:r>
-            <a:r>
-              <a:rPr lang="en-US" sz="1200" b="0" dirty="0">
-                <a:solidFill>
-                  <a:srgbClr val="D4D4D4"/>
-                </a:solidFill>
-                <a:effectLst/>
-                <a:latin typeface="Consolas" panose="020B0609020204030204" pitchFamily="49" charset="0"/>
-              </a:rPr>
-              <a:t>:</a:t>
-            </a:r>
-          </a:p>
-          <a:p>
-            <a:pPr>
-              <a:buNone/>
-            </a:pPr>
-            <a:r>
-              <a:rPr lang="en-US" sz="1200" b="0" dirty="0">
-                <a:solidFill>
-                  <a:srgbClr val="D4D4D4"/>
-                </a:solidFill>
-                <a:effectLst/>
-                <a:latin typeface="Consolas" panose="020B0609020204030204" pitchFamily="49" charset="0"/>
-              </a:rPr>
-              <a:t>    print (</a:t>
-            </a:r>
-            <a:r>
-              <a:rPr lang="en-US" sz="1200" b="0" dirty="0" err="1">
-                <a:solidFill>
-                  <a:srgbClr val="569CD6"/>
-                </a:solidFill>
-                <a:effectLst/>
-                <a:latin typeface="Consolas" panose="020B0609020204030204" pitchFamily="49" charset="0"/>
-              </a:rPr>
-              <a:t>f</a:t>
-            </a:r>
-            <a:r>
-              <a:rPr lang="en-US" sz="1200" b="0" dirty="0" err="1">
-                <a:solidFill>
-                  <a:srgbClr val="CE9178"/>
-                </a:solidFill>
-                <a:effectLst/>
-                <a:latin typeface="Consolas" panose="020B0609020204030204" pitchFamily="49" charset="0"/>
-              </a:rPr>
-              <a:t>"Rise</a:t>
-            </a:r>
-            <a:r>
-              <a:rPr lang="en-US" sz="1200" b="0" dirty="0">
-                <a:solidFill>
-                  <a:srgbClr val="CE9178"/>
-                </a:solidFill>
-                <a:effectLst/>
-                <a:latin typeface="Consolas" panose="020B0609020204030204" pitchFamily="49" charset="0"/>
-              </a:rPr>
-              <a:t>: </a:t>
-            </a:r>
-            <a:r>
-              <a:rPr lang="en-US" sz="1200" b="0" dirty="0">
-                <a:solidFill>
-                  <a:srgbClr val="D4D4D4"/>
-                </a:solidFill>
-                <a:effectLst/>
-                <a:latin typeface="Consolas" panose="020B0609020204030204" pitchFamily="49" charset="0"/>
-              </a:rPr>
-              <a:t>{rise}</a:t>
-            </a:r>
-            <a:r>
-              <a:rPr lang="en-US" sz="1200" b="0" dirty="0">
-                <a:solidFill>
-                  <a:srgbClr val="CE9178"/>
-                </a:solidFill>
-                <a:effectLst/>
-                <a:latin typeface="Consolas" panose="020B0609020204030204" pitchFamily="49" charset="0"/>
-              </a:rPr>
-              <a:t>   Run: </a:t>
-            </a:r>
-            <a:r>
-              <a:rPr lang="en-US" sz="1200" b="0" dirty="0">
-                <a:solidFill>
-                  <a:srgbClr val="D4D4D4"/>
-                </a:solidFill>
-                <a:effectLst/>
-                <a:latin typeface="Consolas" panose="020B0609020204030204" pitchFamily="49" charset="0"/>
-              </a:rPr>
-              <a:t>{run}</a:t>
-            </a:r>
-            <a:r>
-              <a:rPr lang="en-US" sz="1200" b="0" dirty="0">
-                <a:solidFill>
-                  <a:srgbClr val="CE9178"/>
-                </a:solidFill>
-                <a:effectLst/>
-                <a:latin typeface="Consolas" panose="020B0609020204030204" pitchFamily="49" charset="0"/>
-              </a:rPr>
-              <a:t>"</a:t>
-            </a:r>
-            <a:r>
-              <a:rPr lang="en-US" sz="1200" b="0" dirty="0">
-                <a:solidFill>
-                  <a:srgbClr val="D4D4D4"/>
-                </a:solidFill>
-                <a:effectLst/>
-                <a:latin typeface="Consolas" panose="020B0609020204030204" pitchFamily="49" charset="0"/>
-              </a:rPr>
-              <a:t>)</a:t>
-            </a:r>
-          </a:p>
-          <a:p>
-            <a:pPr>
-              <a:buNone/>
-            </a:pPr>
-            <a:r>
-              <a:rPr lang="en-US" sz="1200" b="0" dirty="0">
-                <a:solidFill>
-                  <a:srgbClr val="D4D4D4"/>
-                </a:solidFill>
-                <a:effectLst/>
-                <a:latin typeface="Consolas" panose="020B0609020204030204" pitchFamily="49" charset="0"/>
-              </a:rPr>
-              <a:t>    slope = float(rise)/float(run)</a:t>
-            </a:r>
-          </a:p>
-          <a:p>
-            <a:pPr>
-              <a:buNone/>
-            </a:pPr>
-            <a:r>
-              <a:rPr lang="en-US" sz="1200" b="0" dirty="0">
-                <a:solidFill>
-                  <a:srgbClr val="D4D4D4"/>
-                </a:solidFill>
-                <a:effectLst/>
-                <a:latin typeface="Consolas" panose="020B0609020204030204" pitchFamily="49" charset="0"/>
-              </a:rPr>
-              <a:t>    print(</a:t>
-            </a:r>
-            <a:r>
-              <a:rPr lang="en-US" sz="1200" b="0" dirty="0">
-                <a:solidFill>
-                  <a:srgbClr val="CE9178"/>
-                </a:solidFill>
-                <a:effectLst/>
-                <a:latin typeface="Consolas" panose="020B0609020204030204" pitchFamily="49" charset="0"/>
-              </a:rPr>
-              <a:t>"Slope = rise/run"</a:t>
-            </a:r>
-            <a:r>
-              <a:rPr lang="en-US" sz="1200" b="0" dirty="0">
-                <a:solidFill>
-                  <a:srgbClr val="D4D4D4"/>
-                </a:solidFill>
-                <a:effectLst/>
-                <a:latin typeface="Consolas" panose="020B0609020204030204" pitchFamily="49" charset="0"/>
-              </a:rPr>
-              <a:t>)</a:t>
-            </a:r>
-          </a:p>
-          <a:p>
-            <a:pPr>
-              <a:buNone/>
-            </a:pPr>
-            <a:r>
-              <a:rPr lang="en-US" sz="1200" b="0" dirty="0">
-                <a:solidFill>
-                  <a:srgbClr val="569CD6"/>
-                </a:solidFill>
-                <a:effectLst/>
-                <a:latin typeface="Consolas" panose="020B0609020204030204" pitchFamily="49" charset="0"/>
-              </a:rPr>
-              <a:t>except</a:t>
-            </a:r>
-            <a:r>
-              <a:rPr lang="en-US" sz="1200" b="0" dirty="0">
-                <a:solidFill>
-                  <a:srgbClr val="D4D4D4"/>
-                </a:solidFill>
-                <a:effectLst/>
-                <a:latin typeface="Consolas" panose="020B0609020204030204" pitchFamily="49" charset="0"/>
-              </a:rPr>
-              <a:t> </a:t>
-            </a:r>
-            <a:r>
-              <a:rPr lang="en-US" sz="1200" b="0" dirty="0" err="1">
-                <a:solidFill>
-                  <a:srgbClr val="D4D4D4"/>
-                </a:solidFill>
-                <a:effectLst/>
-                <a:latin typeface="Consolas" panose="020B0609020204030204" pitchFamily="49" charset="0"/>
-              </a:rPr>
-              <a:t>ZeroDivisionError</a:t>
-            </a:r>
-            <a:r>
-              <a:rPr lang="en-US" sz="1200" b="0" dirty="0">
-                <a:solidFill>
-                  <a:srgbClr val="D4D4D4"/>
-                </a:solidFill>
-                <a:effectLst/>
-                <a:latin typeface="Consolas" panose="020B0609020204030204" pitchFamily="49" charset="0"/>
-              </a:rPr>
-              <a:t>:</a:t>
-            </a:r>
-          </a:p>
-          <a:p>
-            <a:pPr>
-              <a:buNone/>
-            </a:pPr>
-            <a:r>
-              <a:rPr lang="en-US" sz="1200" b="0" dirty="0">
-                <a:solidFill>
-                  <a:srgbClr val="D4D4D4"/>
-                </a:solidFill>
-                <a:effectLst/>
-                <a:latin typeface="Consolas" panose="020B0609020204030204" pitchFamily="49" charset="0"/>
-              </a:rPr>
-              <a:t>    slope = </a:t>
-            </a:r>
-            <a:r>
-              <a:rPr lang="en-US" sz="1200" b="0" dirty="0">
-                <a:solidFill>
-                  <a:srgbClr val="CE9178"/>
-                </a:solidFill>
-                <a:effectLst/>
-                <a:latin typeface="Consolas" panose="020B0609020204030204" pitchFamily="49" charset="0"/>
-              </a:rPr>
-              <a:t>"Undefined (line is vertical) "</a:t>
-            </a:r>
-            <a:endParaRPr lang="en-US" sz="1200" b="0" dirty="0">
-              <a:solidFill>
-                <a:srgbClr val="D4D4D4"/>
-              </a:solidFill>
-              <a:effectLst/>
-              <a:latin typeface="Consolas" panose="020B0609020204030204" pitchFamily="49" charset="0"/>
-            </a:endParaRPr>
-          </a:p>
-          <a:p>
-            <a:pPr>
-              <a:buNone/>
-            </a:pPr>
-            <a:r>
-              <a:rPr lang="en-US" sz="1200" b="0" dirty="0">
-                <a:solidFill>
-                  <a:srgbClr val="569CD6"/>
-                </a:solidFill>
-                <a:effectLst/>
-                <a:latin typeface="Consolas" panose="020B0609020204030204" pitchFamily="49" charset="0"/>
-              </a:rPr>
-              <a:t>except</a:t>
-            </a:r>
-            <a:r>
-              <a:rPr lang="en-US" sz="1200" b="0" dirty="0">
-                <a:solidFill>
-                  <a:srgbClr val="D4D4D4"/>
-                </a:solidFill>
-                <a:effectLst/>
-                <a:latin typeface="Consolas" panose="020B0609020204030204" pitchFamily="49" charset="0"/>
-              </a:rPr>
-              <a:t> </a:t>
-            </a:r>
-            <a:r>
-              <a:rPr lang="en-US" sz="1200" b="0" dirty="0" err="1">
-                <a:solidFill>
-                  <a:srgbClr val="D4D4D4"/>
-                </a:solidFill>
-                <a:effectLst/>
-                <a:latin typeface="Consolas" panose="020B0609020204030204" pitchFamily="49" charset="0"/>
-              </a:rPr>
-              <a:t>ValueError</a:t>
-            </a:r>
-            <a:r>
-              <a:rPr lang="en-US" sz="1200" b="0" dirty="0">
-                <a:solidFill>
-                  <a:srgbClr val="D4D4D4"/>
-                </a:solidFill>
-                <a:effectLst/>
-                <a:latin typeface="Consolas" panose="020B0609020204030204" pitchFamily="49" charset="0"/>
-              </a:rPr>
-              <a:t>:</a:t>
-            </a:r>
-          </a:p>
-          <a:p>
-            <a:pPr>
-              <a:buNone/>
-            </a:pPr>
-            <a:r>
-              <a:rPr lang="en-US" sz="1200" b="0" dirty="0">
-                <a:solidFill>
-                  <a:srgbClr val="D4D4D4"/>
-                </a:solidFill>
-                <a:effectLst/>
-                <a:latin typeface="Consolas" panose="020B0609020204030204" pitchFamily="49" charset="0"/>
-              </a:rPr>
-              <a:t>    print(</a:t>
-            </a:r>
-            <a:r>
-              <a:rPr lang="en-US" sz="1200" b="0" dirty="0">
-                <a:solidFill>
-                  <a:srgbClr val="CE9178"/>
-                </a:solidFill>
-                <a:effectLst/>
-                <a:latin typeface="Consolas" panose="020B0609020204030204" pitchFamily="49" charset="0"/>
-              </a:rPr>
-              <a:t>"Usage: &lt;numeric rise&gt; &lt;numeric run&gt;"</a:t>
-            </a:r>
-            <a:r>
-              <a:rPr lang="en-US" sz="1200" b="0" dirty="0">
-                <a:solidFill>
-                  <a:srgbClr val="D4D4D4"/>
-                </a:solidFill>
-                <a:effectLst/>
-                <a:latin typeface="Consolas" panose="020B0609020204030204" pitchFamily="49" charset="0"/>
-              </a:rPr>
-              <a:t>)</a:t>
-            </a:r>
-          </a:p>
-          <a:p>
-            <a:pPr>
-              <a:buNone/>
-            </a:pPr>
-            <a:r>
-              <a:rPr lang="en-US" sz="1200" b="0" dirty="0">
-                <a:solidFill>
-                  <a:srgbClr val="D4D4D4"/>
-                </a:solidFill>
-                <a:effectLst/>
-                <a:latin typeface="Consolas" panose="020B0609020204030204" pitchFamily="49" charset="0"/>
-              </a:rPr>
-              <a:t>    slope = </a:t>
-            </a:r>
-            <a:r>
-              <a:rPr lang="en-US" sz="1200" b="0" dirty="0">
-                <a:solidFill>
-                  <a:srgbClr val="CE9178"/>
-                </a:solidFill>
-                <a:effectLst/>
-                <a:latin typeface="Consolas" panose="020B0609020204030204" pitchFamily="49" charset="0"/>
-              </a:rPr>
-              <a:t>"Not found"</a:t>
-            </a:r>
-          </a:p>
-          <a:p>
-            <a:pPr>
-              <a:buNone/>
-            </a:pPr>
-            <a:r>
-              <a:rPr lang="en-US" sz="1200" b="0" dirty="0">
-                <a:solidFill>
-                  <a:srgbClr val="D4D4D4"/>
-                </a:solidFill>
-                <a:effectLst/>
-                <a:latin typeface="Consolas" panose="020B0609020204030204" pitchFamily="49" charset="0"/>
-              </a:rPr>
-              <a:t>print (</a:t>
-            </a:r>
-            <a:r>
-              <a:rPr lang="en-US" sz="1200" b="0" dirty="0" err="1">
-                <a:solidFill>
-                  <a:srgbClr val="569CD6"/>
-                </a:solidFill>
-                <a:effectLst/>
-                <a:latin typeface="Consolas" panose="020B0609020204030204" pitchFamily="49" charset="0"/>
-              </a:rPr>
-              <a:t>f</a:t>
-            </a:r>
-            <a:r>
-              <a:rPr lang="en-US" sz="1200" b="0" dirty="0" err="1">
-                <a:solidFill>
-                  <a:srgbClr val="CE9178"/>
-                </a:solidFill>
-                <a:effectLst/>
-                <a:latin typeface="Consolas" panose="020B0609020204030204" pitchFamily="49" charset="0"/>
-              </a:rPr>
-              <a:t>"Slope</a:t>
-            </a:r>
-            <a:r>
-              <a:rPr lang="en-US" sz="1200" b="0" dirty="0">
-                <a:solidFill>
-                  <a:srgbClr val="CE9178"/>
-                </a:solidFill>
-                <a:effectLst/>
-                <a:latin typeface="Consolas" panose="020B0609020204030204" pitchFamily="49" charset="0"/>
-              </a:rPr>
-              <a:t>: </a:t>
-            </a:r>
-            <a:r>
-              <a:rPr lang="en-US" sz="1200" b="0" dirty="0">
-                <a:solidFill>
-                  <a:srgbClr val="D4D4D4"/>
-                </a:solidFill>
-                <a:effectLst/>
-                <a:latin typeface="Consolas" panose="020B0609020204030204" pitchFamily="49" charset="0"/>
-              </a:rPr>
-              <a:t>{slope}</a:t>
-            </a:r>
-            <a:r>
-              <a:rPr lang="en-US" sz="1200" b="0" dirty="0">
-                <a:solidFill>
-                  <a:srgbClr val="CE9178"/>
-                </a:solidFill>
-                <a:effectLst/>
-                <a:latin typeface="Consolas" panose="020B0609020204030204" pitchFamily="49" charset="0"/>
-              </a:rPr>
-              <a:t>"</a:t>
-            </a:r>
-            <a:r>
-              <a:rPr lang="en-US" sz="1200" b="0" dirty="0">
-                <a:solidFill>
-                  <a:srgbClr val="D4D4D4"/>
-                </a:solidFill>
-                <a:effectLst/>
-                <a:latin typeface="Consolas" panose="020B0609020204030204" pitchFamily="49" charset="0"/>
-              </a:rPr>
-              <a:t>)</a:t>
-            </a:r>
-          </a:p>
-        </p:txBody>
-      </p:sp>
-      <p:sp>
-        <p:nvSpPr>
-          <p:cNvPr id="6" name="TextBox 5">
-            <a:extLst>
-              <a:ext uri="{FF2B5EF4-FFF2-40B4-BE49-F238E27FC236}">
-                <a16:creationId xmlns:a16="http://schemas.microsoft.com/office/drawing/2014/main" id="{91C5CDDA-12C3-21F8-C1EF-2C896313A71D}"/>
-              </a:ext>
-            </a:extLst>
-          </p:cNvPr>
-          <p:cNvSpPr txBox="1"/>
-          <p:nvPr/>
-        </p:nvSpPr>
-        <p:spPr>
-          <a:xfrm>
-            <a:off x="8077200" y="5420380"/>
-            <a:ext cx="1142998" cy="738664"/>
-          </a:xfrm>
-          <a:prstGeom prst="rect">
-            <a:avLst/>
-          </a:prstGeom>
-          <a:noFill/>
-        </p:spPr>
-        <p:txBody>
-          <a:bodyPr wrap="square">
-            <a:spAutoFit/>
-          </a:bodyPr>
-          <a:lstStyle/>
-          <a:p>
-            <a:pPr>
-              <a:buNone/>
-            </a:pPr>
-            <a:r>
-              <a:rPr lang="en-US" sz="1400" b="0" dirty="0">
-                <a:solidFill>
-                  <a:srgbClr val="FFF575"/>
-                </a:solidFill>
-                <a:effectLst/>
-                <a:latin typeface="Consolas" panose="020B0609020204030204" pitchFamily="49" charset="0"/>
-              </a:rPr>
-              <a:t>b) and c) print </a:t>
-            </a:r>
-            <a:r>
-              <a:rPr lang="en-US" sz="1400" dirty="0">
-                <a:solidFill>
-                  <a:srgbClr val="FFF575"/>
-                </a:solidFill>
-                <a:latin typeface="Consolas" panose="020B0609020204030204" pitchFamily="49" charset="0"/>
-              </a:rPr>
-              <a:t>the slope</a:t>
-            </a:r>
-            <a:endParaRPr lang="en-US" sz="1400" b="0" dirty="0">
-              <a:solidFill>
-                <a:srgbClr val="FFF575"/>
-              </a:solidFill>
-              <a:effectLst/>
-              <a:latin typeface="Consolas" panose="020B0609020204030204" pitchFamily="49" charset="0"/>
-            </a:endParaRPr>
-          </a:p>
-        </p:txBody>
-      </p:sp>
-      <p:cxnSp>
-        <p:nvCxnSpPr>
-          <p:cNvPr id="8" name="Straight Arrow Connector 7">
-            <a:extLst>
-              <a:ext uri="{FF2B5EF4-FFF2-40B4-BE49-F238E27FC236}">
-                <a16:creationId xmlns:a16="http://schemas.microsoft.com/office/drawing/2014/main" id="{C8606B24-F39C-F7D2-B9F4-1CB156A77BCB}"/>
-              </a:ext>
-            </a:extLst>
-          </p:cNvPr>
-          <p:cNvCxnSpPr>
-            <a:cxnSpLocks/>
-          </p:cNvCxnSpPr>
-          <p:nvPr/>
-        </p:nvCxnSpPr>
-        <p:spPr>
-          <a:xfrm flipV="1">
-            <a:off x="8305800" y="5054793"/>
-            <a:ext cx="0" cy="361122"/>
-          </a:xfrm>
-          <a:prstGeom prst="straightConnector1">
-            <a:avLst/>
-          </a:prstGeom>
-          <a:ln>
-            <a:tailEnd type="triangle"/>
-          </a:ln>
-        </p:spPr>
-        <p:style>
-          <a:lnRef idx="1">
-            <a:schemeClr val="accent1"/>
-          </a:lnRef>
-          <a:fillRef idx="0">
-            <a:schemeClr val="accent1"/>
-          </a:fillRef>
-          <a:effectRef idx="0">
-            <a:schemeClr val="accent1"/>
-          </a:effectRef>
-          <a:fontRef idx="minor">
-            <a:schemeClr val="tx1"/>
-          </a:fontRef>
-        </p:style>
-      </p:cxnSp>
-      <p:sp>
-        <p:nvSpPr>
-          <p:cNvPr id="20" name="TextBox 19">
-            <a:extLst>
-              <a:ext uri="{FF2B5EF4-FFF2-40B4-BE49-F238E27FC236}">
-                <a16:creationId xmlns:a16="http://schemas.microsoft.com/office/drawing/2014/main" id="{293FB7A5-1A99-BF6D-54DA-09F0DE9D874A}"/>
-              </a:ext>
-            </a:extLst>
-          </p:cNvPr>
-          <p:cNvSpPr txBox="1"/>
-          <p:nvPr/>
-        </p:nvSpPr>
-        <p:spPr>
-          <a:xfrm>
-            <a:off x="4800600" y="3743980"/>
-            <a:ext cx="1219200" cy="523220"/>
-          </a:xfrm>
-          <a:prstGeom prst="rect">
-            <a:avLst/>
-          </a:prstGeom>
-          <a:noFill/>
-        </p:spPr>
-        <p:txBody>
-          <a:bodyPr wrap="square">
-            <a:spAutoFit/>
-          </a:bodyPr>
-          <a:lstStyle/>
-          <a:p>
-            <a:pPr>
-              <a:buNone/>
-            </a:pPr>
-            <a:r>
-              <a:rPr lang="en-US" sz="1400" b="0" dirty="0">
-                <a:solidFill>
-                  <a:srgbClr val="FFF575"/>
-                </a:solidFill>
-                <a:effectLst/>
-                <a:latin typeface="Consolas" panose="020B0609020204030204" pitchFamily="49" charset="0"/>
-              </a:rPr>
-              <a:t>a) print </a:t>
-            </a:r>
-            <a:r>
-              <a:rPr lang="en-US" sz="1400" dirty="0">
-                <a:solidFill>
-                  <a:srgbClr val="FFF575"/>
-                </a:solidFill>
-                <a:latin typeface="Consolas" panose="020B0609020204030204" pitchFamily="49" charset="0"/>
-              </a:rPr>
-              <a:t>the slope</a:t>
-            </a:r>
-            <a:endParaRPr lang="en-US" sz="1400" b="0" dirty="0">
-              <a:solidFill>
-                <a:srgbClr val="FFF575"/>
-              </a:solidFill>
-              <a:effectLst/>
-              <a:latin typeface="Consolas" panose="020B0609020204030204" pitchFamily="49" charset="0"/>
-            </a:endParaRPr>
-          </a:p>
-        </p:txBody>
-      </p:sp>
-      <p:cxnSp>
-        <p:nvCxnSpPr>
-          <p:cNvPr id="21" name="Straight Arrow Connector 20">
-            <a:extLst>
-              <a:ext uri="{FF2B5EF4-FFF2-40B4-BE49-F238E27FC236}">
-                <a16:creationId xmlns:a16="http://schemas.microsoft.com/office/drawing/2014/main" id="{72BD95BF-629C-CD76-29D1-17365DA8F4DB}"/>
-              </a:ext>
-            </a:extLst>
-          </p:cNvPr>
-          <p:cNvCxnSpPr>
-            <a:cxnSpLocks/>
-          </p:cNvCxnSpPr>
-          <p:nvPr/>
-        </p:nvCxnSpPr>
-        <p:spPr>
-          <a:xfrm flipV="1">
-            <a:off x="5123953" y="3382858"/>
-            <a:ext cx="0" cy="361122"/>
-          </a:xfrm>
-          <a:prstGeom prst="straightConnector1">
-            <a:avLst/>
-          </a:prstGeom>
-          <a:ln>
-            <a:tailEnd type="triangle"/>
-          </a:ln>
-        </p:spPr>
-        <p:style>
-          <a:lnRef idx="1">
-            <a:schemeClr val="accent1"/>
-          </a:lnRef>
-          <a:fillRef idx="0">
-            <a:schemeClr val="accent1"/>
-          </a:fillRef>
-          <a:effectRef idx="0">
-            <a:schemeClr val="accent1"/>
-          </a:effectRef>
-          <a:fontRef idx="minor">
-            <a:schemeClr val="tx1"/>
-          </a:fontRef>
-        </p:style>
-      </p:cxnSp>
-      <p:sp>
-        <p:nvSpPr>
-          <p:cNvPr id="11" name="TextBox 10">
-            <a:extLst>
-              <a:ext uri="{FF2B5EF4-FFF2-40B4-BE49-F238E27FC236}">
-                <a16:creationId xmlns:a16="http://schemas.microsoft.com/office/drawing/2014/main" id="{375000FE-0D5E-5AB5-06F9-85570F7A5F44}"/>
-              </a:ext>
-            </a:extLst>
-          </p:cNvPr>
-          <p:cNvSpPr txBox="1"/>
-          <p:nvPr/>
-        </p:nvSpPr>
-        <p:spPr>
-          <a:xfrm>
-            <a:off x="335548" y="4466272"/>
-            <a:ext cx="4662904" cy="1477328"/>
-          </a:xfrm>
-          <a:prstGeom prst="rect">
-            <a:avLst/>
-          </a:prstGeom>
-          <a:noFill/>
-        </p:spPr>
-        <p:txBody>
-          <a:bodyPr wrap="square">
-            <a:spAutoFit/>
-          </a:bodyPr>
-          <a:lstStyle/>
-          <a:p>
-            <a:pPr algn="l"/>
-            <a:r>
-              <a:rPr lang="en-US" b="0" i="0" dirty="0">
-                <a:solidFill>
-                  <a:srgbClr val="B8B8B8"/>
-                </a:solidFill>
-                <a:effectLst/>
-                <a:latin typeface="Open Sans" panose="020B0606030504020204" pitchFamily="34" charset="0"/>
-              </a:rPr>
-              <a:t>User arguments:</a:t>
-            </a:r>
-          </a:p>
-          <a:p>
-            <a:pPr algn="l"/>
-            <a:r>
-              <a:rPr lang="en-US" b="0" i="0" dirty="0">
-                <a:solidFill>
-                  <a:srgbClr val="B8B8B8"/>
-                </a:solidFill>
-                <a:effectLst/>
-                <a:latin typeface="Open Sans" panose="020B0606030504020204" pitchFamily="34" charset="0"/>
-              </a:rPr>
-              <a:t>a</a:t>
-            </a:r>
-            <a:r>
-              <a:rPr lang="en-US" dirty="0">
-                <a:solidFill>
-                  <a:srgbClr val="B8B8B8"/>
-                </a:solidFill>
-                <a:latin typeface="Open Sans" panose="020B0606030504020204" pitchFamily="34" charset="0"/>
-              </a:rPr>
-              <a:t>)</a:t>
-            </a:r>
-            <a:r>
-              <a:rPr lang="en-US" b="0" i="0" dirty="0">
-                <a:solidFill>
-                  <a:srgbClr val="B8B8B8"/>
-                </a:solidFill>
-                <a:effectLst/>
-                <a:latin typeface="Open Sans" panose="020B0606030504020204" pitchFamily="34" charset="0"/>
-              </a:rPr>
-              <a:t>  12  6</a:t>
-            </a:r>
-          </a:p>
-          <a:p>
-            <a:pPr algn="l"/>
-            <a:r>
-              <a:rPr lang="en-US" b="0" i="0" dirty="0">
-                <a:solidFill>
-                  <a:srgbClr val="B8B8B8"/>
-                </a:solidFill>
-                <a:effectLst/>
-                <a:latin typeface="Open Sans" panose="020B0606030504020204" pitchFamily="34" charset="0"/>
-              </a:rPr>
-              <a:t>b)  12  0</a:t>
-            </a:r>
-          </a:p>
-          <a:p>
-            <a:pPr algn="l"/>
-            <a:r>
-              <a:rPr lang="en-US" b="0" i="0" dirty="0">
-                <a:solidFill>
-                  <a:srgbClr val="B8B8B8"/>
-                </a:solidFill>
-                <a:effectLst/>
-                <a:latin typeface="Open Sans" panose="020B0606030504020204" pitchFamily="34" charset="0"/>
-              </a:rPr>
-              <a:t>c)   twelve six</a:t>
-            </a:r>
-          </a:p>
-          <a:p>
-            <a:pPr algn="l"/>
-            <a:r>
-              <a:rPr lang="en-US" b="0" i="0" dirty="0">
-                <a:solidFill>
-                  <a:srgbClr val="B8B8B8"/>
-                </a:solidFill>
-                <a:effectLst/>
-                <a:latin typeface="Open Sans" panose="020B0606030504020204" pitchFamily="34" charset="0"/>
-              </a:rPr>
-              <a:t>d)  12</a:t>
-            </a:r>
-            <a:endParaRPr lang="en-US" dirty="0"/>
           </a:p>
         </p:txBody>
       </p:sp>
     </p:spTree>
     <p:extLst>
       <p:ext uri="{BB962C8B-B14F-4D97-AF65-F5344CB8AC3E}">
-        <p14:creationId xmlns:p14="http://schemas.microsoft.com/office/powerpoint/2010/main" val="1987769376"/>
+        <p14:creationId xmlns:p14="http://schemas.microsoft.com/office/powerpoint/2010/main" val="2930008104"/>
       </p:ext>
     </p:extLst>
   </p:cSld>
@@ -19904,7 +19140,7 @@
 </p:sld>
 </file>
 
-<file path=ppt/slides/slide21.xml><?xml version="1.0" encoding="utf-8"?>
+<file path=ppt/slides/slide22.xml><?xml version="1.0" encoding="utf-8"?>
 <p:sld xmlns:a="http://schemas.openxmlformats.org/drawingml/2006/main" xmlns:r="http://schemas.openxmlformats.org/officeDocument/2006/relationships" xmlns:p="http://schemas.openxmlformats.org/presentationml/2006/main">
   <p:cSld>
     <p:spTree>
@@ -19982,10 +19218,6 @@
               <a:defRPr/>
             </a:pPr>
             <a:r>
-              <a:rPr lang="en-US" altLang="en-US" dirty="0"/>
-              <a:t>modified </a:t>
-            </a:r>
-            <a:r>
               <a:rPr lang="en-US" altLang="en-US" dirty="0" err="1"/>
               <a:t>slopeTry</a:t>
             </a:r>
@@ -20130,6 +19362,41 @@
               <a:buNone/>
             </a:pPr>
             <a:r>
+              <a:rPr lang="en-US" sz="1200" b="0" dirty="0">
+                <a:solidFill>
+                  <a:srgbClr val="D4D4D4"/>
+                </a:solidFill>
+                <a:effectLst/>
+                <a:latin typeface="Consolas" panose="020B0609020204030204" pitchFamily="49" charset="0"/>
+              </a:rPr>
+              <a:t>run = sys.argv[</a:t>
+            </a:r>
+            <a:r>
+              <a:rPr lang="en-US" sz="1200" b="0" dirty="0">
+                <a:solidFill>
+                  <a:srgbClr val="B5CEA8"/>
+                </a:solidFill>
+                <a:effectLst/>
+                <a:latin typeface="Consolas" panose="020B0609020204030204" pitchFamily="49" charset="0"/>
+              </a:rPr>
+              <a:t>2</a:t>
+            </a:r>
+            <a:r>
+              <a:rPr lang="en-US" sz="1200" b="0" dirty="0">
+                <a:solidFill>
+                  <a:srgbClr val="D4D4D4"/>
+                </a:solidFill>
+                <a:effectLst/>
+                <a:latin typeface="Consolas" panose="020B0609020204030204" pitchFamily="49" charset="0"/>
+              </a:rPr>
+              <a:t>]</a:t>
+            </a:r>
+          </a:p>
+          <a:p>
+            <a:pPr>
+              <a:buNone/>
+            </a:pPr>
+            <a:r>
               <a:rPr lang="en-US" sz="1200" dirty="0">
                 <a:solidFill>
                   <a:srgbClr val="D4D4D4"/>
@@ -20179,47 +19446,6 @@
                 <a:latin typeface="Consolas" panose="020B0609020204030204" pitchFamily="49" charset="0"/>
               </a:rPr>
               <a:t>:</a:t>
-            </a:r>
-          </a:p>
-          <a:p>
-            <a:r>
-              <a:rPr lang="en-US" sz="1200" dirty="0">
-                <a:solidFill>
-                  <a:srgbClr val="D4D4D4"/>
-                </a:solidFill>
-                <a:latin typeface="Consolas" panose="020B0609020204030204" pitchFamily="49" charset="0"/>
-              </a:rPr>
-              <a:t>    </a:t>
-            </a:r>
-            <a:r>
-              <a:rPr lang="en-US" sz="1200" b="0" dirty="0">
-                <a:solidFill>
-                  <a:srgbClr val="D4D4D4"/>
-                </a:solidFill>
-                <a:effectLst/>
-                <a:latin typeface="Consolas" panose="020B0609020204030204" pitchFamily="49" charset="0"/>
-              </a:rPr>
-              <a:t>run = sys.argv[</a:t>
-            </a:r>
-            <a:r>
-              <a:rPr lang="en-US" sz="1200" b="0" dirty="0">
-                <a:solidFill>
-                  <a:srgbClr val="B5CEA8"/>
-                </a:solidFill>
-                <a:effectLst/>
-                <a:latin typeface="Consolas" panose="020B0609020204030204" pitchFamily="49" charset="0"/>
-              </a:rPr>
-              <a:t>2</a:t>
-            </a:r>
-            <a:r>
-              <a:rPr lang="en-US" sz="1200" b="0" dirty="0">
-                <a:solidFill>
-                  <a:srgbClr val="D4D4D4"/>
-                </a:solidFill>
-                <a:effectLst/>
-                <a:latin typeface="Consolas" panose="020B0609020204030204" pitchFamily="49" charset="0"/>
-              </a:rPr>
-              <a:t>]</a:t>
             </a:r>
           </a:p>
           <a:p>
@@ -20830,6 +20056,1057 @@
       </p:cxnSp>
       <p:sp>
         <p:nvSpPr>
+          <p:cNvPr id="11" name="TextBox 10">
+            <a:extLst>
+              <a:ext uri="{FF2B5EF4-FFF2-40B4-BE49-F238E27FC236}">
+                <a16:creationId xmlns:a16="http://schemas.microsoft.com/office/drawing/2014/main" id="{375000FE-0D5E-5AB5-06F9-85570F7A5F44}"/>
+              </a:ext>
+            </a:extLst>
+          </p:cNvPr>
+          <p:cNvSpPr txBox="1"/>
+          <p:nvPr/>
+        </p:nvSpPr>
+        <p:spPr>
+          <a:xfrm>
+            <a:off x="335548" y="4466272"/>
+            <a:ext cx="4662904" cy="1477328"/>
+          </a:xfrm>
+          <a:prstGeom prst="rect">
+            <a:avLst/>
+          </a:prstGeom>
+          <a:noFill/>
+        </p:spPr>
+        <p:txBody>
+          <a:bodyPr wrap="square">
+            <a:spAutoFit/>
+          </a:bodyPr>
+          <a:lstStyle/>
+          <a:p>
+            <a:pPr algn="l"/>
+            <a:r>
+              <a:rPr lang="en-US" b="0" i="0" dirty="0">
+                <a:solidFill>
+                  <a:srgbClr val="B8B8B8"/>
+                </a:solidFill>
+                <a:effectLst/>
+                <a:latin typeface="Open Sans" panose="020B0606030504020204" pitchFamily="34" charset="0"/>
+              </a:rPr>
+              <a:t>User arguments:</a:t>
+            </a:r>
+          </a:p>
+          <a:p>
+            <a:pPr algn="l"/>
+            <a:r>
+              <a:rPr lang="en-US" b="0" i="0" dirty="0">
+                <a:solidFill>
+                  <a:srgbClr val="B8B8B8"/>
+                </a:solidFill>
+                <a:effectLst/>
+                <a:latin typeface="Open Sans" panose="020B0606030504020204" pitchFamily="34" charset="0"/>
+              </a:rPr>
+              <a:t>a</a:t>
+            </a:r>
+            <a:r>
+              <a:rPr lang="en-US" dirty="0">
+                <a:solidFill>
+                  <a:srgbClr val="B8B8B8"/>
+                </a:solidFill>
+                <a:latin typeface="Open Sans" panose="020B0606030504020204" pitchFamily="34" charset="0"/>
+              </a:rPr>
+              <a:t>)</a:t>
+            </a:r>
+            <a:r>
+              <a:rPr lang="en-US" b="0" i="0" dirty="0">
+                <a:solidFill>
+                  <a:srgbClr val="B8B8B8"/>
+                </a:solidFill>
+                <a:effectLst/>
+                <a:latin typeface="Open Sans" panose="020B0606030504020204" pitchFamily="34" charset="0"/>
+              </a:rPr>
+              <a:t>  12  6</a:t>
+            </a:r>
+          </a:p>
+          <a:p>
+            <a:pPr algn="l"/>
+            <a:r>
+              <a:rPr lang="en-US" b="0" i="0" dirty="0">
+                <a:solidFill>
+                  <a:srgbClr val="B8B8B8"/>
+                </a:solidFill>
+                <a:effectLst/>
+                <a:latin typeface="Open Sans" panose="020B0606030504020204" pitchFamily="34" charset="0"/>
+              </a:rPr>
+              <a:t>b)  12  0</a:t>
+            </a:r>
+          </a:p>
+          <a:p>
+            <a:pPr algn="l"/>
+            <a:r>
+              <a:rPr lang="en-US" b="0" i="0" dirty="0">
+                <a:solidFill>
+                  <a:srgbClr val="B8B8B8"/>
+                </a:solidFill>
+                <a:effectLst/>
+                <a:latin typeface="Open Sans" panose="020B0606030504020204" pitchFamily="34" charset="0"/>
+              </a:rPr>
+              <a:t>c)   twelve six</a:t>
+            </a:r>
+          </a:p>
+          <a:p>
+            <a:pPr algn="l"/>
+            <a:r>
+              <a:rPr lang="en-US" b="0" i="0" dirty="0">
+                <a:solidFill>
+                  <a:srgbClr val="B8B8B8"/>
+                </a:solidFill>
+                <a:effectLst/>
+                <a:latin typeface="Open Sans" panose="020B0606030504020204" pitchFamily="34" charset="0"/>
+              </a:rPr>
+              <a:t>d)  12</a:t>
+            </a:r>
+            <a:endParaRPr lang="en-US" dirty="0"/>
+          </a:p>
+        </p:txBody>
+      </p:sp>
+    </p:spTree>
+    <p:extLst>
+      <p:ext uri="{BB962C8B-B14F-4D97-AF65-F5344CB8AC3E}">
+        <p14:creationId xmlns:p14="http://schemas.microsoft.com/office/powerpoint/2010/main" val="1987769376"/>
+      </p:ext>
+    </p:extLst>
+  </p:cSld>
+  <p:clrMapOvr>
+    <a:masterClrMapping/>
+  </p:clrMapOvr>
+</p:sld>
+</file>
+
+<file path=ppt/slides/slide23.xml><?xml version="1.0" encoding="utf-8"?>
+<p:sld xmlns:a="http://schemas.openxmlformats.org/drawingml/2006/main" xmlns:r="http://schemas.openxmlformats.org/officeDocument/2006/relationships" xmlns:p="http://schemas.openxmlformats.org/presentationml/2006/main">
+  <p:cSld>
+    <p:spTree>
+      <p:nvGrpSpPr>
+        <p:cNvPr id="1" name=""/>
+        <p:cNvGrpSpPr/>
+        <p:nvPr/>
+      </p:nvGrpSpPr>
+      <p:grpSpPr>
+        <a:xfrm>
+          <a:off x="0" y="0"/>
+          <a:ext cx="0" cy="0"/>
+          <a:chOff x="0" y="0"/>
+          <a:chExt cx="0" cy="0"/>
+        </a:xfrm>
+      </p:grpSpPr>
+      <p:pic>
+        <p:nvPicPr>
+          <p:cNvPr id="7" name="Picture 6" descr="A picture containing diagram&#10;&#10;Description automatically generated">
+            <a:extLst>
+              <a:ext uri="{FF2B5EF4-FFF2-40B4-BE49-F238E27FC236}">
+                <a16:creationId xmlns:a16="http://schemas.microsoft.com/office/drawing/2014/main" id="{63013A48-177C-684B-0287-D16FB97BFE6C}"/>
+              </a:ext>
+            </a:extLst>
+          </p:cNvPr>
+          <p:cNvPicPr>
+            <a:picLocks noChangeAspect="1"/>
+          </p:cNvPicPr>
+          <p:nvPr/>
+        </p:nvPicPr>
+        <p:blipFill>
+          <a:blip r:embed="rId2">
+            <a:extLst>
+              <a:ext uri="{28A0092B-C50C-407E-A947-70E740481C1C}">
+                <a14:useLocalDpi xmlns:a14="http://schemas.microsoft.com/office/drawing/2010/main" val="0"/>
+              </a:ext>
+            </a:extLst>
+          </a:blip>
+          <a:stretch>
+            <a:fillRect/>
+          </a:stretch>
+        </p:blipFill>
+        <p:spPr>
+          <a:xfrm>
+            <a:off x="4953000" y="914400"/>
+            <a:ext cx="3908081" cy="5268138"/>
+          </a:xfrm>
+          <a:prstGeom prst="rect">
+            <a:avLst/>
+          </a:prstGeom>
+        </p:spPr>
+      </p:pic>
+      <p:sp>
+        <p:nvSpPr>
+          <p:cNvPr id="11266" name="Title 1">
+            <a:extLst>
+              <a:ext uri="{FF2B5EF4-FFF2-40B4-BE49-F238E27FC236}">
+                <a16:creationId xmlns:a16="http://schemas.microsoft.com/office/drawing/2014/main" id="{5FB49DC6-DEC6-A3B3-0ED2-BB8B65FA40CC}"/>
+              </a:ext>
+            </a:extLst>
+          </p:cNvPr>
+          <p:cNvSpPr>
+            <a:spLocks noGrp="1"/>
+          </p:cNvSpPr>
+          <p:nvPr>
+            <p:ph type="title"/>
+          </p:nvPr>
+        </p:nvSpPr>
+        <p:spPr/>
+        <p:txBody>
+          <a:bodyPr/>
+          <a:lstStyle/>
+          <a:p>
+            <a:pPr>
+              <a:defRPr/>
+            </a:pPr>
+            <a:r>
+              <a:rPr lang="en-US" altLang="en-US" dirty="0"/>
+              <a:t>modified </a:t>
+            </a:r>
+            <a:r>
+              <a:rPr lang="en-US" altLang="en-US" dirty="0" err="1"/>
+              <a:t>slopeTry</a:t>
+            </a:r>
+            <a:r>
+              <a:rPr lang="en-US" altLang="en-US" dirty="0"/>
+              <a:t> process</a:t>
+            </a:r>
+          </a:p>
+        </p:txBody>
+      </p:sp>
+      <p:sp>
+        <p:nvSpPr>
+          <p:cNvPr id="3" name="TextBox 2">
+            <a:extLst>
+              <a:ext uri="{FF2B5EF4-FFF2-40B4-BE49-F238E27FC236}">
+                <a16:creationId xmlns:a16="http://schemas.microsoft.com/office/drawing/2014/main" id="{A4F3DD98-4E4E-AE1E-38A2-525365B4A2ED}"/>
+              </a:ext>
+            </a:extLst>
+          </p:cNvPr>
+          <p:cNvSpPr txBox="1"/>
+          <p:nvPr/>
+        </p:nvSpPr>
+        <p:spPr>
+          <a:xfrm>
+            <a:off x="381000" y="1206277"/>
+            <a:ext cx="5638800" cy="2862322"/>
+          </a:xfrm>
+          <a:prstGeom prst="rect">
+            <a:avLst/>
+          </a:prstGeom>
+          <a:noFill/>
+        </p:spPr>
+        <p:txBody>
+          <a:bodyPr wrap="square">
+            <a:spAutoFit/>
+          </a:bodyPr>
+          <a:lstStyle/>
+          <a:p>
+            <a:pPr>
+              <a:buNone/>
+            </a:pPr>
+            <a:r>
+              <a:rPr lang="en-US" sz="1200" b="0" dirty="0">
+                <a:solidFill>
+                  <a:srgbClr val="6A9955"/>
+                </a:solidFill>
+                <a:effectLst/>
+                <a:latin typeface="Consolas" panose="020B0609020204030204" pitchFamily="49" charset="0"/>
+              </a:rPr>
+              <a:t># slopeTry.py</a:t>
+            </a:r>
+            <a:endParaRPr lang="en-US" sz="1200" b="0" dirty="0">
+              <a:solidFill>
+                <a:srgbClr val="D4D4D4"/>
+              </a:solidFill>
+              <a:effectLst/>
+              <a:latin typeface="Consolas" panose="020B0609020204030204" pitchFamily="49" charset="0"/>
+            </a:endParaRPr>
+          </a:p>
+          <a:p>
+            <a:pPr>
+              <a:buNone/>
+            </a:pPr>
+            <a:r>
+              <a:rPr lang="en-US" sz="1200" b="0" dirty="0">
+                <a:solidFill>
+                  <a:srgbClr val="569CD6"/>
+                </a:solidFill>
+                <a:effectLst/>
+                <a:latin typeface="Consolas" panose="020B0609020204030204" pitchFamily="49" charset="0"/>
+              </a:rPr>
+              <a:t>import</a:t>
+            </a:r>
+            <a:r>
+              <a:rPr lang="en-US" sz="1200" b="0" dirty="0">
+                <a:solidFill>
+                  <a:srgbClr val="D4D4D4"/>
+                </a:solidFill>
+                <a:effectLst/>
+                <a:latin typeface="Consolas" panose="020B0609020204030204" pitchFamily="49" charset="0"/>
+              </a:rPr>
+              <a:t> sys </a:t>
+            </a:r>
+          </a:p>
+          <a:p>
+            <a:pPr>
+              <a:buNone/>
+            </a:pPr>
+            <a:r>
+              <a:rPr lang="en-US" sz="1200" b="0" dirty="0">
+                <a:solidFill>
+                  <a:srgbClr val="D4D4D4"/>
+                </a:solidFill>
+                <a:effectLst/>
+                <a:latin typeface="Consolas" panose="020B0609020204030204" pitchFamily="49" charset="0"/>
+              </a:rPr>
+              <a:t>rise = </a:t>
+            </a:r>
+            <a:r>
+              <a:rPr lang="en-US" sz="1200" b="0" dirty="0" err="1">
+                <a:solidFill>
+                  <a:srgbClr val="D4D4D4"/>
+                </a:solidFill>
+                <a:effectLst/>
+                <a:latin typeface="Consolas" panose="020B0609020204030204" pitchFamily="49" charset="0"/>
+              </a:rPr>
+              <a:t>sys.argv</a:t>
+            </a:r>
+            <a:r>
+              <a:rPr lang="en-US" sz="1200" b="0" dirty="0">
+                <a:solidFill>
+                  <a:srgbClr val="D4D4D4"/>
+                </a:solidFill>
+                <a:effectLst/>
+                <a:latin typeface="Consolas" panose="020B0609020204030204" pitchFamily="49" charset="0"/>
+              </a:rPr>
+              <a:t>[</a:t>
+            </a:r>
+            <a:r>
+              <a:rPr lang="en-US" sz="1200" b="0" dirty="0">
+                <a:solidFill>
+                  <a:srgbClr val="B5CEA8"/>
+                </a:solidFill>
+                <a:effectLst/>
+                <a:latin typeface="Consolas" panose="020B0609020204030204" pitchFamily="49" charset="0"/>
+              </a:rPr>
+              <a:t>1</a:t>
+            </a:r>
+            <a:r>
+              <a:rPr lang="en-US" sz="1200" b="0" dirty="0">
+                <a:solidFill>
+                  <a:srgbClr val="D4D4D4"/>
+                </a:solidFill>
+                <a:effectLst/>
+                <a:latin typeface="Consolas" panose="020B0609020204030204" pitchFamily="49" charset="0"/>
+              </a:rPr>
+              <a:t>] </a:t>
+            </a:r>
+          </a:p>
+          <a:p>
+            <a:pPr>
+              <a:buNone/>
+            </a:pPr>
+            <a:r>
+              <a:rPr lang="en-US" sz="1200" dirty="0">
+                <a:solidFill>
+                  <a:srgbClr val="D4D4D4"/>
+                </a:solidFill>
+                <a:latin typeface="Consolas" panose="020B0609020204030204" pitchFamily="49" charset="0"/>
+              </a:rPr>
+              <a:t>slope = </a:t>
+            </a:r>
+            <a:r>
+              <a:rPr lang="en-US" sz="1200" b="0" dirty="0">
+                <a:solidFill>
+                  <a:srgbClr val="CE9178"/>
+                </a:solidFill>
+                <a:effectLst/>
+                <a:latin typeface="Consolas" panose="020B0609020204030204" pitchFamily="49" charset="0"/>
+              </a:rPr>
+              <a:t>"Unknown"</a:t>
+            </a:r>
+            <a:endParaRPr lang="en-US" sz="1200" b="0" dirty="0">
+              <a:solidFill>
+                <a:srgbClr val="D4D4D4"/>
+              </a:solidFill>
+              <a:effectLst/>
+              <a:latin typeface="Consolas" panose="020B0609020204030204" pitchFamily="49" charset="0"/>
+            </a:endParaRPr>
+          </a:p>
+          <a:p>
+            <a:pPr>
+              <a:buNone/>
+            </a:pPr>
+            <a:r>
+              <a:rPr lang="en-US" sz="1200" b="0" dirty="0">
+                <a:solidFill>
+                  <a:srgbClr val="569CD6"/>
+                </a:solidFill>
+                <a:effectLst/>
+                <a:latin typeface="Consolas" panose="020B0609020204030204" pitchFamily="49" charset="0"/>
+              </a:rPr>
+              <a:t>try</a:t>
+            </a:r>
+            <a:r>
+              <a:rPr lang="en-US" sz="1200" b="0" dirty="0">
+                <a:solidFill>
+                  <a:srgbClr val="D4D4D4"/>
+                </a:solidFill>
+                <a:effectLst/>
+                <a:latin typeface="Consolas" panose="020B0609020204030204" pitchFamily="49" charset="0"/>
+              </a:rPr>
+              <a:t>:</a:t>
+            </a:r>
+          </a:p>
+          <a:p>
+            <a:r>
+              <a:rPr lang="en-US" sz="1200" dirty="0">
+                <a:solidFill>
+                  <a:srgbClr val="D4D4D4"/>
+                </a:solidFill>
+                <a:latin typeface="Consolas" panose="020B0609020204030204" pitchFamily="49" charset="0"/>
+              </a:rPr>
+              <a:t>    </a:t>
+            </a:r>
+            <a:r>
+              <a:rPr lang="en-US" sz="1200" b="0" dirty="0">
+                <a:solidFill>
+                  <a:srgbClr val="D4D4D4"/>
+                </a:solidFill>
+                <a:effectLst/>
+                <a:latin typeface="Consolas" panose="020B0609020204030204" pitchFamily="49" charset="0"/>
+              </a:rPr>
+              <a:t>run = sys.argv[</a:t>
+            </a:r>
+            <a:r>
+              <a:rPr lang="en-US" sz="1200" b="0" dirty="0">
+                <a:solidFill>
+                  <a:srgbClr val="B5CEA8"/>
+                </a:solidFill>
+                <a:effectLst/>
+                <a:latin typeface="Consolas" panose="020B0609020204030204" pitchFamily="49" charset="0"/>
+              </a:rPr>
+              <a:t>2</a:t>
+            </a:r>
+            <a:r>
+              <a:rPr lang="en-US" sz="1200" b="0" dirty="0">
+                <a:solidFill>
+                  <a:srgbClr val="D4D4D4"/>
+                </a:solidFill>
+                <a:effectLst/>
+                <a:latin typeface="Consolas" panose="020B0609020204030204" pitchFamily="49" charset="0"/>
+              </a:rPr>
+              <a:t>]</a:t>
+            </a:r>
+          </a:p>
+          <a:p>
+            <a:pPr>
+              <a:buNone/>
+            </a:pPr>
+            <a:r>
+              <a:rPr lang="en-US" sz="1200" b="0" dirty="0">
+                <a:solidFill>
+                  <a:srgbClr val="D4D4D4"/>
+                </a:solidFill>
+                <a:effectLst/>
+                <a:latin typeface="Consolas" panose="020B0609020204030204" pitchFamily="49" charset="0"/>
+              </a:rPr>
+              <a:t>    print (</a:t>
+            </a:r>
+            <a:r>
+              <a:rPr lang="en-US" sz="1200" b="0" dirty="0" err="1">
+                <a:solidFill>
+                  <a:srgbClr val="569CD6"/>
+                </a:solidFill>
+                <a:effectLst/>
+                <a:latin typeface="Consolas" panose="020B0609020204030204" pitchFamily="49" charset="0"/>
+              </a:rPr>
+              <a:t>f</a:t>
+            </a:r>
+            <a:r>
+              <a:rPr lang="en-US" sz="1200" b="0" dirty="0" err="1">
+                <a:solidFill>
+                  <a:srgbClr val="CE9178"/>
+                </a:solidFill>
+                <a:effectLst/>
+                <a:latin typeface="Consolas" panose="020B0609020204030204" pitchFamily="49" charset="0"/>
+              </a:rPr>
+              <a:t>"Rise</a:t>
+            </a:r>
+            <a:r>
+              <a:rPr lang="en-US" sz="1200" b="0" dirty="0">
+                <a:solidFill>
+                  <a:srgbClr val="CE9178"/>
+                </a:solidFill>
+                <a:effectLst/>
+                <a:latin typeface="Consolas" panose="020B0609020204030204" pitchFamily="49" charset="0"/>
+              </a:rPr>
+              <a:t>: </a:t>
+            </a:r>
+            <a:r>
+              <a:rPr lang="en-US" sz="1200" b="0" dirty="0">
+                <a:solidFill>
+                  <a:srgbClr val="D4D4D4"/>
+                </a:solidFill>
+                <a:effectLst/>
+                <a:latin typeface="Consolas" panose="020B0609020204030204" pitchFamily="49" charset="0"/>
+              </a:rPr>
+              <a:t>{rise}</a:t>
+            </a:r>
+            <a:r>
+              <a:rPr lang="en-US" sz="1200" b="0" dirty="0">
+                <a:solidFill>
+                  <a:srgbClr val="CE9178"/>
+                </a:solidFill>
+                <a:effectLst/>
+                <a:latin typeface="Consolas" panose="020B0609020204030204" pitchFamily="49" charset="0"/>
+              </a:rPr>
+              <a:t>   Run: </a:t>
+            </a:r>
+            <a:r>
+              <a:rPr lang="en-US" sz="1200" b="0" dirty="0">
+                <a:solidFill>
+                  <a:srgbClr val="D4D4D4"/>
+                </a:solidFill>
+                <a:effectLst/>
+                <a:latin typeface="Consolas" panose="020B0609020204030204" pitchFamily="49" charset="0"/>
+              </a:rPr>
+              <a:t>{run}</a:t>
+            </a:r>
+            <a:r>
+              <a:rPr lang="en-US" sz="1200" b="0" dirty="0">
+                <a:solidFill>
+                  <a:srgbClr val="CE9178"/>
+                </a:solidFill>
+                <a:effectLst/>
+                <a:latin typeface="Consolas" panose="020B0609020204030204" pitchFamily="49" charset="0"/>
+              </a:rPr>
+              <a:t>"</a:t>
+            </a:r>
+            <a:r>
+              <a:rPr lang="en-US" sz="1200" b="0" dirty="0">
+                <a:solidFill>
+                  <a:srgbClr val="D4D4D4"/>
+                </a:solidFill>
+                <a:effectLst/>
+                <a:latin typeface="Consolas" panose="020B0609020204030204" pitchFamily="49" charset="0"/>
+              </a:rPr>
+              <a:t>)</a:t>
+            </a:r>
+          </a:p>
+          <a:p>
+            <a:pPr>
+              <a:buNone/>
+            </a:pPr>
+            <a:r>
+              <a:rPr lang="en-US" sz="1200" b="0" dirty="0">
+                <a:solidFill>
+                  <a:srgbClr val="D4D4D4"/>
+                </a:solidFill>
+                <a:effectLst/>
+                <a:latin typeface="Consolas" panose="020B0609020204030204" pitchFamily="49" charset="0"/>
+              </a:rPr>
+              <a:t>    slope = float(rise)/float(run)</a:t>
+            </a:r>
+          </a:p>
+          <a:p>
+            <a:pPr>
+              <a:buNone/>
+            </a:pPr>
+            <a:r>
+              <a:rPr lang="en-US" sz="1200" b="0" dirty="0">
+                <a:solidFill>
+                  <a:srgbClr val="D4D4D4"/>
+                </a:solidFill>
+                <a:effectLst/>
+                <a:latin typeface="Consolas" panose="020B0609020204030204" pitchFamily="49" charset="0"/>
+              </a:rPr>
+              <a:t>    print(</a:t>
+            </a:r>
+            <a:r>
+              <a:rPr lang="en-US" sz="1200" b="0" dirty="0">
+                <a:solidFill>
+                  <a:srgbClr val="CE9178"/>
+                </a:solidFill>
+                <a:effectLst/>
+                <a:latin typeface="Consolas" panose="020B0609020204030204" pitchFamily="49" charset="0"/>
+              </a:rPr>
+              <a:t>"Slope = rise/run"</a:t>
+            </a:r>
+            <a:r>
+              <a:rPr lang="en-US" sz="1200" b="0" dirty="0">
+                <a:solidFill>
+                  <a:srgbClr val="D4D4D4"/>
+                </a:solidFill>
+                <a:effectLst/>
+                <a:latin typeface="Consolas" panose="020B0609020204030204" pitchFamily="49" charset="0"/>
+              </a:rPr>
+              <a:t>)</a:t>
+            </a:r>
+          </a:p>
+          <a:p>
+            <a:pPr>
+              <a:buNone/>
+            </a:pPr>
+            <a:r>
+              <a:rPr lang="en-US" sz="1200" b="0" dirty="0">
+                <a:solidFill>
+                  <a:srgbClr val="569CD6"/>
+                </a:solidFill>
+                <a:effectLst/>
+                <a:latin typeface="Consolas" panose="020B0609020204030204" pitchFamily="49" charset="0"/>
+              </a:rPr>
+              <a:t>except</a:t>
+            </a:r>
+            <a:r>
+              <a:rPr lang="en-US" sz="1200" b="0" dirty="0">
+                <a:solidFill>
+                  <a:srgbClr val="D4D4D4"/>
+                </a:solidFill>
+                <a:effectLst/>
+                <a:latin typeface="Consolas" panose="020B0609020204030204" pitchFamily="49" charset="0"/>
+              </a:rPr>
+              <a:t> </a:t>
+            </a:r>
+            <a:r>
+              <a:rPr lang="en-US" sz="1200" b="0" dirty="0" err="1">
+                <a:solidFill>
+                  <a:srgbClr val="D4D4D4"/>
+                </a:solidFill>
+                <a:effectLst/>
+                <a:latin typeface="Consolas" panose="020B0609020204030204" pitchFamily="49" charset="0"/>
+              </a:rPr>
+              <a:t>ZeroDivisionError</a:t>
+            </a:r>
+            <a:r>
+              <a:rPr lang="en-US" sz="1200" b="0" dirty="0">
+                <a:solidFill>
+                  <a:srgbClr val="D4D4D4"/>
+                </a:solidFill>
+                <a:effectLst/>
+                <a:latin typeface="Consolas" panose="020B0609020204030204" pitchFamily="49" charset="0"/>
+              </a:rPr>
+              <a:t>:</a:t>
+            </a:r>
+          </a:p>
+          <a:p>
+            <a:pPr>
+              <a:buNone/>
+            </a:pPr>
+            <a:r>
+              <a:rPr lang="en-US" sz="1200" b="0" dirty="0">
+                <a:solidFill>
+                  <a:srgbClr val="D4D4D4"/>
+                </a:solidFill>
+                <a:effectLst/>
+                <a:latin typeface="Consolas" panose="020B0609020204030204" pitchFamily="49" charset="0"/>
+              </a:rPr>
+              <a:t>    slope = </a:t>
+            </a:r>
+            <a:r>
+              <a:rPr lang="en-US" sz="1200" b="0" dirty="0">
+                <a:solidFill>
+                  <a:srgbClr val="CE9178"/>
+                </a:solidFill>
+                <a:effectLst/>
+                <a:latin typeface="Consolas" panose="020B0609020204030204" pitchFamily="49" charset="0"/>
+              </a:rPr>
+              <a:t>"Undefined (line is vertical) "</a:t>
+            </a:r>
+            <a:endParaRPr lang="en-US" sz="1200" b="0" dirty="0">
+              <a:solidFill>
+                <a:srgbClr val="D4D4D4"/>
+              </a:solidFill>
+              <a:effectLst/>
+              <a:latin typeface="Consolas" panose="020B0609020204030204" pitchFamily="49" charset="0"/>
+            </a:endParaRPr>
+          </a:p>
+          <a:p>
+            <a:pPr>
+              <a:buNone/>
+            </a:pPr>
+            <a:r>
+              <a:rPr lang="en-US" sz="1200" b="0" dirty="0">
+                <a:solidFill>
+                  <a:srgbClr val="569CD6"/>
+                </a:solidFill>
+                <a:effectLst/>
+                <a:latin typeface="Consolas" panose="020B0609020204030204" pitchFamily="49" charset="0"/>
+              </a:rPr>
+              <a:t>except</a:t>
+            </a:r>
+            <a:r>
+              <a:rPr lang="en-US" sz="1200" b="0" dirty="0">
+                <a:solidFill>
+                  <a:srgbClr val="D4D4D4"/>
+                </a:solidFill>
+                <a:effectLst/>
+                <a:latin typeface="Consolas" panose="020B0609020204030204" pitchFamily="49" charset="0"/>
+              </a:rPr>
+              <a:t> </a:t>
+            </a:r>
+            <a:r>
+              <a:rPr lang="en-US" sz="1200" b="0" dirty="0" err="1">
+                <a:solidFill>
+                  <a:srgbClr val="D4D4D4"/>
+                </a:solidFill>
+                <a:effectLst/>
+                <a:latin typeface="Consolas" panose="020B0609020204030204" pitchFamily="49" charset="0"/>
+              </a:rPr>
+              <a:t>ValueError</a:t>
+            </a:r>
+            <a:r>
+              <a:rPr lang="en-US" sz="1200" b="0" dirty="0">
+                <a:solidFill>
+                  <a:srgbClr val="D4D4D4"/>
+                </a:solidFill>
+                <a:effectLst/>
+                <a:latin typeface="Consolas" panose="020B0609020204030204" pitchFamily="49" charset="0"/>
+              </a:rPr>
+              <a:t>:</a:t>
+            </a:r>
+          </a:p>
+          <a:p>
+            <a:pPr>
+              <a:buNone/>
+            </a:pPr>
+            <a:r>
+              <a:rPr lang="en-US" sz="1200" b="0" dirty="0">
+                <a:solidFill>
+                  <a:srgbClr val="D4D4D4"/>
+                </a:solidFill>
+                <a:effectLst/>
+                <a:latin typeface="Consolas" panose="020B0609020204030204" pitchFamily="49" charset="0"/>
+              </a:rPr>
+              <a:t>    print(</a:t>
+            </a:r>
+            <a:r>
+              <a:rPr lang="en-US" sz="1200" b="0" dirty="0">
+                <a:solidFill>
+                  <a:srgbClr val="CE9178"/>
+                </a:solidFill>
+                <a:effectLst/>
+                <a:latin typeface="Consolas" panose="020B0609020204030204" pitchFamily="49" charset="0"/>
+              </a:rPr>
+              <a:t>"Usage: &lt;numeric rise&gt; &lt;numeric run&gt;"</a:t>
+            </a:r>
+            <a:r>
+              <a:rPr lang="en-US" sz="1200" b="0" dirty="0">
+                <a:solidFill>
+                  <a:srgbClr val="D4D4D4"/>
+                </a:solidFill>
+                <a:effectLst/>
+                <a:latin typeface="Consolas" panose="020B0609020204030204" pitchFamily="49" charset="0"/>
+              </a:rPr>
+              <a:t>)</a:t>
+            </a:r>
+          </a:p>
+          <a:p>
+            <a:pPr>
+              <a:buNone/>
+            </a:pPr>
+            <a:r>
+              <a:rPr lang="en-US" sz="1200" b="0" dirty="0">
+                <a:solidFill>
+                  <a:srgbClr val="D4D4D4"/>
+                </a:solidFill>
+                <a:effectLst/>
+                <a:latin typeface="Consolas" panose="020B0609020204030204" pitchFamily="49" charset="0"/>
+              </a:rPr>
+              <a:t>    slope = </a:t>
+            </a:r>
+            <a:r>
+              <a:rPr lang="en-US" sz="1200" b="0" dirty="0">
+                <a:solidFill>
+                  <a:srgbClr val="CE9178"/>
+                </a:solidFill>
+                <a:effectLst/>
+                <a:latin typeface="Consolas" panose="020B0609020204030204" pitchFamily="49" charset="0"/>
+              </a:rPr>
+              <a:t>"Not found"</a:t>
+            </a:r>
+          </a:p>
+          <a:p>
+            <a:pPr>
+              <a:buNone/>
+            </a:pPr>
+            <a:r>
+              <a:rPr lang="en-US" sz="1200" b="0" dirty="0">
+                <a:solidFill>
+                  <a:srgbClr val="D4D4D4"/>
+                </a:solidFill>
+                <a:effectLst/>
+                <a:latin typeface="Consolas" panose="020B0609020204030204" pitchFamily="49" charset="0"/>
+              </a:rPr>
+              <a:t>print (</a:t>
+            </a:r>
+            <a:r>
+              <a:rPr lang="en-US" sz="1200" b="0" dirty="0" err="1">
+                <a:solidFill>
+                  <a:srgbClr val="569CD6"/>
+                </a:solidFill>
+                <a:effectLst/>
+                <a:latin typeface="Consolas" panose="020B0609020204030204" pitchFamily="49" charset="0"/>
+              </a:rPr>
+              <a:t>f</a:t>
+            </a:r>
+            <a:r>
+              <a:rPr lang="en-US" sz="1200" b="0" dirty="0" err="1">
+                <a:solidFill>
+                  <a:srgbClr val="CE9178"/>
+                </a:solidFill>
+                <a:effectLst/>
+                <a:latin typeface="Consolas" panose="020B0609020204030204" pitchFamily="49" charset="0"/>
+              </a:rPr>
+              <a:t>"Slope</a:t>
+            </a:r>
+            <a:r>
+              <a:rPr lang="en-US" sz="1200" b="0" dirty="0">
+                <a:solidFill>
+                  <a:srgbClr val="CE9178"/>
+                </a:solidFill>
+                <a:effectLst/>
+                <a:latin typeface="Consolas" panose="020B0609020204030204" pitchFamily="49" charset="0"/>
+              </a:rPr>
+              <a:t>: </a:t>
+            </a:r>
+            <a:r>
+              <a:rPr lang="en-US" sz="1200" b="0" dirty="0">
+                <a:solidFill>
+                  <a:srgbClr val="D4D4D4"/>
+                </a:solidFill>
+                <a:effectLst/>
+                <a:latin typeface="Consolas" panose="020B0609020204030204" pitchFamily="49" charset="0"/>
+              </a:rPr>
+              <a:t>{slope}</a:t>
+            </a:r>
+            <a:r>
+              <a:rPr lang="en-US" sz="1200" b="0" dirty="0">
+                <a:solidFill>
+                  <a:srgbClr val="CE9178"/>
+                </a:solidFill>
+                <a:effectLst/>
+                <a:latin typeface="Consolas" panose="020B0609020204030204" pitchFamily="49" charset="0"/>
+              </a:rPr>
+              <a:t>"</a:t>
+            </a:r>
+            <a:r>
+              <a:rPr lang="en-US" sz="1200" b="0" dirty="0">
+                <a:solidFill>
+                  <a:srgbClr val="D4D4D4"/>
+                </a:solidFill>
+                <a:effectLst/>
+                <a:latin typeface="Consolas" panose="020B0609020204030204" pitchFamily="49" charset="0"/>
+              </a:rPr>
+              <a:t>)</a:t>
+            </a:r>
+          </a:p>
+        </p:txBody>
+      </p:sp>
+      <p:sp>
+        <p:nvSpPr>
+          <p:cNvPr id="6" name="TextBox 5">
+            <a:extLst>
+              <a:ext uri="{FF2B5EF4-FFF2-40B4-BE49-F238E27FC236}">
+                <a16:creationId xmlns:a16="http://schemas.microsoft.com/office/drawing/2014/main" id="{91C5CDDA-12C3-21F8-C1EF-2C896313A71D}"/>
+              </a:ext>
+            </a:extLst>
+          </p:cNvPr>
+          <p:cNvSpPr txBox="1"/>
+          <p:nvPr/>
+        </p:nvSpPr>
+        <p:spPr>
+          <a:xfrm>
+            <a:off x="8077200" y="5420380"/>
+            <a:ext cx="1142998" cy="738664"/>
+          </a:xfrm>
+          <a:prstGeom prst="rect">
+            <a:avLst/>
+          </a:prstGeom>
+          <a:noFill/>
+        </p:spPr>
+        <p:txBody>
+          <a:bodyPr wrap="square">
+            <a:spAutoFit/>
+          </a:bodyPr>
+          <a:lstStyle/>
+          <a:p>
+            <a:pPr>
+              <a:buNone/>
+            </a:pPr>
+            <a:r>
+              <a:rPr lang="en-US" sz="1400" b="0" dirty="0">
+                <a:solidFill>
+                  <a:srgbClr val="FFF575"/>
+                </a:solidFill>
+                <a:effectLst/>
+                <a:latin typeface="Consolas" panose="020B0609020204030204" pitchFamily="49" charset="0"/>
+              </a:rPr>
+              <a:t>b) and c) print </a:t>
+            </a:r>
+            <a:r>
+              <a:rPr lang="en-US" sz="1400" dirty="0">
+                <a:solidFill>
+                  <a:srgbClr val="FFF575"/>
+                </a:solidFill>
+                <a:latin typeface="Consolas" panose="020B0609020204030204" pitchFamily="49" charset="0"/>
+              </a:rPr>
+              <a:t>the slope</a:t>
+            </a:r>
+            <a:endParaRPr lang="en-US" sz="1400" b="0" dirty="0">
+              <a:solidFill>
+                <a:srgbClr val="FFF575"/>
+              </a:solidFill>
+              <a:effectLst/>
+              <a:latin typeface="Consolas" panose="020B0609020204030204" pitchFamily="49" charset="0"/>
+            </a:endParaRPr>
+          </a:p>
+        </p:txBody>
+      </p:sp>
+      <p:cxnSp>
+        <p:nvCxnSpPr>
+          <p:cNvPr id="8" name="Straight Arrow Connector 7">
+            <a:extLst>
+              <a:ext uri="{FF2B5EF4-FFF2-40B4-BE49-F238E27FC236}">
+                <a16:creationId xmlns:a16="http://schemas.microsoft.com/office/drawing/2014/main" id="{C8606B24-F39C-F7D2-B9F4-1CB156A77BCB}"/>
+              </a:ext>
+            </a:extLst>
+          </p:cNvPr>
+          <p:cNvCxnSpPr>
+            <a:cxnSpLocks/>
+          </p:cNvCxnSpPr>
+          <p:nvPr/>
+        </p:nvCxnSpPr>
+        <p:spPr>
+          <a:xfrm flipV="1">
+            <a:off x="8305800" y="5054793"/>
+            <a:ext cx="0" cy="361122"/>
+          </a:xfrm>
+          <a:prstGeom prst="straightConnector1">
+            <a:avLst/>
+          </a:prstGeom>
+          <a:ln>
+            <a:tailEnd type="triangle"/>
+          </a:ln>
+        </p:spPr>
+        <p:style>
+          <a:lnRef idx="1">
+            <a:schemeClr val="accent1"/>
+          </a:lnRef>
+          <a:fillRef idx="0">
+            <a:schemeClr val="accent1"/>
+          </a:fillRef>
+          <a:effectRef idx="0">
+            <a:schemeClr val="accent1"/>
+          </a:effectRef>
+          <a:fontRef idx="minor">
+            <a:schemeClr val="tx1"/>
+          </a:fontRef>
+        </p:style>
+      </p:cxnSp>
+      <p:sp>
+        <p:nvSpPr>
+          <p:cNvPr id="20" name="TextBox 19">
+            <a:extLst>
+              <a:ext uri="{FF2B5EF4-FFF2-40B4-BE49-F238E27FC236}">
+                <a16:creationId xmlns:a16="http://schemas.microsoft.com/office/drawing/2014/main" id="{293FB7A5-1A99-BF6D-54DA-09F0DE9D874A}"/>
+              </a:ext>
+            </a:extLst>
+          </p:cNvPr>
+          <p:cNvSpPr txBox="1"/>
+          <p:nvPr/>
+        </p:nvSpPr>
+        <p:spPr>
+          <a:xfrm>
+            <a:off x="4800600" y="3743980"/>
+            <a:ext cx="1219200" cy="523220"/>
+          </a:xfrm>
+          <a:prstGeom prst="rect">
+            <a:avLst/>
+          </a:prstGeom>
+          <a:noFill/>
+        </p:spPr>
+        <p:txBody>
+          <a:bodyPr wrap="square">
+            <a:spAutoFit/>
+          </a:bodyPr>
+          <a:lstStyle/>
+          <a:p>
+            <a:pPr>
+              <a:buNone/>
+            </a:pPr>
+            <a:r>
+              <a:rPr lang="en-US" sz="1400" b="0" dirty="0">
+                <a:solidFill>
+                  <a:srgbClr val="FFF575"/>
+                </a:solidFill>
+                <a:effectLst/>
+                <a:latin typeface="Consolas" panose="020B0609020204030204" pitchFamily="49" charset="0"/>
+              </a:rPr>
+              <a:t>a) print </a:t>
+            </a:r>
+            <a:r>
+              <a:rPr lang="en-US" sz="1400" dirty="0">
+                <a:solidFill>
+                  <a:srgbClr val="FFF575"/>
+                </a:solidFill>
+                <a:latin typeface="Consolas" panose="020B0609020204030204" pitchFamily="49" charset="0"/>
+              </a:rPr>
+              <a:t>the slope</a:t>
+            </a:r>
+            <a:endParaRPr lang="en-US" sz="1400" b="0" dirty="0">
+              <a:solidFill>
+                <a:srgbClr val="FFF575"/>
+              </a:solidFill>
+              <a:effectLst/>
+              <a:latin typeface="Consolas" panose="020B0609020204030204" pitchFamily="49" charset="0"/>
+            </a:endParaRPr>
+          </a:p>
+        </p:txBody>
+      </p:sp>
+      <p:cxnSp>
+        <p:nvCxnSpPr>
+          <p:cNvPr id="21" name="Straight Arrow Connector 20">
+            <a:extLst>
+              <a:ext uri="{FF2B5EF4-FFF2-40B4-BE49-F238E27FC236}">
+                <a16:creationId xmlns:a16="http://schemas.microsoft.com/office/drawing/2014/main" id="{72BD95BF-629C-CD76-29D1-17365DA8F4DB}"/>
+              </a:ext>
+            </a:extLst>
+          </p:cNvPr>
+          <p:cNvCxnSpPr>
+            <a:cxnSpLocks/>
+          </p:cNvCxnSpPr>
+          <p:nvPr/>
+        </p:nvCxnSpPr>
+        <p:spPr>
+          <a:xfrm flipV="1">
+            <a:off x="5123953" y="3382858"/>
+            <a:ext cx="0" cy="361122"/>
+          </a:xfrm>
+          <a:prstGeom prst="straightConnector1">
+            <a:avLst/>
+          </a:prstGeom>
+          <a:ln>
+            <a:tailEnd type="triangle"/>
+          </a:ln>
+        </p:spPr>
+        <p:style>
+          <a:lnRef idx="1">
+            <a:schemeClr val="accent1"/>
+          </a:lnRef>
+          <a:fillRef idx="0">
+            <a:schemeClr val="accent1"/>
+          </a:fillRef>
+          <a:effectRef idx="0">
+            <a:schemeClr val="accent1"/>
+          </a:effectRef>
+          <a:fontRef idx="minor">
+            <a:schemeClr val="tx1"/>
+          </a:fontRef>
+        </p:style>
+      </p:cxnSp>
+      <p:sp>
+        <p:nvSpPr>
           <p:cNvPr id="4" name="TextBox 3">
             <a:extLst>
               <a:ext uri="{FF2B5EF4-FFF2-40B4-BE49-F238E27FC236}">
@@ -21098,7 +21375,7 @@
 </p:sld>
 </file>
 
-<file path=ppt/slides/slide22.xml><?xml version="1.0" encoding="utf-8"?>
+<file path=ppt/slides/slide24.xml><?xml version="1.0" encoding="utf-8"?>
 <p:sld xmlns:a="http://schemas.openxmlformats.org/drawingml/2006/main" xmlns:r="http://schemas.openxmlformats.org/officeDocument/2006/relationships" xmlns:p="http://schemas.openxmlformats.org/presentationml/2006/main">
   <p:cSld>
     <p:spTree>
@@ -21178,7 +21455,7 @@
 </p:sld>
 </file>
 
-<file path=ppt/slides/slide23.xml><?xml version="1.0" encoding="utf-8"?>
+<file path=ppt/slides/slide25.xml><?xml version="1.0" encoding="utf-8"?>
 <p:sld xmlns:a="http://schemas.openxmlformats.org/drawingml/2006/main" xmlns:r="http://schemas.openxmlformats.org/officeDocument/2006/relationships" xmlns:p="http://schemas.openxmlformats.org/presentationml/2006/main">
   <p:cSld>
     <p:spTree>
@@ -21602,7 +21879,7 @@
 </p:sld>
 </file>
 
-<file path=ppt/slides/slide24.xml><?xml version="1.0" encoding="utf-8"?>
+<file path=ppt/slides/slide26.xml><?xml version="1.0" encoding="utf-8"?>
 <p:sld xmlns:a="http://schemas.openxmlformats.org/drawingml/2006/main" xmlns:r="http://schemas.openxmlformats.org/officeDocument/2006/relationships" xmlns:p="http://schemas.openxmlformats.org/presentationml/2006/main">
   <p:cSld>
     <p:spTree>
@@ -23374,7 +23651,7 @@
 </p:sld>
 </file>
 
-<file path=ppt/slides/slide25.xml><?xml version="1.0" encoding="utf-8"?>
+<file path=ppt/slides/slide27.xml><?xml version="1.0" encoding="utf-8"?>
 <p:sld xmlns:a="http://schemas.openxmlformats.org/drawingml/2006/main" xmlns:r="http://schemas.openxmlformats.org/officeDocument/2006/relationships" xmlns:p="http://schemas.openxmlformats.org/presentationml/2006/main">
   <p:cSld>
     <p:spTree>
@@ -25037,7 +25314,7 @@
 </p:sld>
 </file>
 
-<file path=ppt/slides/slide26.xml><?xml version="1.0" encoding="utf-8"?>
+<file path=ppt/slides/slide28.xml><?xml version="1.0" encoding="utf-8"?>
 <p:sld xmlns:a="http://schemas.openxmlformats.org/drawingml/2006/main" xmlns:r="http://schemas.openxmlformats.org/officeDocument/2006/relationships" xmlns:p="http://schemas.openxmlformats.org/presentationml/2006/main">
   <p:cSld>
     <p:spTree>
@@ -26602,7 +26879,7 @@
 </p:sld>
 </file>
 
-<file path=ppt/slides/slide27.xml><?xml version="1.0" encoding="utf-8"?>
+<file path=ppt/slides/slide29.xml><?xml version="1.0" encoding="utf-8"?>
 <p:sld xmlns:a="http://schemas.openxmlformats.org/drawingml/2006/main" xmlns:r="http://schemas.openxmlformats.org/officeDocument/2006/relationships" xmlns:p="http://schemas.openxmlformats.org/presentationml/2006/main">
   <p:cSld>
     <p:spTree>
@@ -27018,7 +27295,1067 @@
 </p:sld>
 </file>
 
-<file path=ppt/slides/slide28.xml><?xml version="1.0" encoding="utf-8"?>
+<file path=ppt/slides/slide3.xml><?xml version="1.0" encoding="utf-8"?>
+<p:sld xmlns:a="http://schemas.openxmlformats.org/drawingml/2006/main" xmlns:r="http://schemas.openxmlformats.org/officeDocument/2006/relationships" xmlns:p="http://schemas.openxmlformats.org/presentationml/2006/main">
+  <p:cSld>
+    <p:spTree>
+      <p:nvGrpSpPr>
+        <p:cNvPr id="1" name=""/>
+        <p:cNvGrpSpPr/>
+        <p:nvPr/>
+      </p:nvGrpSpPr>
+      <p:grpSpPr>
+        <a:xfrm>
+          <a:off x="0" y="0"/>
+          <a:ext cx="0" cy="0"/>
+          <a:chOff x="0" y="0"/>
+          <a:chExt cx="0" cy="0"/>
+        </a:xfrm>
+      </p:grpSpPr>
+      <p:sp>
+        <p:nvSpPr>
+          <p:cNvPr id="3" name="Content Placeholder 2">
+            <a:extLst>
+              <a:ext uri="{FF2B5EF4-FFF2-40B4-BE49-F238E27FC236}">
+                <a16:creationId xmlns:a16="http://schemas.microsoft.com/office/drawing/2014/main" id="{78862660-EFC4-468F-E61A-6EF4345C6DB4}"/>
+              </a:ext>
+            </a:extLst>
+          </p:cNvPr>
+          <p:cNvSpPr>
+            <a:spLocks noGrp="1"/>
+          </p:cNvSpPr>
+          <p:nvPr>
+            <p:ph idx="1"/>
+          </p:nvPr>
+        </p:nvSpPr>
+        <p:spPr>
+          <a:xfrm>
+            <a:off x="152400" y="914400"/>
+            <a:ext cx="8686800" cy="5715000"/>
+          </a:xfrm>
+        </p:spPr>
+        <p:txBody>
+          <a:bodyPr/>
+          <a:lstStyle/>
+          <a:p>
+            <a:pPr marL="0" indent="0">
+              <a:buNone/>
+              <a:defRPr/>
+            </a:pPr>
+            <a:r>
+              <a:rPr lang="en-US" sz="1800" dirty="0"/>
+              <a:t>Purpose: multiply every raster in the workspace by a factor given by the user</a:t>
+            </a:r>
+          </a:p>
+          <a:p>
+            <a:pPr>
+              <a:defRPr/>
+            </a:pPr>
+            <a:endParaRPr lang="en-US" sz="1800" dirty="0"/>
+          </a:p>
+          <a:p>
+            <a:pPr>
+              <a:defRPr/>
+            </a:pPr>
+            <a:endParaRPr lang="en-US" sz="1800" dirty="0"/>
+          </a:p>
+          <a:p>
+            <a:pPr>
+              <a:defRPr/>
+            </a:pPr>
+            <a:endParaRPr lang="en-US" sz="1800" dirty="0"/>
+          </a:p>
+          <a:p>
+            <a:pPr>
+              <a:defRPr/>
+            </a:pPr>
+            <a:endParaRPr lang="en-US" sz="1800" dirty="0"/>
+          </a:p>
+          <a:p>
+            <a:pPr>
+              <a:defRPr/>
+            </a:pPr>
+            <a:endParaRPr lang="en-US" sz="1800" dirty="0"/>
+          </a:p>
+          <a:p>
+            <a:pPr>
+              <a:defRPr/>
+            </a:pPr>
+            <a:endParaRPr lang="en-US" sz="1800" dirty="0"/>
+          </a:p>
+          <a:p>
+            <a:pPr>
+              <a:defRPr/>
+            </a:pPr>
+            <a:endParaRPr lang="en-US" sz="1800" dirty="0"/>
+          </a:p>
+          <a:p>
+            <a:pPr>
+              <a:defRPr/>
+            </a:pPr>
+            <a:endParaRPr lang="en-US" sz="1800" dirty="0"/>
+          </a:p>
+          <a:p>
+            <a:pPr>
+              <a:defRPr/>
+            </a:pPr>
+            <a:endParaRPr lang="en-US" sz="1800" dirty="0"/>
+          </a:p>
+          <a:p>
+            <a:pPr marL="0" indent="0">
+              <a:buNone/>
+              <a:defRPr/>
+            </a:pPr>
+            <a:endParaRPr lang="en-US" sz="1800" dirty="0"/>
+          </a:p>
+          <a:p>
+            <a:pPr marL="0" indent="0">
+              <a:buNone/>
+              <a:defRPr/>
+            </a:pPr>
+            <a:endParaRPr lang="en-US" sz="1800" dirty="0"/>
+          </a:p>
+          <a:p>
+            <a:pPr marL="0" indent="0">
+              <a:buNone/>
+              <a:defRPr/>
+            </a:pPr>
+            <a:r>
+              <a:rPr lang="en-US" sz="1800" dirty="0"/>
+              <a:t>Throws the following exception: </a:t>
+            </a:r>
+          </a:p>
+          <a:p>
+            <a:pPr marL="400050" lvl="1" indent="0">
+              <a:defRPr/>
+            </a:pPr>
+            <a:r>
+              <a:rPr lang="en-US" sz="1400" dirty="0">
+                <a:solidFill>
+                  <a:srgbClr val="FF0066"/>
+                </a:solidFill>
+                <a:latin typeface="Consolas" panose="020B0609020204030204" pitchFamily="49" charset="0"/>
+              </a:rPr>
+              <a:t>for </a:t>
+            </a:r>
+            <a:r>
+              <a:rPr lang="en-US" sz="1400" dirty="0" err="1">
+                <a:solidFill>
+                  <a:srgbClr val="FF0066"/>
+                </a:solidFill>
+                <a:latin typeface="Consolas" panose="020B0609020204030204" pitchFamily="49" charset="0"/>
+              </a:rPr>
+              <a:t>rasterImage</a:t>
+            </a:r>
+            <a:r>
+              <a:rPr lang="en-US" sz="1400" dirty="0">
+                <a:solidFill>
+                  <a:srgbClr val="FF0066"/>
+                </a:solidFill>
+                <a:latin typeface="Consolas" panose="020B0609020204030204" pitchFamily="49" charset="0"/>
+              </a:rPr>
+              <a:t> in </a:t>
+            </a:r>
+            <a:r>
+              <a:rPr lang="en-US" sz="1400" dirty="0" err="1">
+                <a:solidFill>
+                  <a:srgbClr val="FF0066"/>
+                </a:solidFill>
+                <a:latin typeface="Consolas" panose="020B0609020204030204" pitchFamily="49" charset="0"/>
+              </a:rPr>
+              <a:t>rasterList</a:t>
+            </a:r>
+            <a:r>
+              <a:rPr lang="en-US" sz="1400" dirty="0">
+                <a:solidFill>
+                  <a:srgbClr val="FF0066"/>
+                </a:solidFill>
+                <a:latin typeface="Consolas" panose="020B0609020204030204" pitchFamily="49" charset="0"/>
+              </a:rPr>
+              <a:t>:</a:t>
+            </a:r>
+            <a:br>
+              <a:rPr lang="en-US" sz="1400" dirty="0">
+                <a:solidFill>
+                  <a:srgbClr val="FF0066"/>
+                </a:solidFill>
+                <a:latin typeface="Consolas" panose="020B0609020204030204" pitchFamily="49" charset="0"/>
+              </a:rPr>
+            </a:br>
+            <a:r>
+              <a:rPr lang="en-US" sz="1400" dirty="0">
+                <a:solidFill>
+                  <a:srgbClr val="FF0066"/>
+                </a:solidFill>
+                <a:latin typeface="Consolas" panose="020B0609020204030204" pitchFamily="49" charset="0"/>
+              </a:rPr>
+              <a:t>  </a:t>
+            </a:r>
+            <a:r>
+              <a:rPr lang="en-US" sz="1400" dirty="0" err="1">
+                <a:solidFill>
+                  <a:srgbClr val="FF0066"/>
+                </a:solidFill>
+                <a:latin typeface="Consolas" panose="020B0609020204030204" pitchFamily="49" charset="0"/>
+              </a:rPr>
+              <a:t>TypeError</a:t>
+            </a:r>
+            <a:r>
+              <a:rPr lang="en-US" sz="1400" dirty="0">
+                <a:solidFill>
+                  <a:srgbClr val="FF0066"/>
+                </a:solidFill>
+                <a:latin typeface="Consolas" panose="020B0609020204030204" pitchFamily="49" charset="0"/>
+              </a:rPr>
+              <a:t>: '</a:t>
+            </a:r>
+            <a:r>
+              <a:rPr lang="en-US" sz="1400" dirty="0" err="1">
+                <a:solidFill>
+                  <a:srgbClr val="FF0066"/>
+                </a:solidFill>
+                <a:latin typeface="Consolas" panose="020B0609020204030204" pitchFamily="49" charset="0"/>
+              </a:rPr>
+              <a:t>NoneType</a:t>
+            </a:r>
+            <a:r>
+              <a:rPr lang="en-US" sz="1400" dirty="0">
+                <a:solidFill>
+                  <a:srgbClr val="FF0066"/>
+                </a:solidFill>
+                <a:latin typeface="Consolas" panose="020B0609020204030204" pitchFamily="49" charset="0"/>
+              </a:rPr>
+              <a:t>' object is not </a:t>
+            </a:r>
+            <a:r>
+              <a:rPr lang="en-US" sz="1400" dirty="0" err="1">
+                <a:solidFill>
+                  <a:srgbClr val="FF0066"/>
+                </a:solidFill>
+                <a:latin typeface="Consolas" panose="020B0609020204030204" pitchFamily="49" charset="0"/>
+              </a:rPr>
+              <a:t>iterable</a:t>
+            </a:r>
+            <a:endParaRPr lang="en-US" sz="1400" dirty="0">
+              <a:solidFill>
+                <a:srgbClr val="FF0066"/>
+              </a:solidFill>
+              <a:latin typeface="Consolas" panose="020B0609020204030204" pitchFamily="49" charset="0"/>
+            </a:endParaRPr>
+          </a:p>
+          <a:p>
+            <a:pPr marL="0" indent="0">
+              <a:buNone/>
+              <a:defRPr/>
+            </a:pPr>
+            <a:r>
+              <a:rPr lang="en-US" sz="1800" dirty="0"/>
+              <a:t> Run this script with an argument  "0.001 meters"</a:t>
+            </a:r>
+          </a:p>
+          <a:p>
+            <a:pPr marL="400050" lvl="1" indent="0">
+              <a:defRPr/>
+            </a:pPr>
+            <a:r>
+              <a:rPr lang="en-US" sz="1400" dirty="0">
+                <a:solidFill>
+                  <a:srgbClr val="FF0066"/>
+                </a:solidFill>
+                <a:latin typeface="Consolas" panose="020B0609020204030204" pitchFamily="49" charset="0"/>
+              </a:rPr>
+              <a:t>factor = float(sys.argv[1])</a:t>
+            </a:r>
+            <a:br>
+              <a:rPr lang="en-US" sz="1400" dirty="0">
+                <a:solidFill>
+                  <a:srgbClr val="FF0066"/>
+                </a:solidFill>
+                <a:latin typeface="Consolas" panose="020B0609020204030204" pitchFamily="49" charset="0"/>
+              </a:rPr>
+            </a:br>
+            <a:r>
+              <a:rPr lang="en-US" sz="1400" dirty="0">
+                <a:solidFill>
+                  <a:srgbClr val="FF0066"/>
+                </a:solidFill>
+                <a:latin typeface="Consolas" panose="020B0609020204030204" pitchFamily="49" charset="0"/>
+              </a:rPr>
+              <a:t>  </a:t>
+            </a:r>
+            <a:r>
+              <a:rPr lang="en-US" sz="1400" dirty="0" err="1">
+                <a:solidFill>
+                  <a:srgbClr val="FF0066"/>
+                </a:solidFill>
+                <a:latin typeface="Consolas" panose="020B0609020204030204" pitchFamily="49" charset="0"/>
+              </a:rPr>
+              <a:t>ValueError</a:t>
+            </a:r>
+            <a:r>
+              <a:rPr lang="en-US" sz="1400" dirty="0">
+                <a:solidFill>
+                  <a:srgbClr val="FF0066"/>
+                </a:solidFill>
+                <a:latin typeface="Consolas" panose="020B0609020204030204" pitchFamily="49" charset="0"/>
+              </a:rPr>
+              <a:t>: invalid literal for float(): 0.001 meters</a:t>
+            </a:r>
+          </a:p>
+        </p:txBody>
+      </p:sp>
+      <p:sp>
+        <p:nvSpPr>
+          <p:cNvPr id="6" name="TextBox 5">
+            <a:extLst>
+              <a:ext uri="{FF2B5EF4-FFF2-40B4-BE49-F238E27FC236}">
+                <a16:creationId xmlns:a16="http://schemas.microsoft.com/office/drawing/2014/main" id="{CC67BE3D-00BE-E559-49E9-E9F701AAF10A}"/>
+              </a:ext>
+            </a:extLst>
+          </p:cNvPr>
+          <p:cNvSpPr txBox="1"/>
+          <p:nvPr/>
+        </p:nvSpPr>
+        <p:spPr>
+          <a:xfrm>
+            <a:off x="914400" y="1219200"/>
+            <a:ext cx="5410200" cy="3416320"/>
+          </a:xfrm>
+          <a:prstGeom prst="rect">
+            <a:avLst/>
+          </a:prstGeom>
+          <a:noFill/>
+        </p:spPr>
+        <p:txBody>
+          <a:bodyPr wrap="square">
+            <a:spAutoFit/>
+          </a:bodyPr>
+          <a:lstStyle/>
+          <a:p>
+            <a:r>
+              <a:rPr lang="en-US" sz="1200" b="0" dirty="0">
+                <a:solidFill>
+                  <a:srgbClr val="6A9955"/>
+                </a:solidFill>
+                <a:effectLst/>
+                <a:latin typeface="Consolas" panose="020B0609020204030204" pitchFamily="49" charset="0"/>
+              </a:rPr>
+              <a:t># multRast.py</a:t>
+            </a:r>
+            <a:endParaRPr lang="en-US" sz="1200" b="0" dirty="0">
+              <a:solidFill>
+                <a:srgbClr val="D4D4D4"/>
+              </a:solidFill>
+              <a:effectLst/>
+              <a:latin typeface="Consolas" panose="020B0609020204030204" pitchFamily="49" charset="0"/>
+            </a:endParaRPr>
+          </a:p>
+          <a:p>
+            <a:r>
+              <a:rPr lang="en-US" sz="1200" b="0" dirty="0">
+                <a:solidFill>
+                  <a:srgbClr val="569CD6"/>
+                </a:solidFill>
+                <a:effectLst/>
+                <a:latin typeface="Consolas" panose="020B0609020204030204" pitchFamily="49" charset="0"/>
+              </a:rPr>
+              <a:t>import</a:t>
+            </a:r>
+            <a:r>
+              <a:rPr lang="en-US" sz="1200" b="0" dirty="0">
+                <a:solidFill>
+                  <a:srgbClr val="D4D4D4"/>
+                </a:solidFill>
+                <a:effectLst/>
+                <a:latin typeface="Consolas" panose="020B0609020204030204" pitchFamily="49" charset="0"/>
+              </a:rPr>
+              <a:t> arcpy, sys</a:t>
+            </a:r>
+          </a:p>
+          <a:p>
+            <a:br>
+              <a:rPr lang="en-US" sz="1200" b="0" dirty="0">
+                <a:solidFill>
+                  <a:srgbClr val="D4D4D4"/>
+                </a:solidFill>
+                <a:effectLst/>
+                <a:latin typeface="Consolas" panose="020B0609020204030204" pitchFamily="49" charset="0"/>
+              </a:rPr>
+            </a:br>
+            <a:r>
+              <a:rPr lang="en-US" sz="1200" b="0" dirty="0">
+                <a:solidFill>
+                  <a:srgbClr val="6A9955"/>
+                </a:solidFill>
+                <a:effectLst/>
+                <a:latin typeface="Consolas" panose="020B0609020204030204" pitchFamily="49" charset="0"/>
+              </a:rPr>
+              <a:t># Set multiplication factor</a:t>
+            </a:r>
+            <a:endParaRPr lang="en-US" sz="1200" b="0" dirty="0">
+              <a:solidFill>
+                <a:srgbClr val="D4D4D4"/>
+              </a:solidFill>
+              <a:effectLst/>
+              <a:latin typeface="Consolas" panose="020B0609020204030204" pitchFamily="49" charset="0"/>
+            </a:endParaRPr>
+          </a:p>
+          <a:p>
+            <a:r>
+              <a:rPr lang="en-US" sz="1200" b="0" dirty="0">
+                <a:solidFill>
+                  <a:srgbClr val="D4D4D4"/>
+                </a:solidFill>
+                <a:effectLst/>
+                <a:latin typeface="Consolas" panose="020B0609020204030204" pitchFamily="49" charset="0"/>
+              </a:rPr>
+              <a:t>factor = float(sys.argv[</a:t>
+            </a:r>
+            <a:r>
+              <a:rPr lang="en-US" sz="1200" b="0" dirty="0">
+                <a:solidFill>
+                  <a:srgbClr val="B5CEA8"/>
+                </a:solidFill>
+                <a:effectLst/>
+                <a:latin typeface="Consolas" panose="020B0609020204030204" pitchFamily="49" charset="0"/>
+              </a:rPr>
+              <a:t>1</a:t>
+            </a:r>
+            <a:r>
+              <a:rPr lang="en-US" sz="1200" b="0" dirty="0">
+                <a:solidFill>
+                  <a:srgbClr val="D4D4D4"/>
+                </a:solidFill>
+                <a:effectLst/>
+                <a:latin typeface="Consolas" panose="020B0609020204030204" pitchFamily="49" charset="0"/>
+              </a:rPr>
+              <a:t>])</a:t>
+            </a:r>
+          </a:p>
+          <a:p>
+            <a:br>
+              <a:rPr lang="en-US" sz="1200" b="0" dirty="0">
+                <a:solidFill>
+                  <a:srgbClr val="D4D4D4"/>
+                </a:solidFill>
+                <a:effectLst/>
+                <a:latin typeface="Consolas" panose="020B0609020204030204" pitchFamily="49" charset="0"/>
+              </a:rPr>
+            </a:br>
+            <a:r>
+              <a:rPr lang="en-US" sz="1200" b="0" dirty="0" err="1">
+                <a:solidFill>
+                  <a:srgbClr val="D4D4D4"/>
+                </a:solidFill>
+                <a:effectLst/>
+                <a:latin typeface="Consolas" panose="020B0609020204030204" pitchFamily="49" charset="0"/>
+              </a:rPr>
+              <a:t>arcpy.env.overwriteOutput</a:t>
+            </a:r>
+            <a:r>
+              <a:rPr lang="en-US" sz="1200" b="0" dirty="0">
+                <a:solidFill>
+                  <a:srgbClr val="D4D4D4"/>
+                </a:solidFill>
+                <a:effectLst/>
+                <a:latin typeface="Consolas" panose="020B0609020204030204" pitchFamily="49" charset="0"/>
+              </a:rPr>
+              <a:t> = </a:t>
+            </a:r>
+            <a:r>
+              <a:rPr lang="en-US" sz="1200" b="0" dirty="0">
+                <a:solidFill>
+                  <a:srgbClr val="569CD6"/>
+                </a:solidFill>
+                <a:effectLst/>
+                <a:latin typeface="Consolas" panose="020B0609020204030204" pitchFamily="49" charset="0"/>
+              </a:rPr>
+              <a:t>True</a:t>
+            </a:r>
+            <a:endParaRPr lang="en-US" sz="1200" b="0" dirty="0">
+              <a:solidFill>
+                <a:srgbClr val="D4D4D4"/>
+              </a:solidFill>
+              <a:effectLst/>
+              <a:latin typeface="Consolas" panose="020B0609020204030204" pitchFamily="49" charset="0"/>
+            </a:endParaRPr>
+          </a:p>
+          <a:p>
+            <a:r>
+              <a:rPr lang="en-US" sz="1200" b="0" dirty="0" err="1">
+                <a:solidFill>
+                  <a:srgbClr val="D4D4D4"/>
+                </a:solidFill>
+                <a:effectLst/>
+                <a:latin typeface="Consolas" panose="020B0609020204030204" pitchFamily="49" charset="0"/>
+              </a:rPr>
+              <a:t>arcpy.env.worspace</a:t>
+            </a:r>
+            <a:r>
+              <a:rPr lang="en-US" sz="1200" b="0" dirty="0">
+                <a:solidFill>
+                  <a:srgbClr val="D4D4D4"/>
+                </a:solidFill>
+                <a:effectLst/>
+                <a:latin typeface="Consolas" panose="020B0609020204030204" pitchFamily="49" charset="0"/>
+              </a:rPr>
+              <a:t> = </a:t>
+            </a:r>
+            <a:r>
+              <a:rPr lang="en-US" sz="1200" dirty="0">
+                <a:solidFill>
+                  <a:srgbClr val="CE9178"/>
+                </a:solidFill>
+                <a:latin typeface="Consolas" panose="020B0609020204030204" pitchFamily="49" charset="0"/>
+              </a:rPr>
+              <a:t>"</a:t>
+            </a:r>
+            <a:r>
+              <a:rPr lang="en-US" sz="1200" b="0" dirty="0">
+                <a:solidFill>
+                  <a:srgbClr val="CE9178"/>
+                </a:solidFill>
+                <a:effectLst/>
+                <a:latin typeface="Consolas" panose="020B0609020204030204" pitchFamily="49" charset="0"/>
+              </a:rPr>
+              <a:t>C:/gispy/data/ch14/rastTester.gdb"</a:t>
+            </a:r>
+            <a:endParaRPr lang="en-US" sz="1200" b="0" dirty="0">
+              <a:solidFill>
+                <a:srgbClr val="D4D4D4"/>
+              </a:solidFill>
+              <a:effectLst/>
+              <a:latin typeface="Consolas" panose="020B0609020204030204" pitchFamily="49" charset="0"/>
+            </a:endParaRPr>
+          </a:p>
+          <a:p>
+            <a:r>
+              <a:rPr lang="en-US" sz="1200" b="0" dirty="0">
+                <a:solidFill>
+                  <a:srgbClr val="D4D4D4"/>
+                </a:solidFill>
+                <a:effectLst/>
+                <a:latin typeface="Consolas" panose="020B0609020204030204" pitchFamily="49" charset="0"/>
+              </a:rPr>
+              <a:t>arcpy.CheckOutExtension(</a:t>
+            </a:r>
+            <a:r>
+              <a:rPr lang="en-US" sz="1200" dirty="0">
+                <a:solidFill>
+                  <a:srgbClr val="CE9178"/>
+                </a:solidFill>
+                <a:latin typeface="Consolas" panose="020B0609020204030204" pitchFamily="49" charset="0"/>
+              </a:rPr>
+              <a:t>"</a:t>
+            </a:r>
+            <a:r>
+              <a:rPr lang="en-US" sz="1200" b="0" dirty="0">
+                <a:solidFill>
+                  <a:srgbClr val="CE9178"/>
+                </a:solidFill>
+                <a:effectLst/>
+                <a:latin typeface="Consolas" panose="020B0609020204030204" pitchFamily="49" charset="0"/>
+              </a:rPr>
+              <a:t>Spatial"</a:t>
+            </a:r>
+            <a:r>
+              <a:rPr lang="en-US" sz="1200" b="0" dirty="0">
+                <a:solidFill>
+                  <a:srgbClr val="D4D4D4"/>
+                </a:solidFill>
+                <a:effectLst/>
+                <a:latin typeface="Consolas" panose="020B0609020204030204" pitchFamily="49" charset="0"/>
+              </a:rPr>
+              <a:t>)</a:t>
+            </a:r>
+          </a:p>
+          <a:p>
+            <a:r>
+              <a:rPr lang="en-US" sz="1200" b="0" dirty="0" err="1">
+                <a:solidFill>
+                  <a:srgbClr val="D4D4D4"/>
+                </a:solidFill>
+                <a:effectLst/>
+                <a:latin typeface="Consolas" panose="020B0609020204030204" pitchFamily="49" charset="0"/>
+              </a:rPr>
+              <a:t>outDir</a:t>
+            </a:r>
+            <a:r>
+              <a:rPr lang="en-US" sz="1200" b="0" dirty="0">
+                <a:solidFill>
+                  <a:srgbClr val="D4D4D4"/>
+                </a:solidFill>
+                <a:effectLst/>
+                <a:latin typeface="Consolas" panose="020B0609020204030204" pitchFamily="49" charset="0"/>
+              </a:rPr>
+              <a:t> = </a:t>
+            </a:r>
+            <a:r>
+              <a:rPr lang="en-US" sz="1200" dirty="0">
+                <a:solidFill>
+                  <a:srgbClr val="CE9178"/>
+                </a:solidFill>
+                <a:latin typeface="Consolas" panose="020B0609020204030204" pitchFamily="49" charset="0"/>
+              </a:rPr>
+              <a:t>"</a:t>
+            </a:r>
+            <a:r>
+              <a:rPr lang="en-US" sz="1200" b="0" dirty="0">
+                <a:solidFill>
+                  <a:srgbClr val="CE9178"/>
+                </a:solidFill>
+                <a:effectLst/>
+                <a:latin typeface="Consolas" panose="020B0609020204030204" pitchFamily="49" charset="0"/>
+              </a:rPr>
+              <a:t>C:/gispy/scratch/"</a:t>
+            </a:r>
+            <a:endParaRPr lang="en-US" sz="1200" b="0" dirty="0">
+              <a:solidFill>
+                <a:srgbClr val="D4D4D4"/>
+              </a:solidFill>
+              <a:effectLst/>
+              <a:latin typeface="Consolas" panose="020B0609020204030204" pitchFamily="49" charset="0"/>
+            </a:endParaRPr>
+          </a:p>
+          <a:p>
+            <a:br>
+              <a:rPr lang="en-US" sz="1200" b="0" dirty="0">
+                <a:solidFill>
+                  <a:srgbClr val="D4D4D4"/>
+                </a:solidFill>
+                <a:effectLst/>
+                <a:latin typeface="Consolas" panose="020B0609020204030204" pitchFamily="49" charset="0"/>
+              </a:rPr>
+            </a:br>
+            <a:r>
+              <a:rPr lang="en-US" sz="1200" b="0" dirty="0">
+                <a:solidFill>
+                  <a:srgbClr val="6A9955"/>
+                </a:solidFill>
+                <a:effectLst/>
+                <a:latin typeface="Consolas" panose="020B0609020204030204" pitchFamily="49" charset="0"/>
+              </a:rPr>
+              <a:t># Get raster list &amp; multiply each by a factor</a:t>
+            </a:r>
+            <a:endParaRPr lang="en-US" sz="1200" b="0" dirty="0">
+              <a:solidFill>
+                <a:srgbClr val="D4D4D4"/>
+              </a:solidFill>
+              <a:effectLst/>
+              <a:latin typeface="Consolas" panose="020B0609020204030204" pitchFamily="49" charset="0"/>
+            </a:endParaRPr>
+          </a:p>
+          <a:p>
+            <a:r>
+              <a:rPr lang="en-US" sz="1200" b="0" dirty="0" err="1">
+                <a:solidFill>
+                  <a:srgbClr val="D4D4D4"/>
+                </a:solidFill>
+                <a:effectLst/>
+                <a:latin typeface="Consolas" panose="020B0609020204030204" pitchFamily="49" charset="0"/>
+              </a:rPr>
+              <a:t>rasterList</a:t>
+            </a:r>
+            <a:r>
+              <a:rPr lang="en-US" sz="1200" b="0" dirty="0">
+                <a:solidFill>
+                  <a:srgbClr val="D4D4D4"/>
+                </a:solidFill>
+                <a:effectLst/>
+                <a:latin typeface="Consolas" panose="020B0609020204030204" pitchFamily="49" charset="0"/>
+              </a:rPr>
+              <a:t> = </a:t>
+            </a:r>
+            <a:r>
+              <a:rPr lang="en-US" sz="1200" b="0" dirty="0" err="1">
+                <a:solidFill>
+                  <a:srgbClr val="D4D4D4"/>
+                </a:solidFill>
+                <a:effectLst/>
+                <a:latin typeface="Consolas" panose="020B0609020204030204" pitchFamily="49" charset="0"/>
+              </a:rPr>
+              <a:t>arcpy.ListRasters</a:t>
+            </a:r>
+            <a:r>
+              <a:rPr lang="en-US" sz="1200" b="0" dirty="0">
+                <a:solidFill>
+                  <a:srgbClr val="D4D4D4"/>
+                </a:solidFill>
+                <a:effectLst/>
+                <a:latin typeface="Consolas" panose="020B0609020204030204" pitchFamily="49" charset="0"/>
+              </a:rPr>
+              <a:t>()</a:t>
+            </a:r>
+          </a:p>
+          <a:p>
+            <a:r>
+              <a:rPr lang="en-US" sz="1200" b="0" dirty="0">
+                <a:solidFill>
+                  <a:srgbClr val="569CD6"/>
+                </a:solidFill>
+                <a:effectLst/>
+                <a:latin typeface="Consolas" panose="020B0609020204030204" pitchFamily="49" charset="0"/>
+              </a:rPr>
+              <a:t>for</a:t>
+            </a:r>
+            <a:r>
+              <a:rPr lang="en-US" sz="1200" b="0" dirty="0">
+                <a:solidFill>
+                  <a:srgbClr val="D4D4D4"/>
+                </a:solidFill>
+                <a:effectLst/>
+                <a:latin typeface="Consolas" panose="020B0609020204030204" pitchFamily="49" charset="0"/>
+              </a:rPr>
+              <a:t> </a:t>
+            </a:r>
+            <a:r>
+              <a:rPr lang="en-US" sz="1200" b="0" dirty="0" err="1">
+                <a:solidFill>
+                  <a:srgbClr val="D4D4D4"/>
+                </a:solidFill>
+                <a:effectLst/>
+                <a:latin typeface="Consolas" panose="020B0609020204030204" pitchFamily="49" charset="0"/>
+              </a:rPr>
+              <a:t>rasterImage</a:t>
+            </a:r>
+            <a:r>
+              <a:rPr lang="en-US" sz="1200" b="0" dirty="0">
+                <a:solidFill>
+                  <a:srgbClr val="D4D4D4"/>
+                </a:solidFill>
+                <a:effectLst/>
+                <a:latin typeface="Consolas" panose="020B0609020204030204" pitchFamily="49" charset="0"/>
+              </a:rPr>
+              <a:t> </a:t>
+            </a:r>
+            <a:r>
+              <a:rPr lang="en-US" sz="1200" b="0" dirty="0">
+                <a:solidFill>
+                  <a:srgbClr val="569CD6"/>
+                </a:solidFill>
+                <a:effectLst/>
+                <a:latin typeface="Consolas" panose="020B0609020204030204" pitchFamily="49" charset="0"/>
+              </a:rPr>
+              <a:t>in</a:t>
+            </a:r>
+            <a:r>
+              <a:rPr lang="en-US" sz="1200" b="0" dirty="0">
+                <a:solidFill>
+                  <a:srgbClr val="D4D4D4"/>
+                </a:solidFill>
+                <a:effectLst/>
+                <a:latin typeface="Consolas" panose="020B0609020204030204" pitchFamily="49" charset="0"/>
+              </a:rPr>
+              <a:t> </a:t>
+            </a:r>
+            <a:r>
+              <a:rPr lang="en-US" sz="1200" b="0" dirty="0" err="1">
+                <a:solidFill>
+                  <a:srgbClr val="D4D4D4"/>
+                </a:solidFill>
+                <a:effectLst/>
+                <a:latin typeface="Consolas" panose="020B0609020204030204" pitchFamily="49" charset="0"/>
+              </a:rPr>
+              <a:t>rasterList</a:t>
+            </a:r>
+            <a:r>
+              <a:rPr lang="en-US" sz="1200" b="0" dirty="0">
+                <a:solidFill>
+                  <a:srgbClr val="D4D4D4"/>
+                </a:solidFill>
+                <a:effectLst/>
+                <a:latin typeface="Consolas" panose="020B0609020204030204" pitchFamily="49" charset="0"/>
+              </a:rPr>
+              <a:t>:</a:t>
+            </a:r>
+          </a:p>
+          <a:p>
+            <a:r>
+              <a:rPr lang="en-US" sz="1200" b="0" dirty="0">
+                <a:solidFill>
+                  <a:srgbClr val="D4D4D4"/>
+                </a:solidFill>
+                <a:effectLst/>
+                <a:latin typeface="Consolas" panose="020B0609020204030204" pitchFamily="49" charset="0"/>
+              </a:rPr>
+              <a:t>    </a:t>
+            </a:r>
+            <a:r>
+              <a:rPr lang="en-US" sz="1200" b="0" dirty="0" err="1">
+                <a:solidFill>
+                  <a:srgbClr val="D4D4D4"/>
+                </a:solidFill>
+                <a:effectLst/>
+                <a:latin typeface="Consolas" panose="020B0609020204030204" pitchFamily="49" charset="0"/>
+              </a:rPr>
+              <a:t>rasterObj</a:t>
+            </a:r>
+            <a:r>
+              <a:rPr lang="en-US" sz="1200" b="0" dirty="0">
+                <a:solidFill>
+                  <a:srgbClr val="D4D4D4"/>
+                </a:solidFill>
+                <a:effectLst/>
+                <a:latin typeface="Consolas" panose="020B0609020204030204" pitchFamily="49" charset="0"/>
+              </a:rPr>
+              <a:t> = </a:t>
+            </a:r>
+            <a:r>
+              <a:rPr lang="en-US" sz="1200" b="0" dirty="0" err="1">
+                <a:solidFill>
+                  <a:srgbClr val="D4D4D4"/>
+                </a:solidFill>
+                <a:effectLst/>
+                <a:latin typeface="Consolas" panose="020B0609020204030204" pitchFamily="49" charset="0"/>
+              </a:rPr>
+              <a:t>arcpy.Raster</a:t>
+            </a:r>
+            <a:r>
+              <a:rPr lang="en-US" sz="1200" b="0" dirty="0">
+                <a:solidFill>
+                  <a:srgbClr val="D4D4D4"/>
+                </a:solidFill>
+                <a:effectLst/>
+                <a:latin typeface="Consolas" panose="020B0609020204030204" pitchFamily="49" charset="0"/>
+              </a:rPr>
+              <a:t>(</a:t>
+            </a:r>
+            <a:r>
+              <a:rPr lang="en-US" sz="1200" b="0" dirty="0" err="1">
+                <a:solidFill>
+                  <a:srgbClr val="D4D4D4"/>
+                </a:solidFill>
+                <a:effectLst/>
+                <a:latin typeface="Consolas" panose="020B0609020204030204" pitchFamily="49" charset="0"/>
+              </a:rPr>
+              <a:t>rasterImage</a:t>
+            </a:r>
+            <a:r>
+              <a:rPr lang="en-US" sz="1200" b="0" dirty="0">
+                <a:solidFill>
+                  <a:srgbClr val="D4D4D4"/>
+                </a:solidFill>
+                <a:effectLst/>
+                <a:latin typeface="Consolas" panose="020B0609020204030204" pitchFamily="49" charset="0"/>
+              </a:rPr>
+              <a:t>)</a:t>
+            </a:r>
+          </a:p>
+          <a:p>
+            <a:r>
+              <a:rPr lang="en-US" sz="1200" b="0" dirty="0">
+                <a:solidFill>
+                  <a:srgbClr val="D4D4D4"/>
+                </a:solidFill>
+                <a:effectLst/>
+                <a:latin typeface="Consolas" panose="020B0609020204030204" pitchFamily="49" charset="0"/>
+              </a:rPr>
+              <a:t>    </a:t>
+            </a:r>
+            <a:r>
+              <a:rPr lang="en-US" sz="1200" b="0" dirty="0" err="1">
+                <a:solidFill>
+                  <a:srgbClr val="D4D4D4"/>
+                </a:solidFill>
+                <a:effectLst/>
+                <a:latin typeface="Consolas" panose="020B0609020204030204" pitchFamily="49" charset="0"/>
+              </a:rPr>
+              <a:t>rastMult</a:t>
+            </a:r>
+            <a:r>
+              <a:rPr lang="en-US" sz="1200" b="0" dirty="0">
+                <a:solidFill>
+                  <a:srgbClr val="D4D4D4"/>
+                </a:solidFill>
+                <a:effectLst/>
+                <a:latin typeface="Consolas" panose="020B0609020204030204" pitchFamily="49" charset="0"/>
+              </a:rPr>
+              <a:t> = </a:t>
+            </a:r>
+            <a:r>
+              <a:rPr lang="en-US" sz="1200" b="0" dirty="0" err="1">
+                <a:solidFill>
+                  <a:srgbClr val="D4D4D4"/>
+                </a:solidFill>
+                <a:effectLst/>
+                <a:latin typeface="Consolas" panose="020B0609020204030204" pitchFamily="49" charset="0"/>
+              </a:rPr>
+              <a:t>rasterObj</a:t>
+            </a:r>
+            <a:r>
+              <a:rPr lang="en-US" sz="1200" b="0" dirty="0">
+                <a:solidFill>
+                  <a:srgbClr val="D4D4D4"/>
+                </a:solidFill>
+                <a:effectLst/>
+                <a:latin typeface="Consolas" panose="020B0609020204030204" pitchFamily="49" charset="0"/>
+              </a:rPr>
+              <a:t> * factor</a:t>
+            </a:r>
+          </a:p>
+          <a:p>
+            <a:r>
+              <a:rPr lang="en-US" sz="1200" b="0" dirty="0">
+                <a:solidFill>
+                  <a:srgbClr val="D4D4D4"/>
+                </a:solidFill>
+                <a:effectLst/>
+                <a:latin typeface="Consolas" panose="020B0609020204030204" pitchFamily="49" charset="0"/>
+              </a:rPr>
+              <a:t>    </a:t>
+            </a:r>
+            <a:r>
+              <a:rPr lang="en-US" sz="1200" b="0" dirty="0" err="1">
+                <a:solidFill>
+                  <a:srgbClr val="D4D4D4"/>
+                </a:solidFill>
+                <a:effectLst/>
+                <a:latin typeface="Consolas" panose="020B0609020204030204" pitchFamily="49" charset="0"/>
+              </a:rPr>
+              <a:t>rastMult.save</a:t>
+            </a:r>
+            <a:r>
+              <a:rPr lang="en-US" sz="1200" b="0" dirty="0">
+                <a:solidFill>
+                  <a:srgbClr val="D4D4D4"/>
+                </a:solidFill>
+                <a:effectLst/>
+                <a:latin typeface="Consolas" panose="020B0609020204030204" pitchFamily="49" charset="0"/>
+              </a:rPr>
+              <a:t>(</a:t>
+            </a:r>
+            <a:r>
+              <a:rPr lang="en-US" sz="1200" b="0" dirty="0" err="1">
+                <a:solidFill>
+                  <a:srgbClr val="D4D4D4"/>
+                </a:solidFill>
+                <a:effectLst/>
+                <a:latin typeface="Consolas" panose="020B0609020204030204" pitchFamily="49" charset="0"/>
+              </a:rPr>
+              <a:t>outDir</a:t>
+            </a:r>
+            <a:r>
+              <a:rPr lang="en-US" sz="1200" b="0" dirty="0">
+                <a:solidFill>
+                  <a:srgbClr val="D4D4D4"/>
+                </a:solidFill>
+                <a:effectLst/>
+                <a:latin typeface="Consolas" panose="020B0609020204030204" pitchFamily="49" charset="0"/>
+              </a:rPr>
+              <a:t> + </a:t>
+            </a:r>
+            <a:r>
+              <a:rPr lang="en-US" sz="1200" b="0" dirty="0" err="1">
+                <a:solidFill>
+                  <a:srgbClr val="D4D4D4"/>
+                </a:solidFill>
+                <a:effectLst/>
+                <a:latin typeface="Consolas" panose="020B0609020204030204" pitchFamily="49" charset="0"/>
+              </a:rPr>
+              <a:t>rasterImage</a:t>
+            </a:r>
+            <a:r>
+              <a:rPr lang="en-US" sz="1200" b="0" dirty="0">
+                <a:solidFill>
+                  <a:srgbClr val="D4D4D4"/>
+                </a:solidFill>
+                <a:effectLst/>
+                <a:latin typeface="Consolas" panose="020B0609020204030204" pitchFamily="49" charset="0"/>
+              </a:rPr>
+              <a:t>)</a:t>
+            </a:r>
+          </a:p>
+          <a:p>
+            <a:r>
+              <a:rPr lang="en-US" sz="1200" b="0" dirty="0">
+                <a:solidFill>
+                  <a:srgbClr val="D4D4D4"/>
+                </a:solidFill>
+                <a:effectLst/>
+                <a:latin typeface="Consolas" panose="020B0609020204030204" pitchFamily="49" charset="0"/>
+              </a:rPr>
+              <a:t>    </a:t>
+            </a:r>
+            <a:r>
+              <a:rPr lang="en-US" sz="1200" b="0" dirty="0">
+                <a:solidFill>
+                  <a:srgbClr val="569CD6"/>
+                </a:solidFill>
+                <a:effectLst/>
+                <a:latin typeface="Consolas" panose="020B0609020204030204" pitchFamily="49" charset="0"/>
+              </a:rPr>
+              <a:t>del</a:t>
+            </a:r>
+            <a:r>
+              <a:rPr lang="en-US" sz="1200" b="0" dirty="0">
+                <a:solidFill>
+                  <a:srgbClr val="D4D4D4"/>
+                </a:solidFill>
+                <a:effectLst/>
+                <a:latin typeface="Consolas" panose="020B0609020204030204" pitchFamily="49" charset="0"/>
+              </a:rPr>
+              <a:t> </a:t>
+            </a:r>
+            <a:r>
+              <a:rPr lang="en-US" sz="1200" b="0" dirty="0" err="1">
+                <a:solidFill>
+                  <a:srgbClr val="D4D4D4"/>
+                </a:solidFill>
+                <a:effectLst/>
+                <a:latin typeface="Consolas" panose="020B0609020204030204" pitchFamily="49" charset="0"/>
+              </a:rPr>
+              <a:t>rastMult</a:t>
+            </a:r>
+            <a:endParaRPr lang="en-US" sz="1200" b="0" dirty="0">
+              <a:solidFill>
+                <a:srgbClr val="D4D4D4"/>
+              </a:solidFill>
+              <a:effectLst/>
+              <a:latin typeface="Consolas" panose="020B0609020204030204" pitchFamily="49" charset="0"/>
+            </a:endParaRPr>
+          </a:p>
+        </p:txBody>
+      </p:sp>
+      <p:sp>
+        <p:nvSpPr>
+          <p:cNvPr id="4098" name="Title 1">
+            <a:extLst>
+              <a:ext uri="{FF2B5EF4-FFF2-40B4-BE49-F238E27FC236}">
+                <a16:creationId xmlns:a16="http://schemas.microsoft.com/office/drawing/2014/main" id="{06AAA310-0DC5-F994-6037-AFC975A406D6}"/>
+              </a:ext>
+            </a:extLst>
+          </p:cNvPr>
+          <p:cNvSpPr>
+            <a:spLocks noGrp="1"/>
+          </p:cNvSpPr>
+          <p:nvPr>
+            <p:ph type="title"/>
+          </p:nvPr>
+        </p:nvSpPr>
+        <p:spPr/>
+        <p:txBody>
+          <a:bodyPr/>
+          <a:lstStyle/>
+          <a:p>
+            <a:pPr>
+              <a:defRPr/>
+            </a:pPr>
+            <a:r>
+              <a:rPr lang="en-US" altLang="en-US"/>
+              <a:t>Sample script with errors</a:t>
+            </a:r>
+          </a:p>
+        </p:txBody>
+      </p:sp>
+    </p:spTree>
+  </p:cSld>
+  <p:clrMapOvr>
+    <a:masterClrMapping/>
+  </p:clrMapOvr>
+</p:sld>
+</file>
+
+<file path=ppt/slides/slide30.xml><?xml version="1.0" encoding="utf-8"?>
 <p:sld xmlns:a="http://schemas.openxmlformats.org/drawingml/2006/main" xmlns:r="http://schemas.openxmlformats.org/officeDocument/2006/relationships" xmlns:p="http://schemas.openxmlformats.org/presentationml/2006/main">
   <p:cSld>
     <p:spTree>
@@ -27443,7 +28780,7 @@
 </p:sld>
 </file>
 
-<file path=ppt/slides/slide29.xml><?xml version="1.0" encoding="utf-8"?>
+<file path=ppt/slides/slide31.xml><?xml version="1.0" encoding="utf-8"?>
 <p:sld xmlns:a="http://schemas.openxmlformats.org/drawingml/2006/main" xmlns:r="http://schemas.openxmlformats.org/officeDocument/2006/relationships" xmlns:p="http://schemas.openxmlformats.org/presentationml/2006/main">
   <p:cSld>
     <p:spTree>
@@ -27523,1067 +28860,7 @@
 </p:sld>
 </file>
 
-<file path=ppt/slides/slide3.xml><?xml version="1.0" encoding="utf-8"?>
-<p:sld xmlns:a="http://schemas.openxmlformats.org/drawingml/2006/main" xmlns:r="http://schemas.openxmlformats.org/officeDocument/2006/relationships" xmlns:p="http://schemas.openxmlformats.org/presentationml/2006/main">
-  <p:cSld>
-    <p:spTree>
-      <p:nvGrpSpPr>
-        <p:cNvPr id="1" name=""/>
-        <p:cNvGrpSpPr/>
-        <p:nvPr/>
-      </p:nvGrpSpPr>
-      <p:grpSpPr>
-        <a:xfrm>
-          <a:off x="0" y="0"/>
-          <a:ext cx="0" cy="0"/>
-          <a:chOff x="0" y="0"/>
-          <a:chExt cx="0" cy="0"/>
-        </a:xfrm>
-      </p:grpSpPr>
-      <p:sp>
-        <p:nvSpPr>
-          <p:cNvPr id="3" name="Content Placeholder 2">
-            <a:extLst>
-              <a:ext uri="{FF2B5EF4-FFF2-40B4-BE49-F238E27FC236}">
-                <a16:creationId xmlns:a16="http://schemas.microsoft.com/office/drawing/2014/main" id="{78862660-EFC4-468F-E61A-6EF4345C6DB4}"/>
-              </a:ext>
-            </a:extLst>
-          </p:cNvPr>
-          <p:cNvSpPr>
-            <a:spLocks noGrp="1"/>
-          </p:cNvSpPr>
-          <p:nvPr>
-            <p:ph idx="1"/>
-          </p:nvPr>
-        </p:nvSpPr>
-        <p:spPr>
-          <a:xfrm>
-            <a:off x="152400" y="914400"/>
-            <a:ext cx="8686800" cy="5715000"/>
-          </a:xfrm>
-        </p:spPr>
-        <p:txBody>
-          <a:bodyPr/>
-          <a:lstStyle/>
-          <a:p>
-            <a:pPr marL="0" indent="0">
-              <a:buNone/>
-              <a:defRPr/>
-            </a:pPr>
-            <a:r>
-              <a:rPr lang="en-US" sz="1800" dirty="0"/>
-              <a:t>Purpose: multiply every raster in the workspace by a factor given by the user</a:t>
-            </a:r>
-          </a:p>
-          <a:p>
-            <a:pPr>
-              <a:defRPr/>
-            </a:pPr>
-            <a:endParaRPr lang="en-US" sz="1800" dirty="0"/>
-          </a:p>
-          <a:p>
-            <a:pPr>
-              <a:defRPr/>
-            </a:pPr>
-            <a:endParaRPr lang="en-US" sz="1800" dirty="0"/>
-          </a:p>
-          <a:p>
-            <a:pPr>
-              <a:defRPr/>
-            </a:pPr>
-            <a:endParaRPr lang="en-US" sz="1800" dirty="0"/>
-          </a:p>
-          <a:p>
-            <a:pPr>
-              <a:defRPr/>
-            </a:pPr>
-            <a:endParaRPr lang="en-US" sz="1800" dirty="0"/>
-          </a:p>
-          <a:p>
-            <a:pPr>
-              <a:defRPr/>
-            </a:pPr>
-            <a:endParaRPr lang="en-US" sz="1800" dirty="0"/>
-          </a:p>
-          <a:p>
-            <a:pPr>
-              <a:defRPr/>
-            </a:pPr>
-            <a:endParaRPr lang="en-US" sz="1800" dirty="0"/>
-          </a:p>
-          <a:p>
-            <a:pPr>
-              <a:defRPr/>
-            </a:pPr>
-            <a:endParaRPr lang="en-US" sz="1800" dirty="0"/>
-          </a:p>
-          <a:p>
-            <a:pPr>
-              <a:defRPr/>
-            </a:pPr>
-            <a:endParaRPr lang="en-US" sz="1800" dirty="0"/>
-          </a:p>
-          <a:p>
-            <a:pPr>
-              <a:defRPr/>
-            </a:pPr>
-            <a:endParaRPr lang="en-US" sz="1800" dirty="0"/>
-          </a:p>
-          <a:p>
-            <a:pPr marL="0" indent="0">
-              <a:buNone/>
-              <a:defRPr/>
-            </a:pPr>
-            <a:endParaRPr lang="en-US" sz="1800" dirty="0"/>
-          </a:p>
-          <a:p>
-            <a:pPr marL="0" indent="0">
-              <a:buNone/>
-              <a:defRPr/>
-            </a:pPr>
-            <a:endParaRPr lang="en-US" sz="1800" dirty="0"/>
-          </a:p>
-          <a:p>
-            <a:pPr marL="0" indent="0">
-              <a:buNone/>
-              <a:defRPr/>
-            </a:pPr>
-            <a:r>
-              <a:rPr lang="en-US" sz="1800" dirty="0"/>
-              <a:t>Throws the following exception: </a:t>
-            </a:r>
-          </a:p>
-          <a:p>
-            <a:pPr marL="400050" lvl="1" indent="0">
-              <a:defRPr/>
-            </a:pPr>
-            <a:r>
-              <a:rPr lang="en-US" sz="1400" dirty="0">
-                <a:solidFill>
-                  <a:srgbClr val="FF0066"/>
-                </a:solidFill>
-                <a:latin typeface="Consolas" panose="020B0609020204030204" pitchFamily="49" charset="0"/>
-              </a:rPr>
-              <a:t>for </a:t>
-            </a:r>
-            <a:r>
-              <a:rPr lang="en-US" sz="1400" dirty="0" err="1">
-                <a:solidFill>
-                  <a:srgbClr val="FF0066"/>
-                </a:solidFill>
-                <a:latin typeface="Consolas" panose="020B0609020204030204" pitchFamily="49" charset="0"/>
-              </a:rPr>
-              <a:t>rasterImage</a:t>
-            </a:r>
-            <a:r>
-              <a:rPr lang="en-US" sz="1400" dirty="0">
-                <a:solidFill>
-                  <a:srgbClr val="FF0066"/>
-                </a:solidFill>
-                <a:latin typeface="Consolas" panose="020B0609020204030204" pitchFamily="49" charset="0"/>
-              </a:rPr>
-              <a:t> in </a:t>
-            </a:r>
-            <a:r>
-              <a:rPr lang="en-US" sz="1400" dirty="0" err="1">
-                <a:solidFill>
-                  <a:srgbClr val="FF0066"/>
-                </a:solidFill>
-                <a:latin typeface="Consolas" panose="020B0609020204030204" pitchFamily="49" charset="0"/>
-              </a:rPr>
-              <a:t>rasterList</a:t>
-            </a:r>
-            <a:r>
-              <a:rPr lang="en-US" sz="1400" dirty="0">
-                <a:solidFill>
-                  <a:srgbClr val="FF0066"/>
-                </a:solidFill>
-                <a:latin typeface="Consolas" panose="020B0609020204030204" pitchFamily="49" charset="0"/>
-              </a:rPr>
-              <a:t>:</a:t>
-            </a:r>
-            <a:br>
-              <a:rPr lang="en-US" sz="1400" dirty="0">
-                <a:solidFill>
-                  <a:srgbClr val="FF0066"/>
-                </a:solidFill>
-                <a:latin typeface="Consolas" panose="020B0609020204030204" pitchFamily="49" charset="0"/>
-              </a:rPr>
-            </a:br>
-            <a:r>
-              <a:rPr lang="en-US" sz="1400" dirty="0">
-                <a:solidFill>
-                  <a:srgbClr val="FF0066"/>
-                </a:solidFill>
-                <a:latin typeface="Consolas" panose="020B0609020204030204" pitchFamily="49" charset="0"/>
-              </a:rPr>
-              <a:t>  </a:t>
-            </a:r>
-            <a:r>
-              <a:rPr lang="en-US" sz="1400" dirty="0" err="1">
-                <a:solidFill>
-                  <a:srgbClr val="FF0066"/>
-                </a:solidFill>
-                <a:latin typeface="Consolas" panose="020B0609020204030204" pitchFamily="49" charset="0"/>
-              </a:rPr>
-              <a:t>TypeError</a:t>
-            </a:r>
-            <a:r>
-              <a:rPr lang="en-US" sz="1400" dirty="0">
-                <a:solidFill>
-                  <a:srgbClr val="FF0066"/>
-                </a:solidFill>
-                <a:latin typeface="Consolas" panose="020B0609020204030204" pitchFamily="49" charset="0"/>
-              </a:rPr>
-              <a:t>: '</a:t>
-            </a:r>
-            <a:r>
-              <a:rPr lang="en-US" sz="1400" dirty="0" err="1">
-                <a:solidFill>
-                  <a:srgbClr val="FF0066"/>
-                </a:solidFill>
-                <a:latin typeface="Consolas" panose="020B0609020204030204" pitchFamily="49" charset="0"/>
-              </a:rPr>
-              <a:t>NoneType</a:t>
-            </a:r>
-            <a:r>
-              <a:rPr lang="en-US" sz="1400" dirty="0">
-                <a:solidFill>
-                  <a:srgbClr val="FF0066"/>
-                </a:solidFill>
-                <a:latin typeface="Consolas" panose="020B0609020204030204" pitchFamily="49" charset="0"/>
-              </a:rPr>
-              <a:t>' object is not </a:t>
-            </a:r>
-            <a:r>
-              <a:rPr lang="en-US" sz="1400" dirty="0" err="1">
-                <a:solidFill>
-                  <a:srgbClr val="FF0066"/>
-                </a:solidFill>
-                <a:latin typeface="Consolas" panose="020B0609020204030204" pitchFamily="49" charset="0"/>
-              </a:rPr>
-              <a:t>iterable</a:t>
-            </a:r>
-            <a:endParaRPr lang="en-US" sz="1400" dirty="0">
-              <a:solidFill>
-                <a:srgbClr val="FF0066"/>
-              </a:solidFill>
-              <a:latin typeface="Consolas" panose="020B0609020204030204" pitchFamily="49" charset="0"/>
-            </a:endParaRPr>
-          </a:p>
-          <a:p>
-            <a:pPr marL="0" indent="0">
-              <a:buNone/>
-              <a:defRPr/>
-            </a:pPr>
-            <a:r>
-              <a:rPr lang="en-US" sz="1800" dirty="0"/>
-              <a:t> Run this script with an argument  "0.001 meters"</a:t>
-            </a:r>
-          </a:p>
-          <a:p>
-            <a:pPr marL="400050" lvl="1" indent="0">
-              <a:defRPr/>
-            </a:pPr>
-            <a:r>
-              <a:rPr lang="en-US" sz="1400" dirty="0">
-                <a:solidFill>
-                  <a:srgbClr val="FF0066"/>
-                </a:solidFill>
-                <a:latin typeface="Consolas" panose="020B0609020204030204" pitchFamily="49" charset="0"/>
-              </a:rPr>
-              <a:t>factor = float(sys.argv[1])</a:t>
-            </a:r>
-            <a:br>
-              <a:rPr lang="en-US" sz="1400" dirty="0">
-                <a:solidFill>
-                  <a:srgbClr val="FF0066"/>
-                </a:solidFill>
-                <a:latin typeface="Consolas" panose="020B0609020204030204" pitchFamily="49" charset="0"/>
-              </a:rPr>
-            </a:br>
-            <a:r>
-              <a:rPr lang="en-US" sz="1400" dirty="0">
-                <a:solidFill>
-                  <a:srgbClr val="FF0066"/>
-                </a:solidFill>
-                <a:latin typeface="Consolas" panose="020B0609020204030204" pitchFamily="49" charset="0"/>
-              </a:rPr>
-              <a:t>  </a:t>
-            </a:r>
-            <a:r>
-              <a:rPr lang="en-US" sz="1400" dirty="0" err="1">
-                <a:solidFill>
-                  <a:srgbClr val="FF0066"/>
-                </a:solidFill>
-                <a:latin typeface="Consolas" panose="020B0609020204030204" pitchFamily="49" charset="0"/>
-              </a:rPr>
-              <a:t>ValueError</a:t>
-            </a:r>
-            <a:r>
-              <a:rPr lang="en-US" sz="1400" dirty="0">
-                <a:solidFill>
-                  <a:srgbClr val="FF0066"/>
-                </a:solidFill>
-                <a:latin typeface="Consolas" panose="020B0609020204030204" pitchFamily="49" charset="0"/>
-              </a:rPr>
-              <a:t>: invalid literal for float(): 0.001 meters</a:t>
-            </a:r>
-          </a:p>
-        </p:txBody>
-      </p:sp>
-      <p:sp>
-        <p:nvSpPr>
-          <p:cNvPr id="6" name="TextBox 5">
-            <a:extLst>
-              <a:ext uri="{FF2B5EF4-FFF2-40B4-BE49-F238E27FC236}">
-                <a16:creationId xmlns:a16="http://schemas.microsoft.com/office/drawing/2014/main" id="{CC67BE3D-00BE-E559-49E9-E9F701AAF10A}"/>
-              </a:ext>
-            </a:extLst>
-          </p:cNvPr>
-          <p:cNvSpPr txBox="1"/>
-          <p:nvPr/>
-        </p:nvSpPr>
-        <p:spPr>
-          <a:xfrm>
-            <a:off x="914400" y="1219200"/>
-            <a:ext cx="5410200" cy="3416320"/>
-          </a:xfrm>
-          <a:prstGeom prst="rect">
-            <a:avLst/>
-          </a:prstGeom>
-          <a:noFill/>
-        </p:spPr>
-        <p:txBody>
-          <a:bodyPr wrap="square">
-            <a:spAutoFit/>
-          </a:bodyPr>
-          <a:lstStyle/>
-          <a:p>
-            <a:r>
-              <a:rPr lang="en-US" sz="1200" b="0" dirty="0">
-                <a:solidFill>
-                  <a:srgbClr val="6A9955"/>
-                </a:solidFill>
-                <a:effectLst/>
-                <a:latin typeface="Consolas" panose="020B0609020204030204" pitchFamily="49" charset="0"/>
-              </a:rPr>
-              <a:t># multRast.py</a:t>
-            </a:r>
-            <a:endParaRPr lang="en-US" sz="1200" b="0" dirty="0">
-              <a:solidFill>
-                <a:srgbClr val="D4D4D4"/>
-              </a:solidFill>
-              <a:effectLst/>
-              <a:latin typeface="Consolas" panose="020B0609020204030204" pitchFamily="49" charset="0"/>
-            </a:endParaRPr>
-          </a:p>
-          <a:p>
-            <a:r>
-              <a:rPr lang="en-US" sz="1200" b="0" dirty="0">
-                <a:solidFill>
-                  <a:srgbClr val="569CD6"/>
-                </a:solidFill>
-                <a:effectLst/>
-                <a:latin typeface="Consolas" panose="020B0609020204030204" pitchFamily="49" charset="0"/>
-              </a:rPr>
-              <a:t>import</a:t>
-            </a:r>
-            <a:r>
-              <a:rPr lang="en-US" sz="1200" b="0" dirty="0">
-                <a:solidFill>
-                  <a:srgbClr val="D4D4D4"/>
-                </a:solidFill>
-                <a:effectLst/>
-                <a:latin typeface="Consolas" panose="020B0609020204030204" pitchFamily="49" charset="0"/>
-              </a:rPr>
-              <a:t> arcpy, sys</a:t>
-            </a:r>
-          </a:p>
-          <a:p>
-            <a:br>
-              <a:rPr lang="en-US" sz="1200" b="0" dirty="0">
-                <a:solidFill>
-                  <a:srgbClr val="D4D4D4"/>
-                </a:solidFill>
-                <a:effectLst/>
-                <a:latin typeface="Consolas" panose="020B0609020204030204" pitchFamily="49" charset="0"/>
-              </a:rPr>
-            </a:br>
-            <a:r>
-              <a:rPr lang="en-US" sz="1200" b="0" dirty="0">
-                <a:solidFill>
-                  <a:srgbClr val="6A9955"/>
-                </a:solidFill>
-                <a:effectLst/>
-                <a:latin typeface="Consolas" panose="020B0609020204030204" pitchFamily="49" charset="0"/>
-              </a:rPr>
-              <a:t># Set multiplication factor</a:t>
-            </a:r>
-            <a:endParaRPr lang="en-US" sz="1200" b="0" dirty="0">
-              <a:solidFill>
-                <a:srgbClr val="D4D4D4"/>
-              </a:solidFill>
-              <a:effectLst/>
-              <a:latin typeface="Consolas" panose="020B0609020204030204" pitchFamily="49" charset="0"/>
-            </a:endParaRPr>
-          </a:p>
-          <a:p>
-            <a:r>
-              <a:rPr lang="en-US" sz="1200" b="0" dirty="0">
-                <a:solidFill>
-                  <a:srgbClr val="D4D4D4"/>
-                </a:solidFill>
-                <a:effectLst/>
-                <a:latin typeface="Consolas" panose="020B0609020204030204" pitchFamily="49" charset="0"/>
-              </a:rPr>
-              <a:t>factor = float(sys.argv[</a:t>
-            </a:r>
-            <a:r>
-              <a:rPr lang="en-US" sz="1200" b="0" dirty="0">
-                <a:solidFill>
-                  <a:srgbClr val="B5CEA8"/>
-                </a:solidFill>
-                <a:effectLst/>
-                <a:latin typeface="Consolas" panose="020B0609020204030204" pitchFamily="49" charset="0"/>
-              </a:rPr>
-              <a:t>1</a:t>
-            </a:r>
-            <a:r>
-              <a:rPr lang="en-US" sz="1200" b="0" dirty="0">
-                <a:solidFill>
-                  <a:srgbClr val="D4D4D4"/>
-                </a:solidFill>
-                <a:effectLst/>
-                <a:latin typeface="Consolas" panose="020B0609020204030204" pitchFamily="49" charset="0"/>
-              </a:rPr>
-              <a:t>])</a:t>
-            </a:r>
-          </a:p>
-          <a:p>
-            <a:br>
-              <a:rPr lang="en-US" sz="1200" b="0" dirty="0">
-                <a:solidFill>
-                  <a:srgbClr val="D4D4D4"/>
-                </a:solidFill>
-                <a:effectLst/>
-                <a:latin typeface="Consolas" panose="020B0609020204030204" pitchFamily="49" charset="0"/>
-              </a:rPr>
-            </a:br>
-            <a:r>
-              <a:rPr lang="en-US" sz="1200" b="0" dirty="0" err="1">
-                <a:solidFill>
-                  <a:srgbClr val="D4D4D4"/>
-                </a:solidFill>
-                <a:effectLst/>
-                <a:latin typeface="Consolas" panose="020B0609020204030204" pitchFamily="49" charset="0"/>
-              </a:rPr>
-              <a:t>arcpy.env.overwriteOutput</a:t>
-            </a:r>
-            <a:r>
-              <a:rPr lang="en-US" sz="1200" b="0" dirty="0">
-                <a:solidFill>
-                  <a:srgbClr val="D4D4D4"/>
-                </a:solidFill>
-                <a:effectLst/>
-                <a:latin typeface="Consolas" panose="020B0609020204030204" pitchFamily="49" charset="0"/>
-              </a:rPr>
-              <a:t> = </a:t>
-            </a:r>
-            <a:r>
-              <a:rPr lang="en-US" sz="1200" b="0" dirty="0">
-                <a:solidFill>
-                  <a:srgbClr val="569CD6"/>
-                </a:solidFill>
-                <a:effectLst/>
-                <a:latin typeface="Consolas" panose="020B0609020204030204" pitchFamily="49" charset="0"/>
-              </a:rPr>
-              <a:t>True</a:t>
-            </a:r>
-            <a:endParaRPr lang="en-US" sz="1200" b="0" dirty="0">
-              <a:solidFill>
-                <a:srgbClr val="D4D4D4"/>
-              </a:solidFill>
-              <a:effectLst/>
-              <a:latin typeface="Consolas" panose="020B0609020204030204" pitchFamily="49" charset="0"/>
-            </a:endParaRPr>
-          </a:p>
-          <a:p>
-            <a:r>
-              <a:rPr lang="en-US" sz="1200" b="0" dirty="0" err="1">
-                <a:solidFill>
-                  <a:srgbClr val="D4D4D4"/>
-                </a:solidFill>
-                <a:effectLst/>
-                <a:latin typeface="Consolas" panose="020B0609020204030204" pitchFamily="49" charset="0"/>
-              </a:rPr>
-              <a:t>arcpy.env.worspace</a:t>
-            </a:r>
-            <a:r>
-              <a:rPr lang="en-US" sz="1200" b="0" dirty="0">
-                <a:solidFill>
-                  <a:srgbClr val="D4D4D4"/>
-                </a:solidFill>
-                <a:effectLst/>
-                <a:latin typeface="Consolas" panose="020B0609020204030204" pitchFamily="49" charset="0"/>
-              </a:rPr>
-              <a:t> = </a:t>
-            </a:r>
-            <a:r>
-              <a:rPr lang="en-US" sz="1200" dirty="0">
-                <a:solidFill>
-                  <a:srgbClr val="CE9178"/>
-                </a:solidFill>
-                <a:latin typeface="Consolas" panose="020B0609020204030204" pitchFamily="49" charset="0"/>
-              </a:rPr>
-              <a:t>"</a:t>
-            </a:r>
-            <a:r>
-              <a:rPr lang="en-US" sz="1200" b="0" dirty="0">
-                <a:solidFill>
-                  <a:srgbClr val="CE9178"/>
-                </a:solidFill>
-                <a:effectLst/>
-                <a:latin typeface="Consolas" panose="020B0609020204030204" pitchFamily="49" charset="0"/>
-              </a:rPr>
-              <a:t>C:/gispy/data/ch14/rastTester.gdb"</a:t>
-            </a:r>
-            <a:endParaRPr lang="en-US" sz="1200" b="0" dirty="0">
-              <a:solidFill>
-                <a:srgbClr val="D4D4D4"/>
-              </a:solidFill>
-              <a:effectLst/>
-              <a:latin typeface="Consolas" panose="020B0609020204030204" pitchFamily="49" charset="0"/>
-            </a:endParaRPr>
-          </a:p>
-          <a:p>
-            <a:r>
-              <a:rPr lang="en-US" sz="1200" b="0" dirty="0">
-                <a:solidFill>
-                  <a:srgbClr val="D4D4D4"/>
-                </a:solidFill>
-                <a:effectLst/>
-                <a:latin typeface="Consolas" panose="020B0609020204030204" pitchFamily="49" charset="0"/>
-              </a:rPr>
-              <a:t>arcpy.CheckOutExtension(</a:t>
-            </a:r>
-            <a:r>
-              <a:rPr lang="en-US" sz="1200" dirty="0">
-                <a:solidFill>
-                  <a:srgbClr val="CE9178"/>
-                </a:solidFill>
-                <a:latin typeface="Consolas" panose="020B0609020204030204" pitchFamily="49" charset="0"/>
-              </a:rPr>
-              <a:t>"</a:t>
-            </a:r>
-            <a:r>
-              <a:rPr lang="en-US" sz="1200" b="0" dirty="0">
-                <a:solidFill>
-                  <a:srgbClr val="CE9178"/>
-                </a:solidFill>
-                <a:effectLst/>
-                <a:latin typeface="Consolas" panose="020B0609020204030204" pitchFamily="49" charset="0"/>
-              </a:rPr>
-              <a:t>Spatial"</a:t>
-            </a:r>
-            <a:r>
-              <a:rPr lang="en-US" sz="1200" b="0" dirty="0">
-                <a:solidFill>
-                  <a:srgbClr val="D4D4D4"/>
-                </a:solidFill>
-                <a:effectLst/>
-                <a:latin typeface="Consolas" panose="020B0609020204030204" pitchFamily="49" charset="0"/>
-              </a:rPr>
-              <a:t>)</a:t>
-            </a:r>
-          </a:p>
-          <a:p>
-            <a:r>
-              <a:rPr lang="en-US" sz="1200" b="0" dirty="0" err="1">
-                <a:solidFill>
-                  <a:srgbClr val="D4D4D4"/>
-                </a:solidFill>
-                <a:effectLst/>
-                <a:latin typeface="Consolas" panose="020B0609020204030204" pitchFamily="49" charset="0"/>
-              </a:rPr>
-              <a:t>outDir</a:t>
-            </a:r>
-            <a:r>
-              <a:rPr lang="en-US" sz="1200" b="0" dirty="0">
-                <a:solidFill>
-                  <a:srgbClr val="D4D4D4"/>
-                </a:solidFill>
-                <a:effectLst/>
-                <a:latin typeface="Consolas" panose="020B0609020204030204" pitchFamily="49" charset="0"/>
-              </a:rPr>
-              <a:t> = </a:t>
-            </a:r>
-            <a:r>
-              <a:rPr lang="en-US" sz="1200" dirty="0">
-                <a:solidFill>
-                  <a:srgbClr val="CE9178"/>
-                </a:solidFill>
-                <a:latin typeface="Consolas" panose="020B0609020204030204" pitchFamily="49" charset="0"/>
-              </a:rPr>
-              <a:t>"</a:t>
-            </a:r>
-            <a:r>
-              <a:rPr lang="en-US" sz="1200" b="0" dirty="0">
-                <a:solidFill>
-                  <a:srgbClr val="CE9178"/>
-                </a:solidFill>
-                <a:effectLst/>
-                <a:latin typeface="Consolas" panose="020B0609020204030204" pitchFamily="49" charset="0"/>
-              </a:rPr>
-              <a:t>C:/gispy/scratch/"</a:t>
-            </a:r>
-            <a:endParaRPr lang="en-US" sz="1200" b="0" dirty="0">
-              <a:solidFill>
-                <a:srgbClr val="D4D4D4"/>
-              </a:solidFill>
-              <a:effectLst/>
-              <a:latin typeface="Consolas" panose="020B0609020204030204" pitchFamily="49" charset="0"/>
-            </a:endParaRPr>
-          </a:p>
-          <a:p>
-            <a:br>
-              <a:rPr lang="en-US" sz="1200" b="0" dirty="0">
-                <a:solidFill>
-                  <a:srgbClr val="D4D4D4"/>
-                </a:solidFill>
-                <a:effectLst/>
-                <a:latin typeface="Consolas" panose="020B0609020204030204" pitchFamily="49" charset="0"/>
-              </a:rPr>
-            </a:br>
-            <a:r>
-              <a:rPr lang="en-US" sz="1200" b="0" dirty="0">
-                <a:solidFill>
-                  <a:srgbClr val="6A9955"/>
-                </a:solidFill>
-                <a:effectLst/>
-                <a:latin typeface="Consolas" panose="020B0609020204030204" pitchFamily="49" charset="0"/>
-              </a:rPr>
-              <a:t># Get raster list &amp; multiply each by a factor</a:t>
-            </a:r>
-            <a:endParaRPr lang="en-US" sz="1200" b="0" dirty="0">
-              <a:solidFill>
-                <a:srgbClr val="D4D4D4"/>
-              </a:solidFill>
-              <a:effectLst/>
-              <a:latin typeface="Consolas" panose="020B0609020204030204" pitchFamily="49" charset="0"/>
-            </a:endParaRPr>
-          </a:p>
-          <a:p>
-            <a:r>
-              <a:rPr lang="en-US" sz="1200" b="0" dirty="0" err="1">
-                <a:solidFill>
-                  <a:srgbClr val="D4D4D4"/>
-                </a:solidFill>
-                <a:effectLst/>
-                <a:latin typeface="Consolas" panose="020B0609020204030204" pitchFamily="49" charset="0"/>
-              </a:rPr>
-              <a:t>rasterList</a:t>
-            </a:r>
-            <a:r>
-              <a:rPr lang="en-US" sz="1200" b="0" dirty="0">
-                <a:solidFill>
-                  <a:srgbClr val="D4D4D4"/>
-                </a:solidFill>
-                <a:effectLst/>
-                <a:latin typeface="Consolas" panose="020B0609020204030204" pitchFamily="49" charset="0"/>
-              </a:rPr>
-              <a:t> = </a:t>
-            </a:r>
-            <a:r>
-              <a:rPr lang="en-US" sz="1200" b="0" dirty="0" err="1">
-                <a:solidFill>
-                  <a:srgbClr val="D4D4D4"/>
-                </a:solidFill>
-                <a:effectLst/>
-                <a:latin typeface="Consolas" panose="020B0609020204030204" pitchFamily="49" charset="0"/>
-              </a:rPr>
-              <a:t>arcpy.ListRasters</a:t>
-            </a:r>
-            <a:r>
-              <a:rPr lang="en-US" sz="1200" b="0" dirty="0">
-                <a:solidFill>
-                  <a:srgbClr val="D4D4D4"/>
-                </a:solidFill>
-                <a:effectLst/>
-                <a:latin typeface="Consolas" panose="020B0609020204030204" pitchFamily="49" charset="0"/>
-              </a:rPr>
-              <a:t>()</a:t>
-            </a:r>
-          </a:p>
-          <a:p>
-            <a:r>
-              <a:rPr lang="en-US" sz="1200" b="0" dirty="0">
-                <a:solidFill>
-                  <a:srgbClr val="569CD6"/>
-                </a:solidFill>
-                <a:effectLst/>
-                <a:latin typeface="Consolas" panose="020B0609020204030204" pitchFamily="49" charset="0"/>
-              </a:rPr>
-              <a:t>for</a:t>
-            </a:r>
-            <a:r>
-              <a:rPr lang="en-US" sz="1200" b="0" dirty="0">
-                <a:solidFill>
-                  <a:srgbClr val="D4D4D4"/>
-                </a:solidFill>
-                <a:effectLst/>
-                <a:latin typeface="Consolas" panose="020B0609020204030204" pitchFamily="49" charset="0"/>
-              </a:rPr>
-              <a:t> </a:t>
-            </a:r>
-            <a:r>
-              <a:rPr lang="en-US" sz="1200" b="0" dirty="0" err="1">
-                <a:solidFill>
-                  <a:srgbClr val="D4D4D4"/>
-                </a:solidFill>
-                <a:effectLst/>
-                <a:latin typeface="Consolas" panose="020B0609020204030204" pitchFamily="49" charset="0"/>
-              </a:rPr>
-              <a:t>rasterImage</a:t>
-            </a:r>
-            <a:r>
-              <a:rPr lang="en-US" sz="1200" b="0" dirty="0">
-                <a:solidFill>
-                  <a:srgbClr val="D4D4D4"/>
-                </a:solidFill>
-                <a:effectLst/>
-                <a:latin typeface="Consolas" panose="020B0609020204030204" pitchFamily="49" charset="0"/>
-              </a:rPr>
-              <a:t> </a:t>
-            </a:r>
-            <a:r>
-              <a:rPr lang="en-US" sz="1200" b="0" dirty="0">
-                <a:solidFill>
-                  <a:srgbClr val="569CD6"/>
-                </a:solidFill>
-                <a:effectLst/>
-                <a:latin typeface="Consolas" panose="020B0609020204030204" pitchFamily="49" charset="0"/>
-              </a:rPr>
-              <a:t>in</a:t>
-            </a:r>
-            <a:r>
-              <a:rPr lang="en-US" sz="1200" b="0" dirty="0">
-                <a:solidFill>
-                  <a:srgbClr val="D4D4D4"/>
-                </a:solidFill>
-                <a:effectLst/>
-                <a:latin typeface="Consolas" panose="020B0609020204030204" pitchFamily="49" charset="0"/>
-              </a:rPr>
-              <a:t> </a:t>
-            </a:r>
-            <a:r>
-              <a:rPr lang="en-US" sz="1200" b="0" dirty="0" err="1">
-                <a:solidFill>
-                  <a:srgbClr val="D4D4D4"/>
-                </a:solidFill>
-                <a:effectLst/>
-                <a:latin typeface="Consolas" panose="020B0609020204030204" pitchFamily="49" charset="0"/>
-              </a:rPr>
-              <a:t>rasterList</a:t>
-            </a:r>
-            <a:r>
-              <a:rPr lang="en-US" sz="1200" b="0" dirty="0">
-                <a:solidFill>
-                  <a:srgbClr val="D4D4D4"/>
-                </a:solidFill>
-                <a:effectLst/>
-                <a:latin typeface="Consolas" panose="020B0609020204030204" pitchFamily="49" charset="0"/>
-              </a:rPr>
-              <a:t>:</a:t>
-            </a:r>
-          </a:p>
-          <a:p>
-            <a:r>
-              <a:rPr lang="en-US" sz="1200" b="0" dirty="0">
-                <a:solidFill>
-                  <a:srgbClr val="D4D4D4"/>
-                </a:solidFill>
-                <a:effectLst/>
-                <a:latin typeface="Consolas" panose="020B0609020204030204" pitchFamily="49" charset="0"/>
-              </a:rPr>
-              <a:t>    </a:t>
-            </a:r>
-            <a:r>
-              <a:rPr lang="en-US" sz="1200" b="0" dirty="0" err="1">
-                <a:solidFill>
-                  <a:srgbClr val="D4D4D4"/>
-                </a:solidFill>
-                <a:effectLst/>
-                <a:latin typeface="Consolas" panose="020B0609020204030204" pitchFamily="49" charset="0"/>
-              </a:rPr>
-              <a:t>rasterObj</a:t>
-            </a:r>
-            <a:r>
-              <a:rPr lang="en-US" sz="1200" b="0" dirty="0">
-                <a:solidFill>
-                  <a:srgbClr val="D4D4D4"/>
-                </a:solidFill>
-                <a:effectLst/>
-                <a:latin typeface="Consolas" panose="020B0609020204030204" pitchFamily="49" charset="0"/>
-              </a:rPr>
-              <a:t> = </a:t>
-            </a:r>
-            <a:r>
-              <a:rPr lang="en-US" sz="1200" b="0" dirty="0" err="1">
-                <a:solidFill>
-                  <a:srgbClr val="D4D4D4"/>
-                </a:solidFill>
-                <a:effectLst/>
-                <a:latin typeface="Consolas" panose="020B0609020204030204" pitchFamily="49" charset="0"/>
-              </a:rPr>
-              <a:t>arcpy.Raster</a:t>
-            </a:r>
-            <a:r>
-              <a:rPr lang="en-US" sz="1200" b="0" dirty="0">
-                <a:solidFill>
-                  <a:srgbClr val="D4D4D4"/>
-                </a:solidFill>
-                <a:effectLst/>
-                <a:latin typeface="Consolas" panose="020B0609020204030204" pitchFamily="49" charset="0"/>
-              </a:rPr>
-              <a:t>(</a:t>
-            </a:r>
-            <a:r>
-              <a:rPr lang="en-US" sz="1200" b="0" dirty="0" err="1">
-                <a:solidFill>
-                  <a:srgbClr val="D4D4D4"/>
-                </a:solidFill>
-                <a:effectLst/>
-                <a:latin typeface="Consolas" panose="020B0609020204030204" pitchFamily="49" charset="0"/>
-              </a:rPr>
-              <a:t>rasterImage</a:t>
-            </a:r>
-            <a:r>
-              <a:rPr lang="en-US" sz="1200" b="0" dirty="0">
-                <a:solidFill>
-                  <a:srgbClr val="D4D4D4"/>
-                </a:solidFill>
-                <a:effectLst/>
-                <a:latin typeface="Consolas" panose="020B0609020204030204" pitchFamily="49" charset="0"/>
-              </a:rPr>
-              <a:t>)</a:t>
-            </a:r>
-          </a:p>
-          <a:p>
-            <a:r>
-              <a:rPr lang="en-US" sz="1200" b="0" dirty="0">
-                <a:solidFill>
-                  <a:srgbClr val="D4D4D4"/>
-                </a:solidFill>
-                <a:effectLst/>
-                <a:latin typeface="Consolas" panose="020B0609020204030204" pitchFamily="49" charset="0"/>
-              </a:rPr>
-              <a:t>    </a:t>
-            </a:r>
-            <a:r>
-              <a:rPr lang="en-US" sz="1200" b="0" dirty="0" err="1">
-                <a:solidFill>
-                  <a:srgbClr val="D4D4D4"/>
-                </a:solidFill>
-                <a:effectLst/>
-                <a:latin typeface="Consolas" panose="020B0609020204030204" pitchFamily="49" charset="0"/>
-              </a:rPr>
-              <a:t>rastMult</a:t>
-            </a:r>
-            <a:r>
-              <a:rPr lang="en-US" sz="1200" b="0" dirty="0">
-                <a:solidFill>
-                  <a:srgbClr val="D4D4D4"/>
-                </a:solidFill>
-                <a:effectLst/>
-                <a:latin typeface="Consolas" panose="020B0609020204030204" pitchFamily="49" charset="0"/>
-              </a:rPr>
-              <a:t> = </a:t>
-            </a:r>
-            <a:r>
-              <a:rPr lang="en-US" sz="1200" b="0" dirty="0" err="1">
-                <a:solidFill>
-                  <a:srgbClr val="D4D4D4"/>
-                </a:solidFill>
-                <a:effectLst/>
-                <a:latin typeface="Consolas" panose="020B0609020204030204" pitchFamily="49" charset="0"/>
-              </a:rPr>
-              <a:t>rasterObj</a:t>
-            </a:r>
-            <a:r>
-              <a:rPr lang="en-US" sz="1200" b="0" dirty="0">
-                <a:solidFill>
-                  <a:srgbClr val="D4D4D4"/>
-                </a:solidFill>
-                <a:effectLst/>
-                <a:latin typeface="Consolas" panose="020B0609020204030204" pitchFamily="49" charset="0"/>
-              </a:rPr>
-              <a:t> * factor</a:t>
-            </a:r>
-          </a:p>
-          <a:p>
-            <a:r>
-              <a:rPr lang="en-US" sz="1200" b="0" dirty="0">
-                <a:solidFill>
-                  <a:srgbClr val="D4D4D4"/>
-                </a:solidFill>
-                <a:effectLst/>
-                <a:latin typeface="Consolas" panose="020B0609020204030204" pitchFamily="49" charset="0"/>
-              </a:rPr>
-              <a:t>    </a:t>
-            </a:r>
-            <a:r>
-              <a:rPr lang="en-US" sz="1200" b="0" dirty="0" err="1">
-                <a:solidFill>
-                  <a:srgbClr val="D4D4D4"/>
-                </a:solidFill>
-                <a:effectLst/>
-                <a:latin typeface="Consolas" panose="020B0609020204030204" pitchFamily="49" charset="0"/>
-              </a:rPr>
-              <a:t>rastMult.save</a:t>
-            </a:r>
-            <a:r>
-              <a:rPr lang="en-US" sz="1200" b="0" dirty="0">
-                <a:solidFill>
-                  <a:srgbClr val="D4D4D4"/>
-                </a:solidFill>
-                <a:effectLst/>
-                <a:latin typeface="Consolas" panose="020B0609020204030204" pitchFamily="49" charset="0"/>
-              </a:rPr>
-              <a:t>(</a:t>
-            </a:r>
-            <a:r>
-              <a:rPr lang="en-US" sz="1200" b="0" dirty="0" err="1">
-                <a:solidFill>
-                  <a:srgbClr val="D4D4D4"/>
-                </a:solidFill>
-                <a:effectLst/>
-                <a:latin typeface="Consolas" panose="020B0609020204030204" pitchFamily="49" charset="0"/>
-              </a:rPr>
-              <a:t>outDir</a:t>
-            </a:r>
-            <a:r>
-              <a:rPr lang="en-US" sz="1200" b="0" dirty="0">
-                <a:solidFill>
-                  <a:srgbClr val="D4D4D4"/>
-                </a:solidFill>
-                <a:effectLst/>
-                <a:latin typeface="Consolas" panose="020B0609020204030204" pitchFamily="49" charset="0"/>
-              </a:rPr>
-              <a:t> + </a:t>
-            </a:r>
-            <a:r>
-              <a:rPr lang="en-US" sz="1200" b="0" dirty="0" err="1">
-                <a:solidFill>
-                  <a:srgbClr val="D4D4D4"/>
-                </a:solidFill>
-                <a:effectLst/>
-                <a:latin typeface="Consolas" panose="020B0609020204030204" pitchFamily="49" charset="0"/>
-              </a:rPr>
-              <a:t>rasterImage</a:t>
-            </a:r>
-            <a:r>
-              <a:rPr lang="en-US" sz="1200" b="0" dirty="0">
-                <a:solidFill>
-                  <a:srgbClr val="D4D4D4"/>
-                </a:solidFill>
-                <a:effectLst/>
-                <a:latin typeface="Consolas" panose="020B0609020204030204" pitchFamily="49" charset="0"/>
-              </a:rPr>
-              <a:t>)</a:t>
-            </a:r>
-          </a:p>
-          <a:p>
-            <a:r>
-              <a:rPr lang="en-US" sz="1200" b="0" dirty="0">
-                <a:solidFill>
-                  <a:srgbClr val="D4D4D4"/>
-                </a:solidFill>
-                <a:effectLst/>
-                <a:latin typeface="Consolas" panose="020B0609020204030204" pitchFamily="49" charset="0"/>
-              </a:rPr>
-              <a:t>    </a:t>
-            </a:r>
-            <a:r>
-              <a:rPr lang="en-US" sz="1200" b="0" dirty="0">
-                <a:solidFill>
-                  <a:srgbClr val="569CD6"/>
-                </a:solidFill>
-                <a:effectLst/>
-                <a:latin typeface="Consolas" panose="020B0609020204030204" pitchFamily="49" charset="0"/>
-              </a:rPr>
-              <a:t>del</a:t>
-            </a:r>
-            <a:r>
-              <a:rPr lang="en-US" sz="1200" b="0" dirty="0">
-                <a:solidFill>
-                  <a:srgbClr val="D4D4D4"/>
-                </a:solidFill>
-                <a:effectLst/>
-                <a:latin typeface="Consolas" panose="020B0609020204030204" pitchFamily="49" charset="0"/>
-              </a:rPr>
-              <a:t> </a:t>
-            </a:r>
-            <a:r>
-              <a:rPr lang="en-US" sz="1200" b="0" dirty="0" err="1">
-                <a:solidFill>
-                  <a:srgbClr val="D4D4D4"/>
-                </a:solidFill>
-                <a:effectLst/>
-                <a:latin typeface="Consolas" panose="020B0609020204030204" pitchFamily="49" charset="0"/>
-              </a:rPr>
-              <a:t>rastMult</a:t>
-            </a:r>
-            <a:endParaRPr lang="en-US" sz="1200" b="0" dirty="0">
-              <a:solidFill>
-                <a:srgbClr val="D4D4D4"/>
-              </a:solidFill>
-              <a:effectLst/>
-              <a:latin typeface="Consolas" panose="020B0609020204030204" pitchFamily="49" charset="0"/>
-            </a:endParaRPr>
-          </a:p>
-        </p:txBody>
-      </p:sp>
-      <p:sp>
-        <p:nvSpPr>
-          <p:cNvPr id="4098" name="Title 1">
-            <a:extLst>
-              <a:ext uri="{FF2B5EF4-FFF2-40B4-BE49-F238E27FC236}">
-                <a16:creationId xmlns:a16="http://schemas.microsoft.com/office/drawing/2014/main" id="{06AAA310-0DC5-F994-6037-AFC975A406D6}"/>
-              </a:ext>
-            </a:extLst>
-          </p:cNvPr>
-          <p:cNvSpPr>
-            <a:spLocks noGrp="1"/>
-          </p:cNvSpPr>
-          <p:nvPr>
-            <p:ph type="title"/>
-          </p:nvPr>
-        </p:nvSpPr>
-        <p:spPr/>
-        <p:txBody>
-          <a:bodyPr/>
-          <a:lstStyle/>
-          <a:p>
-            <a:pPr>
-              <a:defRPr/>
-            </a:pPr>
-            <a:r>
-              <a:rPr lang="en-US" altLang="en-US"/>
-              <a:t>Sample script with errors</a:t>
-            </a:r>
-          </a:p>
-        </p:txBody>
-      </p:sp>
-    </p:spTree>
-  </p:cSld>
-  <p:clrMapOvr>
-    <a:masterClrMapping/>
-  </p:clrMapOvr>
-</p:sld>
-</file>
-
-<file path=ppt/slides/slide30.xml><?xml version="1.0" encoding="utf-8"?>
+<file path=ppt/slides/slide32.xml><?xml version="1.0" encoding="utf-8"?>
 <p:sld xmlns:a="http://schemas.openxmlformats.org/drawingml/2006/main" xmlns:r="http://schemas.openxmlformats.org/officeDocument/2006/relationships" xmlns:p="http://schemas.openxmlformats.org/presentationml/2006/main">
   <p:cSld>
     <p:spTree>
@@ -28883,7 +29160,7 @@
 </p:sld>
 </file>
 
-<file path=ppt/slides/slide31.xml><?xml version="1.0" encoding="utf-8"?>
+<file path=ppt/slides/slide33.xml><?xml version="1.0" encoding="utf-8"?>
 <p:sld xmlns:a="http://schemas.openxmlformats.org/drawingml/2006/main" xmlns:r="http://schemas.openxmlformats.org/officeDocument/2006/relationships" xmlns:p="http://schemas.openxmlformats.org/presentationml/2006/main">
   <p:cSld>
     <p:spTree>
@@ -29486,7 +29763,7 @@
 </p:sld>
 </file>
 
-<file path=ppt/slides/slide32.xml><?xml version="1.0" encoding="utf-8"?>
+<file path=ppt/slides/slide34.xml><?xml version="1.0" encoding="utf-8"?>
 <p:sld xmlns:a="http://schemas.openxmlformats.org/drawingml/2006/main" xmlns:r="http://schemas.openxmlformats.org/officeDocument/2006/relationships" xmlns:p="http://schemas.openxmlformats.org/presentationml/2006/main">
   <p:cSld>
     <p:spTree>
@@ -30153,7 +30430,7 @@
 </p:sld>
 </file>
 
-<file path=ppt/slides/slide33.xml><?xml version="1.0" encoding="utf-8"?>
+<file path=ppt/slides/slide35.xml><?xml version="1.0" encoding="utf-8"?>
 <p:sld xmlns:a="http://schemas.openxmlformats.org/drawingml/2006/main" xmlns:r="http://schemas.openxmlformats.org/officeDocument/2006/relationships" xmlns:p="http://schemas.openxmlformats.org/presentationml/2006/main">
   <p:cSld>
     <p:spTree>
@@ -30687,7 +30964,7 @@
 </p:sld>
 </file>
 
-<file path=ppt/slides/slide34.xml><?xml version="1.0" encoding="utf-8"?>
+<file path=ppt/slides/slide36.xml><?xml version="1.0" encoding="utf-8"?>
 <p:sld xmlns:a="http://schemas.openxmlformats.org/drawingml/2006/main" xmlns:r="http://schemas.openxmlformats.org/officeDocument/2006/relationships" xmlns:p="http://schemas.openxmlformats.org/presentationml/2006/main">
   <p:cSld>
     <p:spTree>
@@ -31586,7 +31863,7 @@
 </p:sld>
 </file>
 
-<file path=ppt/slides/slide35.xml><?xml version="1.0" encoding="utf-8"?>
+<file path=ppt/slides/slide37.xml><?xml version="1.0" encoding="utf-8"?>
 <p:sld xmlns:a="http://schemas.openxmlformats.org/drawingml/2006/main" xmlns:r="http://schemas.openxmlformats.org/officeDocument/2006/relationships" xmlns:p="http://schemas.openxmlformats.org/presentationml/2006/main">
   <p:cSld>
     <p:spTree>
@@ -32333,7 +32610,7 @@
 </p:sld>
 </file>
 
-<file path=ppt/slides/slide36.xml><?xml version="1.0" encoding="utf-8"?>
+<file path=ppt/slides/slide38.xml><?xml version="1.0" encoding="utf-8"?>
 <p:sld xmlns:a="http://schemas.openxmlformats.org/drawingml/2006/main" xmlns:r="http://schemas.openxmlformats.org/officeDocument/2006/relationships" xmlns:p="http://schemas.openxmlformats.org/presentationml/2006/main">
   <p:cSld>
     <p:spTree>
@@ -32413,7 +32690,7 @@
 </p:sld>
 </file>
 
-<file path=ppt/slides/slide37.xml><?xml version="1.0" encoding="utf-8"?>
+<file path=ppt/slides/slide39.xml><?xml version="1.0" encoding="utf-8"?>
 <p:sld xmlns:a="http://schemas.openxmlformats.org/drawingml/2006/main" xmlns:r="http://schemas.openxmlformats.org/officeDocument/2006/relationships" xmlns:p="http://schemas.openxmlformats.org/presentationml/2006/main">
   <p:cSld>
     <p:spTree>
@@ -32817,7 +33094,365 @@
 </p:sld>
 </file>
 
-<file path=ppt/slides/slide38.xml><?xml version="1.0" encoding="utf-8"?>
+<file path=ppt/slides/slide4.xml><?xml version="1.0" encoding="utf-8"?>
+<p:sld xmlns:a="http://schemas.openxmlformats.org/drawingml/2006/main" xmlns:r="http://schemas.openxmlformats.org/officeDocument/2006/relationships" xmlns:p="http://schemas.openxmlformats.org/presentationml/2006/main">
+  <p:cSld>
+    <p:spTree>
+      <p:nvGrpSpPr>
+        <p:cNvPr id="1" name=""/>
+        <p:cNvGrpSpPr/>
+        <p:nvPr/>
+      </p:nvGrpSpPr>
+      <p:grpSpPr>
+        <a:xfrm>
+          <a:off x="0" y="0"/>
+          <a:ext cx="0" cy="0"/>
+          <a:chOff x="0" y="0"/>
+          <a:chExt cx="0" cy="0"/>
+        </a:xfrm>
+      </p:grpSpPr>
+      <p:sp>
+        <p:nvSpPr>
+          <p:cNvPr id="5122" name="Title 1">
+            <a:extLst>
+              <a:ext uri="{FF2B5EF4-FFF2-40B4-BE49-F238E27FC236}">
+                <a16:creationId xmlns:a16="http://schemas.microsoft.com/office/drawing/2014/main" id="{9EB3044F-1AB4-7642-C68C-2DCC62D2BBDF}"/>
+              </a:ext>
+            </a:extLst>
+          </p:cNvPr>
+          <p:cNvSpPr>
+            <a:spLocks noGrp="1"/>
+          </p:cNvSpPr>
+          <p:nvPr>
+            <p:ph type="title"/>
+          </p:nvPr>
+        </p:nvSpPr>
+        <p:spPr/>
+        <p:txBody>
+          <a:bodyPr/>
+          <a:lstStyle/>
+          <a:p>
+            <a:pPr>
+              <a:defRPr/>
+            </a:pPr>
+            <a:r>
+              <a:rPr lang="en-US" altLang="en-US" sz="3600"/>
+              <a:t>Two types of causes for exceptions</a:t>
+            </a:r>
+          </a:p>
+        </p:txBody>
+      </p:sp>
+      <p:sp>
+        <p:nvSpPr>
+          <p:cNvPr id="3" name="Content Placeholder 2">
+            <a:extLst>
+              <a:ext uri="{FF2B5EF4-FFF2-40B4-BE49-F238E27FC236}">
+                <a16:creationId xmlns:a16="http://schemas.microsoft.com/office/drawing/2014/main" id="{4A2A7393-DAB6-ACCC-868B-7B1361CDF725}"/>
+              </a:ext>
+            </a:extLst>
+          </p:cNvPr>
+          <p:cNvSpPr>
+            <a:spLocks noGrp="1"/>
+          </p:cNvSpPr>
+          <p:nvPr>
+            <p:ph idx="1"/>
+          </p:nvPr>
+        </p:nvSpPr>
+        <p:spPr/>
+        <p:txBody>
+          <a:bodyPr/>
+          <a:lstStyle/>
+          <a:p>
+            <a:pPr marL="914400" lvl="1" indent="-457200">
+              <a:buFont typeface="+mj-lt"/>
+              <a:buAutoNum type="arabicPeriod"/>
+              <a:defRPr/>
+            </a:pPr>
+            <a:r>
+              <a:rPr lang="en-US" sz="2400" dirty="0"/>
+              <a:t>Errors in the script that should be </a:t>
+            </a:r>
+            <a:r>
+              <a:rPr lang="en-US" sz="2400" dirty="0">
+                <a:solidFill>
+                  <a:srgbClr val="BFBF00"/>
+                </a:solidFill>
+              </a:rPr>
+              <a:t>corrected</a:t>
+            </a:r>
+            <a:r>
+              <a:rPr lang="en-US" sz="2400" dirty="0"/>
+              <a:t>.</a:t>
+            </a:r>
+            <a:r>
+              <a:rPr lang="en-US" sz="2400" dirty="0">
+                <a:solidFill>
+                  <a:srgbClr val="BFBF00"/>
+                </a:solidFill>
+              </a:rPr>
+              <a:t> </a:t>
+            </a:r>
+          </a:p>
+          <a:p>
+            <a:pPr marL="914400" lvl="1" indent="-457200">
+              <a:buFont typeface="+mj-lt"/>
+              <a:buAutoNum type="arabicPeriod"/>
+              <a:defRPr/>
+            </a:pPr>
+            <a:endParaRPr lang="en-US" sz="2000" dirty="0">
+              <a:latin typeface="Consolas" panose="020B0609020204030204" pitchFamily="49" charset="0"/>
+            </a:endParaRPr>
+          </a:p>
+          <a:p>
+            <a:pPr lvl="1">
+              <a:defRPr/>
+            </a:pPr>
+            <a:r>
+              <a:rPr lang="en-US" sz="2000" dirty="0" err="1">
+                <a:latin typeface="Consolas" panose="020B0609020204030204" pitchFamily="49" charset="0"/>
+              </a:rPr>
+              <a:t>arcpy.env.worspace</a:t>
+            </a:r>
+            <a:r>
+              <a:rPr lang="en-US" sz="2000" dirty="0">
+                <a:latin typeface="Consolas" panose="020B0609020204030204" pitchFamily="49" charset="0"/>
+              </a:rPr>
+              <a:t> = </a:t>
+            </a:r>
+            <a:r>
+              <a:rPr lang="en-US" sz="2000" kern="1200" dirty="0">
+                <a:solidFill>
+                  <a:srgbClr val="CE9178"/>
+                </a:solidFill>
+                <a:latin typeface="Consolas" panose="020B0609020204030204" pitchFamily="49" charset="0"/>
+                <a:ea typeface="+mn-ea"/>
+                <a:cs typeface="+mn-cs"/>
+              </a:rPr>
+              <a:t>"C:/Temp/rastTester.gdb"</a:t>
+            </a:r>
+          </a:p>
+          <a:p>
+            <a:pPr lvl="1">
+              <a:defRPr/>
+            </a:pPr>
+            <a:r>
+              <a:rPr lang="en-US" sz="1800" dirty="0">
+                <a:solidFill>
+                  <a:srgbClr val="FF0066"/>
+                </a:solidFill>
+                <a:latin typeface="Consolas" panose="020B0609020204030204" pitchFamily="49" charset="0"/>
+              </a:rPr>
+              <a:t>for </a:t>
+            </a:r>
+            <a:r>
+              <a:rPr lang="en-US" sz="1800" dirty="0" err="1">
+                <a:solidFill>
+                  <a:srgbClr val="FF0066"/>
+                </a:solidFill>
+                <a:latin typeface="Consolas" panose="020B0609020204030204" pitchFamily="49" charset="0"/>
+              </a:rPr>
+              <a:t>rasterImage</a:t>
+            </a:r>
+            <a:r>
+              <a:rPr lang="en-US" sz="1800" dirty="0">
+                <a:solidFill>
+                  <a:srgbClr val="FF0066"/>
+                </a:solidFill>
+                <a:latin typeface="Consolas" panose="020B0609020204030204" pitchFamily="49" charset="0"/>
+              </a:rPr>
+              <a:t> in </a:t>
+            </a:r>
+            <a:r>
+              <a:rPr lang="en-US" sz="1800" dirty="0" err="1">
+                <a:solidFill>
+                  <a:srgbClr val="FF0066"/>
+                </a:solidFill>
+                <a:latin typeface="Consolas" panose="020B0609020204030204" pitchFamily="49" charset="0"/>
+              </a:rPr>
+              <a:t>rasterList</a:t>
+            </a:r>
+            <a:r>
+              <a:rPr lang="en-US" sz="1800" dirty="0">
+                <a:solidFill>
+                  <a:srgbClr val="FF0066"/>
+                </a:solidFill>
+                <a:latin typeface="Consolas" panose="020B0609020204030204" pitchFamily="49" charset="0"/>
+              </a:rPr>
+              <a:t>:</a:t>
+            </a:r>
+            <a:br>
+              <a:rPr lang="en-US" sz="1800" dirty="0">
+                <a:solidFill>
+                  <a:srgbClr val="FF0066"/>
+                </a:solidFill>
+                <a:latin typeface="Consolas" panose="020B0609020204030204" pitchFamily="49" charset="0"/>
+              </a:rPr>
+            </a:br>
+            <a:r>
+              <a:rPr lang="en-US" sz="1800" dirty="0" err="1">
+                <a:solidFill>
+                  <a:srgbClr val="FF0066"/>
+                </a:solidFill>
+                <a:latin typeface="Consolas" panose="020B0609020204030204" pitchFamily="49" charset="0"/>
+              </a:rPr>
+              <a:t>TypeError</a:t>
+            </a:r>
+            <a:r>
+              <a:rPr lang="en-US" sz="1800" dirty="0">
+                <a:solidFill>
+                  <a:srgbClr val="FF0066"/>
+                </a:solidFill>
+                <a:latin typeface="Consolas" panose="020B0609020204030204" pitchFamily="49" charset="0"/>
+              </a:rPr>
+              <a:t>: '</a:t>
+            </a:r>
+            <a:r>
+              <a:rPr lang="en-US" sz="1800" dirty="0" err="1">
+                <a:solidFill>
+                  <a:srgbClr val="FF0066"/>
+                </a:solidFill>
+                <a:latin typeface="Consolas" panose="020B0609020204030204" pitchFamily="49" charset="0"/>
+              </a:rPr>
+              <a:t>NoneType</a:t>
+            </a:r>
+            <a:r>
+              <a:rPr lang="en-US" sz="1800" dirty="0">
+                <a:solidFill>
+                  <a:srgbClr val="FF0066"/>
+                </a:solidFill>
+                <a:latin typeface="Consolas" panose="020B0609020204030204" pitchFamily="49" charset="0"/>
+              </a:rPr>
+              <a:t>' object is not </a:t>
+            </a:r>
+            <a:r>
+              <a:rPr lang="en-US" sz="1800" dirty="0" err="1">
+                <a:solidFill>
+                  <a:srgbClr val="FF0066"/>
+                </a:solidFill>
+                <a:latin typeface="Consolas" panose="020B0609020204030204" pitchFamily="49" charset="0"/>
+              </a:rPr>
+              <a:t>iterable</a:t>
+            </a:r>
+            <a:endParaRPr lang="en-US" sz="1800" dirty="0">
+              <a:solidFill>
+                <a:srgbClr val="FF0066"/>
+              </a:solidFill>
+              <a:latin typeface="Consolas" panose="020B0609020204030204" pitchFamily="49" charset="0"/>
+            </a:endParaRPr>
+          </a:p>
+          <a:p>
+            <a:pPr lvl="1">
+              <a:defRPr/>
+            </a:pPr>
+            <a:endParaRPr lang="en-US" sz="2400" dirty="0"/>
+          </a:p>
+          <a:p>
+            <a:pPr marL="914400" lvl="1" indent="-457200">
+              <a:buFont typeface="+mj-lt"/>
+              <a:buAutoNum type="arabicPeriod" startAt="2"/>
+              <a:defRPr/>
+            </a:pPr>
+            <a:r>
+              <a:rPr lang="en-US" sz="2400" dirty="0"/>
+              <a:t>Errors due to conditions that should be </a:t>
+            </a:r>
+            <a:r>
+              <a:rPr lang="en-US" sz="2400" dirty="0">
+                <a:solidFill>
+                  <a:srgbClr val="BFBF00"/>
+                </a:solidFill>
+              </a:rPr>
+              <a:t>handled</a:t>
+            </a:r>
+            <a:r>
+              <a:rPr lang="en-US" sz="2400" dirty="0"/>
+              <a:t>.</a:t>
+            </a:r>
+          </a:p>
+          <a:p>
+            <a:pPr lvl="1">
+              <a:defRPr/>
+            </a:pPr>
+            <a:r>
+              <a:rPr lang="en-US" sz="2400" dirty="0"/>
+              <a:t>Often due to user input or external datasets (locked, missing, corrupt, etc.)</a:t>
+            </a:r>
+          </a:p>
+          <a:p>
+            <a:pPr marL="400050" lvl="1" indent="0">
+              <a:defRPr/>
+            </a:pPr>
+            <a:endParaRPr lang="en-US" sz="2000" dirty="0"/>
+          </a:p>
+          <a:p>
+            <a:pPr marL="400050" lvl="1" indent="0">
+              <a:defRPr/>
+            </a:pPr>
+            <a:r>
+              <a:rPr lang="en-US" sz="2000" dirty="0"/>
+              <a:t>Run multRasts.py with an argument  "0.001 meters"</a:t>
+            </a:r>
+          </a:p>
+          <a:p>
+            <a:pPr marL="400050" lvl="1" indent="0">
+              <a:defRPr/>
+            </a:pPr>
+            <a:r>
+              <a:rPr lang="en-US" sz="1800" dirty="0">
+                <a:solidFill>
+                  <a:srgbClr val="FF0066"/>
+                </a:solidFill>
+                <a:latin typeface="Consolas" panose="020B0609020204030204" pitchFamily="49" charset="0"/>
+              </a:rPr>
+              <a:t>factor = float(sys.argv[1])</a:t>
+            </a:r>
+            <a:br>
+              <a:rPr lang="en-US" sz="1800" dirty="0">
+                <a:solidFill>
+                  <a:srgbClr val="FF0066"/>
+                </a:solidFill>
+                <a:latin typeface="Consolas" panose="020B0609020204030204" pitchFamily="49" charset="0"/>
+              </a:rPr>
+            </a:br>
+            <a:r>
+              <a:rPr lang="en-US" sz="1800" dirty="0">
+                <a:solidFill>
+                  <a:srgbClr val="FF0066"/>
+                </a:solidFill>
+                <a:latin typeface="Consolas" panose="020B0609020204030204" pitchFamily="49" charset="0"/>
+              </a:rPr>
+              <a:t>  </a:t>
+            </a:r>
+            <a:r>
+              <a:rPr lang="en-US" sz="1800" dirty="0" err="1">
+                <a:solidFill>
+                  <a:srgbClr val="FF0066"/>
+                </a:solidFill>
+                <a:latin typeface="Consolas" panose="020B0609020204030204" pitchFamily="49" charset="0"/>
+              </a:rPr>
+              <a:t>ValueError</a:t>
+            </a:r>
+            <a:r>
+              <a:rPr lang="en-US" sz="1800" dirty="0">
+                <a:solidFill>
+                  <a:srgbClr val="FF0066"/>
+                </a:solidFill>
+                <a:latin typeface="Consolas" panose="020B0609020204030204" pitchFamily="49" charset="0"/>
+              </a:rPr>
+              <a:t>: invalid literal for float(): 0.001 meters</a:t>
+            </a:r>
+          </a:p>
+        </p:txBody>
+      </p:sp>
+    </p:spTree>
+  </p:cSld>
+  <p:clrMapOvr>
+    <a:masterClrMapping/>
+  </p:clrMapOvr>
+</p:sld>
+</file>
+
+<file path=ppt/slides/slide40.xml><?xml version="1.0" encoding="utf-8"?>
 <p:sld xmlns:a="http://schemas.openxmlformats.org/drawingml/2006/main" xmlns:r="http://schemas.openxmlformats.org/officeDocument/2006/relationships" xmlns:p="http://schemas.openxmlformats.org/presentationml/2006/main">
   <p:cSld>
     <p:spTree>
@@ -33443,7 +34078,7 @@
 </p:sld>
 </file>
 
-<file path=ppt/slides/slide39.xml><?xml version="1.0" encoding="utf-8"?>
+<file path=ppt/slides/slide41.xml><?xml version="1.0" encoding="utf-8"?>
 <p:sld xmlns:a="http://schemas.openxmlformats.org/drawingml/2006/main" xmlns:r="http://schemas.openxmlformats.org/officeDocument/2006/relationships" xmlns:p="http://schemas.openxmlformats.org/presentationml/2006/main">
   <p:cSld>
     <p:spTree>
@@ -33888,365 +34523,7 @@
 </p:sld>
 </file>
 
-<file path=ppt/slides/slide4.xml><?xml version="1.0" encoding="utf-8"?>
-<p:sld xmlns:a="http://schemas.openxmlformats.org/drawingml/2006/main" xmlns:r="http://schemas.openxmlformats.org/officeDocument/2006/relationships" xmlns:p="http://schemas.openxmlformats.org/presentationml/2006/main">
-  <p:cSld>
-    <p:spTree>
-      <p:nvGrpSpPr>
-        <p:cNvPr id="1" name=""/>
-        <p:cNvGrpSpPr/>
-        <p:nvPr/>
-      </p:nvGrpSpPr>
-      <p:grpSpPr>
-        <a:xfrm>
-          <a:off x="0" y="0"/>
-          <a:ext cx="0" cy="0"/>
-          <a:chOff x="0" y="0"/>
-          <a:chExt cx="0" cy="0"/>
-        </a:xfrm>
-      </p:grpSpPr>
-      <p:sp>
-        <p:nvSpPr>
-          <p:cNvPr id="5122" name="Title 1">
-            <a:extLst>
-              <a:ext uri="{FF2B5EF4-FFF2-40B4-BE49-F238E27FC236}">
-                <a16:creationId xmlns:a16="http://schemas.microsoft.com/office/drawing/2014/main" id="{9EB3044F-1AB4-7642-C68C-2DCC62D2BBDF}"/>
-              </a:ext>
-            </a:extLst>
-          </p:cNvPr>
-          <p:cNvSpPr>
-            <a:spLocks noGrp="1"/>
-          </p:cNvSpPr>
-          <p:nvPr>
-            <p:ph type="title"/>
-          </p:nvPr>
-        </p:nvSpPr>
-        <p:spPr/>
-        <p:txBody>
-          <a:bodyPr/>
-          <a:lstStyle/>
-          <a:p>
-            <a:pPr>
-              <a:defRPr/>
-            </a:pPr>
-            <a:r>
-              <a:rPr lang="en-US" altLang="en-US" sz="3600"/>
-              <a:t>Two types of causes for exceptions</a:t>
-            </a:r>
-          </a:p>
-        </p:txBody>
-      </p:sp>
-      <p:sp>
-        <p:nvSpPr>
-          <p:cNvPr id="3" name="Content Placeholder 2">
-            <a:extLst>
-              <a:ext uri="{FF2B5EF4-FFF2-40B4-BE49-F238E27FC236}">
-                <a16:creationId xmlns:a16="http://schemas.microsoft.com/office/drawing/2014/main" id="{4A2A7393-DAB6-ACCC-868B-7B1361CDF725}"/>
-              </a:ext>
-            </a:extLst>
-          </p:cNvPr>
-          <p:cNvSpPr>
-            <a:spLocks noGrp="1"/>
-          </p:cNvSpPr>
-          <p:nvPr>
-            <p:ph idx="1"/>
-          </p:nvPr>
-        </p:nvSpPr>
-        <p:spPr/>
-        <p:txBody>
-          <a:bodyPr/>
-          <a:lstStyle/>
-          <a:p>
-            <a:pPr marL="914400" lvl="1" indent="-457200">
-              <a:buFont typeface="+mj-lt"/>
-              <a:buAutoNum type="arabicPeriod"/>
-              <a:defRPr/>
-            </a:pPr>
-            <a:r>
-              <a:rPr lang="en-US" sz="2400" dirty="0"/>
-              <a:t>Errors in the script that should be </a:t>
-            </a:r>
-            <a:r>
-              <a:rPr lang="en-US" sz="2400" dirty="0">
-                <a:solidFill>
-                  <a:srgbClr val="BFBF00"/>
-                </a:solidFill>
-              </a:rPr>
-              <a:t>corrected</a:t>
-            </a:r>
-            <a:r>
-              <a:rPr lang="en-US" sz="2400" dirty="0"/>
-              <a:t>.</a:t>
-            </a:r>
-            <a:r>
-              <a:rPr lang="en-US" sz="2400" dirty="0">
-                <a:solidFill>
-                  <a:srgbClr val="BFBF00"/>
-                </a:solidFill>
-              </a:rPr>
-              <a:t> </a:t>
-            </a:r>
-          </a:p>
-          <a:p>
-            <a:pPr marL="914400" lvl="1" indent="-457200">
-              <a:buFont typeface="+mj-lt"/>
-              <a:buAutoNum type="arabicPeriod"/>
-              <a:defRPr/>
-            </a:pPr>
-            <a:endParaRPr lang="en-US" sz="2000" dirty="0">
-              <a:latin typeface="Consolas" panose="020B0609020204030204" pitchFamily="49" charset="0"/>
-            </a:endParaRPr>
-          </a:p>
-          <a:p>
-            <a:pPr lvl="1">
-              <a:defRPr/>
-            </a:pPr>
-            <a:r>
-              <a:rPr lang="en-US" sz="2000" dirty="0" err="1">
-                <a:latin typeface="Consolas" panose="020B0609020204030204" pitchFamily="49" charset="0"/>
-              </a:rPr>
-              <a:t>arcpy.env.worspace</a:t>
-            </a:r>
-            <a:r>
-              <a:rPr lang="en-US" sz="2000" dirty="0">
-                <a:latin typeface="Consolas" panose="020B0609020204030204" pitchFamily="49" charset="0"/>
-              </a:rPr>
-              <a:t> = </a:t>
-            </a:r>
-            <a:r>
-              <a:rPr lang="en-US" sz="2000" kern="1200" dirty="0">
-                <a:solidFill>
-                  <a:srgbClr val="CE9178"/>
-                </a:solidFill>
-                <a:latin typeface="Consolas" panose="020B0609020204030204" pitchFamily="49" charset="0"/>
-                <a:ea typeface="+mn-ea"/>
-                <a:cs typeface="+mn-cs"/>
-              </a:rPr>
-              <a:t>"C:/Temp/rastTester.gdb"</a:t>
-            </a:r>
-          </a:p>
-          <a:p>
-            <a:pPr lvl="1">
-              <a:defRPr/>
-            </a:pPr>
-            <a:r>
-              <a:rPr lang="en-US" sz="1800" dirty="0">
-                <a:solidFill>
-                  <a:srgbClr val="FF0066"/>
-                </a:solidFill>
-                <a:latin typeface="Consolas" panose="020B0609020204030204" pitchFamily="49" charset="0"/>
-              </a:rPr>
-              <a:t>for </a:t>
-            </a:r>
-            <a:r>
-              <a:rPr lang="en-US" sz="1800" dirty="0" err="1">
-                <a:solidFill>
-                  <a:srgbClr val="FF0066"/>
-                </a:solidFill>
-                <a:latin typeface="Consolas" panose="020B0609020204030204" pitchFamily="49" charset="0"/>
-              </a:rPr>
-              <a:t>rasterImage</a:t>
-            </a:r>
-            <a:r>
-              <a:rPr lang="en-US" sz="1800" dirty="0">
-                <a:solidFill>
-                  <a:srgbClr val="FF0066"/>
-                </a:solidFill>
-                <a:latin typeface="Consolas" panose="020B0609020204030204" pitchFamily="49" charset="0"/>
-              </a:rPr>
-              <a:t> in </a:t>
-            </a:r>
-            <a:r>
-              <a:rPr lang="en-US" sz="1800" dirty="0" err="1">
-                <a:solidFill>
-                  <a:srgbClr val="FF0066"/>
-                </a:solidFill>
-                <a:latin typeface="Consolas" panose="020B0609020204030204" pitchFamily="49" charset="0"/>
-              </a:rPr>
-              <a:t>rasterList</a:t>
-            </a:r>
-            <a:r>
-              <a:rPr lang="en-US" sz="1800" dirty="0">
-                <a:solidFill>
-                  <a:srgbClr val="FF0066"/>
-                </a:solidFill>
-                <a:latin typeface="Consolas" panose="020B0609020204030204" pitchFamily="49" charset="0"/>
-              </a:rPr>
-              <a:t>:</a:t>
-            </a:r>
-            <a:br>
-              <a:rPr lang="en-US" sz="1800" dirty="0">
-                <a:solidFill>
-                  <a:srgbClr val="FF0066"/>
-                </a:solidFill>
-                <a:latin typeface="Consolas" panose="020B0609020204030204" pitchFamily="49" charset="0"/>
-              </a:rPr>
-            </a:br>
-            <a:r>
-              <a:rPr lang="en-US" sz="1800" dirty="0" err="1">
-                <a:solidFill>
-                  <a:srgbClr val="FF0066"/>
-                </a:solidFill>
-                <a:latin typeface="Consolas" panose="020B0609020204030204" pitchFamily="49" charset="0"/>
-              </a:rPr>
-              <a:t>TypeError</a:t>
-            </a:r>
-            <a:r>
-              <a:rPr lang="en-US" sz="1800" dirty="0">
-                <a:solidFill>
-                  <a:srgbClr val="FF0066"/>
-                </a:solidFill>
-                <a:latin typeface="Consolas" panose="020B0609020204030204" pitchFamily="49" charset="0"/>
-              </a:rPr>
-              <a:t>: '</a:t>
-            </a:r>
-            <a:r>
-              <a:rPr lang="en-US" sz="1800" dirty="0" err="1">
-                <a:solidFill>
-                  <a:srgbClr val="FF0066"/>
-                </a:solidFill>
-                <a:latin typeface="Consolas" panose="020B0609020204030204" pitchFamily="49" charset="0"/>
-              </a:rPr>
-              <a:t>NoneType</a:t>
-            </a:r>
-            <a:r>
-              <a:rPr lang="en-US" sz="1800" dirty="0">
-                <a:solidFill>
-                  <a:srgbClr val="FF0066"/>
-                </a:solidFill>
-                <a:latin typeface="Consolas" panose="020B0609020204030204" pitchFamily="49" charset="0"/>
-              </a:rPr>
-              <a:t>' object is not </a:t>
-            </a:r>
-            <a:r>
-              <a:rPr lang="en-US" sz="1800" dirty="0" err="1">
-                <a:solidFill>
-                  <a:srgbClr val="FF0066"/>
-                </a:solidFill>
-                <a:latin typeface="Consolas" panose="020B0609020204030204" pitchFamily="49" charset="0"/>
-              </a:rPr>
-              <a:t>iterable</a:t>
-            </a:r>
-            <a:endParaRPr lang="en-US" sz="1800" dirty="0">
-              <a:solidFill>
-                <a:srgbClr val="FF0066"/>
-              </a:solidFill>
-              <a:latin typeface="Consolas" panose="020B0609020204030204" pitchFamily="49" charset="0"/>
-            </a:endParaRPr>
-          </a:p>
-          <a:p>
-            <a:pPr lvl="1">
-              <a:defRPr/>
-            </a:pPr>
-            <a:endParaRPr lang="en-US" sz="2400" dirty="0"/>
-          </a:p>
-          <a:p>
-            <a:pPr marL="914400" lvl="1" indent="-457200">
-              <a:buFont typeface="+mj-lt"/>
-              <a:buAutoNum type="arabicPeriod" startAt="2"/>
-              <a:defRPr/>
-            </a:pPr>
-            <a:r>
-              <a:rPr lang="en-US" sz="2400" dirty="0"/>
-              <a:t>Errors due to conditions that should be </a:t>
-            </a:r>
-            <a:r>
-              <a:rPr lang="en-US" sz="2400" dirty="0">
-                <a:solidFill>
-                  <a:srgbClr val="BFBF00"/>
-                </a:solidFill>
-              </a:rPr>
-              <a:t>handled</a:t>
-            </a:r>
-            <a:r>
-              <a:rPr lang="en-US" sz="2400" dirty="0"/>
-              <a:t>.</a:t>
-            </a:r>
-          </a:p>
-          <a:p>
-            <a:pPr lvl="1">
-              <a:defRPr/>
-            </a:pPr>
-            <a:r>
-              <a:rPr lang="en-US" sz="2400" dirty="0"/>
-              <a:t>Often due to user input or external datasets (locked, missing, corrupt, etc.)</a:t>
-            </a:r>
-          </a:p>
-          <a:p>
-            <a:pPr marL="400050" lvl="1" indent="0">
-              <a:defRPr/>
-            </a:pPr>
-            <a:endParaRPr lang="en-US" sz="2000" dirty="0"/>
-          </a:p>
-          <a:p>
-            <a:pPr marL="400050" lvl="1" indent="0">
-              <a:defRPr/>
-            </a:pPr>
-            <a:r>
-              <a:rPr lang="en-US" sz="2000" dirty="0"/>
-              <a:t>Run multRasts.py with an argument  "0.001 meters"</a:t>
-            </a:r>
-          </a:p>
-          <a:p>
-            <a:pPr marL="400050" lvl="1" indent="0">
-              <a:defRPr/>
-            </a:pPr>
-            <a:r>
-              <a:rPr lang="en-US" sz="1800" dirty="0">
-                <a:solidFill>
-                  <a:srgbClr val="FF0066"/>
-                </a:solidFill>
-                <a:latin typeface="Consolas" panose="020B0609020204030204" pitchFamily="49" charset="0"/>
-              </a:rPr>
-              <a:t>factor = float(sys.argv[1])</a:t>
-            </a:r>
-            <a:br>
-              <a:rPr lang="en-US" sz="1800" dirty="0">
-                <a:solidFill>
-                  <a:srgbClr val="FF0066"/>
-                </a:solidFill>
-                <a:latin typeface="Consolas" panose="020B0609020204030204" pitchFamily="49" charset="0"/>
-              </a:rPr>
-            </a:br>
-            <a:r>
-              <a:rPr lang="en-US" sz="1800" dirty="0">
-                <a:solidFill>
-                  <a:srgbClr val="FF0066"/>
-                </a:solidFill>
-                <a:latin typeface="Consolas" panose="020B0609020204030204" pitchFamily="49" charset="0"/>
-              </a:rPr>
-              <a:t>  </a:t>
-            </a:r>
-            <a:r>
-              <a:rPr lang="en-US" sz="1800" dirty="0" err="1">
-                <a:solidFill>
-                  <a:srgbClr val="FF0066"/>
-                </a:solidFill>
-                <a:latin typeface="Consolas" panose="020B0609020204030204" pitchFamily="49" charset="0"/>
-              </a:rPr>
-              <a:t>ValueError</a:t>
-            </a:r>
-            <a:r>
-              <a:rPr lang="en-US" sz="1800" dirty="0">
-                <a:solidFill>
-                  <a:srgbClr val="FF0066"/>
-                </a:solidFill>
-                <a:latin typeface="Consolas" panose="020B0609020204030204" pitchFamily="49" charset="0"/>
-              </a:rPr>
-              <a:t>: invalid literal for float(): 0.001 meters</a:t>
-            </a:r>
-          </a:p>
-        </p:txBody>
-      </p:sp>
-    </p:spTree>
-  </p:cSld>
-  <p:clrMapOvr>
-    <a:masterClrMapping/>
-  </p:clrMapOvr>
-</p:sld>
-</file>
-
-<file path=ppt/slides/slide40.xml><?xml version="1.0" encoding="utf-8"?>
+<file path=ppt/slides/slide42.xml><?xml version="1.0" encoding="utf-8"?>
 <p:sld xmlns:a="http://schemas.openxmlformats.org/drawingml/2006/main" xmlns:r="http://schemas.openxmlformats.org/officeDocument/2006/relationships" xmlns:p="http://schemas.openxmlformats.org/presentationml/2006/main">
   <p:cSld>
     <p:spTree>
@@ -35296,7 +35573,7 @@
 </p:sld>
 </file>
 
-<file path=ppt/slides/slide41.xml><?xml version="1.0" encoding="utf-8"?>
+<file path=ppt/slides/slide43.xml><?xml version="1.0" encoding="utf-8"?>
 <p:sld xmlns:a="http://schemas.openxmlformats.org/drawingml/2006/main" xmlns:r="http://schemas.openxmlformats.org/officeDocument/2006/relationships" xmlns:p="http://schemas.openxmlformats.org/presentationml/2006/main">
   <p:cSld>
     <p:spTree>
@@ -35429,7 +35706,7 @@
 </p:sld>
 </file>
 
-<file path=ppt/slides/slide42.xml><?xml version="1.0" encoding="utf-8"?>
+<file path=ppt/slides/slide44.xml><?xml version="1.0" encoding="utf-8"?>
 <p:sld xmlns:a="http://schemas.openxmlformats.org/drawingml/2006/main" xmlns:r="http://schemas.openxmlformats.org/officeDocument/2006/relationships" xmlns:p="http://schemas.openxmlformats.org/presentationml/2006/main">
   <p:cSld>
     <p:spTree>
@@ -35697,7 +35974,7 @@
 </p:sld>
 </file>
 
-<file path=ppt/slides/slide43.xml><?xml version="1.0" encoding="utf-8"?>
+<file path=ppt/slides/slide45.xml><?xml version="1.0" encoding="utf-8"?>
 <p:sld xmlns:a="http://schemas.openxmlformats.org/drawingml/2006/main" xmlns:r="http://schemas.openxmlformats.org/officeDocument/2006/relationships" xmlns:p="http://schemas.openxmlformats.org/presentationml/2006/main">
   <p:cSld>
     <p:spTree>
@@ -35777,7 +36054,7 @@
 </p:sld>
 </file>
 
-<file path=ppt/slides/slide44.xml><?xml version="1.0" encoding="utf-8"?>
+<file path=ppt/slides/slide46.xml><?xml version="1.0" encoding="utf-8"?>
 <p:sld xmlns:a="http://schemas.openxmlformats.org/drawingml/2006/main" xmlns:r="http://schemas.openxmlformats.org/officeDocument/2006/relationships" xmlns:p="http://schemas.openxmlformats.org/presentationml/2006/main">
   <p:cSld>
     <p:spTree>
@@ -35858,7 +36135,7 @@
 </p:sld>
 </file>
 
-<file path=ppt/slides/slide45.xml><?xml version="1.0" encoding="utf-8"?>
+<file path=ppt/slides/slide47.xml><?xml version="1.0" encoding="utf-8"?>
 <p:sld xmlns:a="http://schemas.openxmlformats.org/drawingml/2006/main" xmlns:r="http://schemas.openxmlformats.org/officeDocument/2006/relationships" xmlns:p="http://schemas.openxmlformats.org/presentationml/2006/main">
   <p:cSld>
     <p:spTree>
@@ -36228,7 +36505,7 @@
 </p:sld>
 </file>
 
-<file path=ppt/slides/slide46.xml><?xml version="1.0" encoding="utf-8"?>
+<file path=ppt/slides/slide48.xml><?xml version="1.0" encoding="utf-8"?>
 <p:sld xmlns:a="http://schemas.openxmlformats.org/drawingml/2006/main" xmlns:r="http://schemas.openxmlformats.org/officeDocument/2006/relationships" xmlns:p="http://schemas.openxmlformats.org/presentationml/2006/main">
   <p:cSld>
     <p:spTree>
@@ -37258,7 +37535,7 @@
 </p:sld>
 </file>
 
-<file path=ppt/slides/slide47.xml><?xml version="1.0" encoding="utf-8"?>
+<file path=ppt/slides/slide49.xml><?xml version="1.0" encoding="utf-8"?>
 <p:sld xmlns:a="http://schemas.openxmlformats.org/drawingml/2006/main" xmlns:r="http://schemas.openxmlformats.org/officeDocument/2006/relationships" xmlns:p="http://schemas.openxmlformats.org/presentationml/2006/main">
   <p:cSld>
     <p:spTree>
@@ -38614,7 +38891,703 @@
 </p:sld>
 </file>
 
-<file path=ppt/slides/slide48.xml><?xml version="1.0" encoding="utf-8"?>
+<file path=ppt/slides/slide5.xml><?xml version="1.0" encoding="utf-8"?>
+<p:sld xmlns:a="http://schemas.openxmlformats.org/drawingml/2006/main" xmlns:r="http://schemas.openxmlformats.org/officeDocument/2006/relationships" xmlns:p="http://schemas.openxmlformats.org/presentationml/2006/main">
+  <p:cSld>
+    <p:spTree>
+      <p:nvGrpSpPr>
+        <p:cNvPr id="1" name=""/>
+        <p:cNvGrpSpPr/>
+        <p:nvPr/>
+      </p:nvGrpSpPr>
+      <p:grpSpPr>
+        <a:xfrm>
+          <a:off x="0" y="0"/>
+          <a:ext cx="0" cy="0"/>
+          <a:chOff x="0" y="0"/>
+          <a:chExt cx="0" cy="0"/>
+        </a:xfrm>
+      </p:grpSpPr>
+      <p:sp>
+        <p:nvSpPr>
+          <p:cNvPr id="6146" name="Title 1">
+            <a:extLst>
+              <a:ext uri="{FF2B5EF4-FFF2-40B4-BE49-F238E27FC236}">
+                <a16:creationId xmlns:a16="http://schemas.microsoft.com/office/drawing/2014/main" id="{E73BA51B-CAD1-0F8D-2287-53BCD0A5D359}"/>
+              </a:ext>
+            </a:extLst>
+          </p:cNvPr>
+          <p:cNvSpPr>
+            <a:spLocks noGrp="1"/>
+          </p:cNvSpPr>
+          <p:nvPr>
+            <p:ph type="title"/>
+          </p:nvPr>
+        </p:nvSpPr>
+        <p:spPr/>
+        <p:txBody>
+          <a:bodyPr/>
+          <a:lstStyle/>
+          <a:p>
+            <a:pPr>
+              <a:defRPr/>
+            </a:pPr>
+            <a:r>
+              <a:rPr lang="en-US" altLang="en-US" dirty="0"/>
+              <a:t>‘Handling’ exceptions</a:t>
+            </a:r>
+          </a:p>
+        </p:txBody>
+      </p:sp>
+      <p:sp>
+        <p:nvSpPr>
+          <p:cNvPr id="3" name="Content Placeholder 2">
+            <a:extLst>
+              <a:ext uri="{FF2B5EF4-FFF2-40B4-BE49-F238E27FC236}">
+                <a16:creationId xmlns:a16="http://schemas.microsoft.com/office/drawing/2014/main" id="{4C782D61-3162-B937-976D-D9C3DEBBC1FA}"/>
+              </a:ext>
+            </a:extLst>
+          </p:cNvPr>
+          <p:cNvSpPr>
+            <a:spLocks noGrp="1"/>
+          </p:cNvSpPr>
+          <p:nvPr>
+            <p:ph idx="1"/>
+          </p:nvPr>
+        </p:nvSpPr>
+        <p:spPr>
+          <a:xfrm>
+            <a:off x="152400" y="1752600"/>
+            <a:ext cx="8686800" cy="4572000"/>
+          </a:xfrm>
+        </p:spPr>
+        <p:txBody>
+          <a:bodyPr/>
+          <a:lstStyle/>
+          <a:p>
+            <a:pPr marL="0" indent="0">
+              <a:buFontTx/>
+              <a:buNone/>
+              <a:defRPr/>
+            </a:pPr>
+            <a:endParaRPr lang="en-US" sz="2000" dirty="0"/>
+          </a:p>
+          <a:p>
+            <a:pPr marL="0" indent="0">
+              <a:buFontTx/>
+              <a:buNone/>
+              <a:defRPr/>
+            </a:pPr>
+            <a:endParaRPr lang="en-US" sz="1600" dirty="0"/>
+          </a:p>
+          <a:p>
+            <a:pPr>
+              <a:defRPr/>
+            </a:pPr>
+            <a:endParaRPr lang="en-US" sz="2400" dirty="0"/>
+          </a:p>
+          <a:p>
+            <a:pPr>
+              <a:defRPr/>
+            </a:pPr>
+            <a:endParaRPr lang="en-US" sz="2400" dirty="0"/>
+          </a:p>
+          <a:p>
+            <a:pPr>
+              <a:defRPr/>
+            </a:pPr>
+            <a:endParaRPr lang="en-US" sz="2400" dirty="0"/>
+          </a:p>
+          <a:p>
+            <a:pPr>
+              <a:defRPr/>
+            </a:pPr>
+            <a:r>
+              <a:rPr lang="en-US" sz="1800" dirty="0"/>
+              <a:t>How it works:</a:t>
+            </a:r>
+          </a:p>
+          <a:p>
+            <a:pPr lvl="1">
+              <a:defRPr/>
+            </a:pPr>
+            <a:r>
+              <a:rPr lang="en-US" sz="1400" dirty="0"/>
+              <a:t>If an exception occurs in the try block, the </a:t>
+            </a:r>
+            <a:r>
+              <a:rPr lang="en-US" sz="1400" i="1" dirty="0"/>
+              <a:t>rest of the </a:t>
+            </a:r>
+            <a:r>
+              <a:rPr lang="en-US" sz="1400" b="1" i="1" dirty="0">
+                <a:solidFill>
+                  <a:srgbClr val="6588A5"/>
+                </a:solidFill>
+              </a:rPr>
+              <a:t>try</a:t>
+            </a:r>
+            <a:r>
+              <a:rPr lang="en-US" sz="1400" i="1" dirty="0"/>
+              <a:t> block is skipped</a:t>
+            </a:r>
+            <a:r>
+              <a:rPr lang="en-US" sz="1400" dirty="0"/>
+              <a:t> and execution jumps to the except block. E.g., input is "5 meters":</a:t>
+            </a:r>
+            <a:br>
+              <a:rPr lang="en-US" sz="1400" dirty="0"/>
+            </a:br>
+            <a:br>
+              <a:rPr lang="en-US" sz="1400" dirty="0"/>
+            </a:br>
+            <a:r>
+              <a:rPr lang="en-US" sz="1400" dirty="0"/>
+              <a:t>&gt;&gt;&gt; </a:t>
+            </a:r>
+            <a:r>
+              <a:rPr lang="en-US" sz="1400" dirty="0">
+                <a:solidFill>
+                  <a:srgbClr val="FFCCCC"/>
+                </a:solidFill>
+              </a:rPr>
+              <a:t>An error occurred.</a:t>
+            </a:r>
+            <a:br>
+              <a:rPr lang="en-US" sz="1400" dirty="0">
+                <a:solidFill>
+                  <a:srgbClr val="FFCCCC"/>
+                </a:solidFill>
+              </a:rPr>
+            </a:br>
+            <a:r>
+              <a:rPr lang="en-US" sz="1400" dirty="0">
+                <a:solidFill>
+                  <a:srgbClr val="FFCCCC"/>
+                </a:solidFill>
+              </a:rPr>
+              <a:t>Please enter a numerical argument.</a:t>
+            </a:r>
+            <a:br>
+              <a:rPr lang="en-US" sz="1400" dirty="0">
+                <a:solidFill>
+                  <a:srgbClr val="FFCCCC"/>
+                </a:solidFill>
+              </a:rPr>
+            </a:br>
+            <a:r>
+              <a:rPr lang="en-US" sz="1400" dirty="0">
+                <a:solidFill>
+                  <a:srgbClr val="FFCCCC"/>
+                </a:solidFill>
+              </a:rPr>
+              <a:t>Thank you for running me!</a:t>
+            </a:r>
+          </a:p>
+          <a:p>
+            <a:pPr lvl="1">
+              <a:defRPr/>
+            </a:pPr>
+            <a:endParaRPr lang="en-US" sz="1400" dirty="0"/>
+          </a:p>
+          <a:p>
+            <a:pPr lvl="1">
+              <a:defRPr/>
+            </a:pPr>
+            <a:r>
+              <a:rPr lang="en-US" sz="1400" dirty="0"/>
+              <a:t>If no exceptions occur, </a:t>
+            </a:r>
+            <a:r>
+              <a:rPr lang="en-US" sz="1400" i="1" dirty="0"/>
+              <a:t>the </a:t>
+            </a:r>
+            <a:r>
+              <a:rPr lang="en-US" sz="1400" b="1" i="1" dirty="0">
+                <a:solidFill>
+                  <a:srgbClr val="6588A5"/>
+                </a:solidFill>
+              </a:rPr>
+              <a:t>except</a:t>
+            </a:r>
+            <a:r>
+              <a:rPr lang="en-US" sz="1400" i="1" dirty="0"/>
+              <a:t> block is skipped entirely</a:t>
+            </a:r>
+            <a:r>
+              <a:rPr lang="en-US" sz="1400" dirty="0"/>
+              <a:t>. E.g., the input is 5, the script prints the following:</a:t>
+            </a:r>
+            <a:br>
+              <a:rPr lang="en-US" sz="1400" dirty="0"/>
+            </a:br>
+            <a:br>
+              <a:rPr lang="en-US" sz="1400" dirty="0"/>
+            </a:br>
+            <a:r>
+              <a:rPr lang="en-US" sz="1400" dirty="0"/>
+              <a:t>&gt;&gt;&gt; </a:t>
+            </a:r>
+            <a:r>
+              <a:rPr lang="en-US" sz="1400" dirty="0">
+                <a:solidFill>
+                  <a:srgbClr val="FFCCCC"/>
+                </a:solidFill>
+              </a:rPr>
+              <a:t>The doubled number is 10.0</a:t>
+            </a:r>
+            <a:br>
+              <a:rPr lang="en-US" sz="1400" dirty="0">
+                <a:solidFill>
+                  <a:srgbClr val="FFCCCC"/>
+                </a:solidFill>
+              </a:rPr>
+            </a:br>
+            <a:r>
+              <a:rPr lang="en-US" sz="1400" dirty="0">
+                <a:solidFill>
+                  <a:srgbClr val="FFCCCC"/>
+                </a:solidFill>
+              </a:rPr>
+              <a:t>Thank you for running me!</a:t>
+            </a:r>
+          </a:p>
+          <a:p>
+            <a:pPr lvl="1">
+              <a:defRPr/>
+            </a:pPr>
+            <a:endParaRPr lang="en-US" sz="1800" dirty="0"/>
+          </a:p>
+        </p:txBody>
+      </p:sp>
+      <p:sp>
+        <p:nvSpPr>
+          <p:cNvPr id="4" name="TextBox 3">
+            <a:extLst>
+              <a:ext uri="{FF2B5EF4-FFF2-40B4-BE49-F238E27FC236}">
+                <a16:creationId xmlns:a16="http://schemas.microsoft.com/office/drawing/2014/main" id="{4F56BEDF-E9AB-1D29-48E0-D58563DD47E0}"/>
+              </a:ext>
+            </a:extLst>
+          </p:cNvPr>
+          <p:cNvSpPr txBox="1"/>
+          <p:nvPr/>
+        </p:nvSpPr>
+        <p:spPr>
+          <a:xfrm>
+            <a:off x="1638300" y="914400"/>
+            <a:ext cx="5867400" cy="2677656"/>
+          </a:xfrm>
+          <a:prstGeom prst="rect">
+            <a:avLst/>
+          </a:prstGeom>
+          <a:noFill/>
+        </p:spPr>
+        <p:txBody>
+          <a:bodyPr wrap="square">
+            <a:spAutoFit/>
+          </a:bodyPr>
+          <a:lstStyle/>
+          <a:p>
+            <a:r>
+              <a:rPr lang="en-US" sz="1400" b="0" dirty="0">
+                <a:solidFill>
+                  <a:srgbClr val="6A9955"/>
+                </a:solidFill>
+                <a:effectLst/>
+                <a:latin typeface="Consolas" panose="020B0609020204030204" pitchFamily="49" charset="0"/>
+              </a:rPr>
+              <a:t># doubleMyNumber.py</a:t>
+            </a:r>
+            <a:endParaRPr lang="en-US" sz="1400" b="0" dirty="0">
+              <a:solidFill>
+                <a:srgbClr val="D4D4D4"/>
+              </a:solidFill>
+              <a:effectLst/>
+              <a:latin typeface="Consolas" panose="020B0609020204030204" pitchFamily="49" charset="0"/>
+            </a:endParaRPr>
+          </a:p>
+          <a:p>
+            <a:r>
+              <a:rPr lang="en-US" sz="1400" b="0" dirty="0">
+                <a:solidFill>
+                  <a:srgbClr val="569CD6"/>
+                </a:solidFill>
+                <a:effectLst/>
+                <a:latin typeface="Consolas" panose="020B0609020204030204" pitchFamily="49" charset="0"/>
+              </a:rPr>
+              <a:t>import</a:t>
+            </a:r>
+            <a:r>
+              <a:rPr lang="en-US" sz="1400" b="0" dirty="0">
+                <a:solidFill>
+                  <a:srgbClr val="D4D4D4"/>
+                </a:solidFill>
+                <a:effectLst/>
+                <a:latin typeface="Consolas" panose="020B0609020204030204" pitchFamily="49" charset="0"/>
+              </a:rPr>
+              <a:t> sys</a:t>
+            </a:r>
+          </a:p>
+          <a:p>
+            <a:br>
+              <a:rPr lang="en-US" sz="1400" b="0" dirty="0">
+                <a:solidFill>
+                  <a:srgbClr val="D4D4D4"/>
+                </a:solidFill>
+                <a:effectLst/>
+                <a:latin typeface="Consolas" panose="020B0609020204030204" pitchFamily="49" charset="0"/>
+              </a:rPr>
+            </a:br>
+            <a:r>
+              <a:rPr lang="en-US" sz="1400" b="0" dirty="0">
+                <a:solidFill>
+                  <a:srgbClr val="569CD6"/>
+                </a:solidFill>
+                <a:effectLst/>
+                <a:latin typeface="Consolas" panose="020B0609020204030204" pitchFamily="49" charset="0"/>
+              </a:rPr>
+              <a:t>try</a:t>
+            </a:r>
+            <a:r>
+              <a:rPr lang="en-US" sz="1400" b="0" dirty="0">
+                <a:solidFill>
+                  <a:srgbClr val="D4D4D4"/>
+                </a:solidFill>
+                <a:effectLst/>
+                <a:latin typeface="Consolas" panose="020B0609020204030204" pitchFamily="49" charset="0"/>
+              </a:rPr>
+              <a:t>:</a:t>
+            </a:r>
+          </a:p>
+          <a:p>
+            <a:r>
+              <a:rPr lang="en-US" sz="1400" b="0" dirty="0">
+                <a:solidFill>
+                  <a:srgbClr val="D4D4D4"/>
+                </a:solidFill>
+                <a:effectLst/>
+                <a:latin typeface="Consolas" panose="020B0609020204030204" pitchFamily="49" charset="0"/>
+              </a:rPr>
+              <a:t>    number = float(</a:t>
+            </a:r>
+            <a:r>
+              <a:rPr lang="en-US" sz="1400" b="0" dirty="0" err="1">
+                <a:solidFill>
+                  <a:srgbClr val="D4D4D4"/>
+                </a:solidFill>
+                <a:effectLst/>
+                <a:latin typeface="Consolas" panose="020B0609020204030204" pitchFamily="49" charset="0"/>
+              </a:rPr>
+              <a:t>sys.argv</a:t>
+            </a:r>
+            <a:r>
+              <a:rPr lang="en-US" sz="1400" b="0" dirty="0">
+                <a:solidFill>
+                  <a:srgbClr val="D4D4D4"/>
+                </a:solidFill>
+                <a:effectLst/>
+                <a:latin typeface="Consolas" panose="020B0609020204030204" pitchFamily="49" charset="0"/>
+              </a:rPr>
+              <a:t>[</a:t>
+            </a:r>
+            <a:r>
+              <a:rPr lang="en-US" sz="1400" b="0" dirty="0">
+                <a:solidFill>
+                  <a:srgbClr val="B5CEA8"/>
+                </a:solidFill>
+                <a:effectLst/>
+                <a:latin typeface="Consolas" panose="020B0609020204030204" pitchFamily="49" charset="0"/>
+              </a:rPr>
+              <a:t>1</a:t>
+            </a:r>
+            <a:r>
+              <a:rPr lang="en-US" sz="1400" b="0" dirty="0">
+                <a:solidFill>
+                  <a:srgbClr val="D4D4D4"/>
+                </a:solidFill>
+                <a:effectLst/>
+                <a:latin typeface="Consolas" panose="020B0609020204030204" pitchFamily="49" charset="0"/>
+              </a:rPr>
+              <a:t>])</a:t>
+            </a:r>
+          </a:p>
+          <a:p>
+            <a:r>
+              <a:rPr lang="en-US" sz="1400" b="0" dirty="0">
+                <a:solidFill>
+                  <a:srgbClr val="D4D4D4"/>
+                </a:solidFill>
+                <a:effectLst/>
+                <a:latin typeface="Consolas" panose="020B0609020204030204" pitchFamily="49" charset="0"/>
+              </a:rPr>
+              <a:t>    product = </a:t>
+            </a:r>
+            <a:r>
+              <a:rPr lang="en-US" sz="1400" b="0" dirty="0">
+                <a:solidFill>
+                  <a:srgbClr val="B5CEA8"/>
+                </a:solidFill>
+                <a:effectLst/>
+                <a:latin typeface="Consolas" panose="020B0609020204030204" pitchFamily="49" charset="0"/>
+              </a:rPr>
+              <a:t>2</a:t>
+            </a:r>
+            <a:r>
+              <a:rPr lang="en-US" sz="1400" b="0" dirty="0">
+                <a:solidFill>
+                  <a:srgbClr val="D4D4D4"/>
+                </a:solidFill>
+                <a:effectLst/>
+                <a:latin typeface="Consolas" panose="020B0609020204030204" pitchFamily="49" charset="0"/>
+              </a:rPr>
+              <a:t>*number</a:t>
+            </a:r>
+          </a:p>
+          <a:p>
+            <a:r>
+              <a:rPr lang="en-US" sz="1400" b="0" dirty="0">
+                <a:solidFill>
+                  <a:srgbClr val="D4D4D4"/>
+                </a:solidFill>
+                <a:effectLst/>
+                <a:latin typeface="Consolas" panose="020B0609020204030204" pitchFamily="49" charset="0"/>
+              </a:rPr>
+              <a:t>    print(</a:t>
+            </a:r>
+            <a:r>
+              <a:rPr lang="en-US" sz="1400" b="0" dirty="0" err="1">
+                <a:solidFill>
+                  <a:srgbClr val="569CD6"/>
+                </a:solidFill>
+                <a:effectLst/>
+                <a:latin typeface="Consolas" panose="020B0609020204030204" pitchFamily="49" charset="0"/>
+              </a:rPr>
+              <a:t>f</a:t>
+            </a:r>
+            <a:r>
+              <a:rPr lang="en-US" sz="1400" b="0" dirty="0" err="1">
+                <a:solidFill>
+                  <a:srgbClr val="CE9178"/>
+                </a:solidFill>
+                <a:effectLst/>
+                <a:latin typeface="Consolas" panose="020B0609020204030204" pitchFamily="49" charset="0"/>
+              </a:rPr>
+              <a:t>"The</a:t>
+            </a:r>
+            <a:r>
+              <a:rPr lang="en-US" sz="1400" b="0" dirty="0">
+                <a:solidFill>
+                  <a:srgbClr val="CE9178"/>
+                </a:solidFill>
+                <a:effectLst/>
+                <a:latin typeface="Consolas" panose="020B0609020204030204" pitchFamily="49" charset="0"/>
+              </a:rPr>
+              <a:t> doubled number is </a:t>
+            </a:r>
+            <a:r>
+              <a:rPr lang="en-US" sz="1400" b="0" dirty="0">
+                <a:solidFill>
+                  <a:srgbClr val="D4D4D4"/>
+                </a:solidFill>
+                <a:effectLst/>
+                <a:latin typeface="Consolas" panose="020B0609020204030204" pitchFamily="49" charset="0"/>
+              </a:rPr>
+              <a:t>{product}</a:t>
+            </a:r>
+            <a:r>
+              <a:rPr lang="en-US" sz="1400" b="0" dirty="0">
+                <a:solidFill>
+                  <a:srgbClr val="CE9178"/>
+                </a:solidFill>
+                <a:effectLst/>
+                <a:latin typeface="Consolas" panose="020B0609020204030204" pitchFamily="49" charset="0"/>
+              </a:rPr>
+              <a:t>"</a:t>
+            </a:r>
+            <a:r>
+              <a:rPr lang="en-US" sz="1400" b="0" dirty="0">
+                <a:solidFill>
+                  <a:srgbClr val="D4D4D4"/>
+                </a:solidFill>
+                <a:effectLst/>
+                <a:latin typeface="Consolas" panose="020B0609020204030204" pitchFamily="49" charset="0"/>
+              </a:rPr>
+              <a:t>)</a:t>
+            </a:r>
+          </a:p>
+          <a:p>
+            <a:r>
+              <a:rPr lang="en-US" sz="1400" b="0" dirty="0">
+                <a:solidFill>
+                  <a:srgbClr val="569CD6"/>
+                </a:solidFill>
+                <a:effectLst/>
+                <a:latin typeface="Consolas" panose="020B0609020204030204" pitchFamily="49" charset="0"/>
+              </a:rPr>
+              <a:t>except</a:t>
+            </a:r>
+            <a:r>
+              <a:rPr lang="en-US" sz="1400" b="0" dirty="0">
+                <a:solidFill>
+                  <a:srgbClr val="D4D4D4"/>
+                </a:solidFill>
+                <a:effectLst/>
+                <a:latin typeface="Consolas" panose="020B0609020204030204" pitchFamily="49" charset="0"/>
+              </a:rPr>
+              <a:t> </a:t>
+            </a:r>
+            <a:r>
+              <a:rPr lang="en-US" sz="1400" b="0" dirty="0" err="1">
+                <a:solidFill>
+                  <a:srgbClr val="D4D4D4"/>
+                </a:solidFill>
+                <a:effectLst/>
+                <a:latin typeface="Consolas" panose="020B0609020204030204" pitchFamily="49" charset="0"/>
+              </a:rPr>
+              <a:t>Value</a:t>
+            </a:r>
+            <a:r>
+              <a:rPr lang="en-US" sz="1400" dirty="0" err="1">
+                <a:solidFill>
+                  <a:srgbClr val="D4D4D4"/>
+                </a:solidFill>
+                <a:latin typeface="Consolas" panose="020B0609020204030204" pitchFamily="49" charset="0"/>
+              </a:rPr>
+              <a:t>Error</a:t>
+            </a:r>
+            <a:r>
+              <a:rPr lang="en-US" sz="1400" dirty="0">
+                <a:solidFill>
+                  <a:srgbClr val="D4D4D4"/>
+                </a:solidFill>
+                <a:latin typeface="Consolas" panose="020B0609020204030204" pitchFamily="49" charset="0"/>
+              </a:rPr>
+              <a:t>:</a:t>
+            </a:r>
+            <a:endParaRPr lang="en-US" sz="1400" b="0" dirty="0">
+              <a:solidFill>
+                <a:srgbClr val="D4D4D4"/>
+              </a:solidFill>
+              <a:effectLst/>
+              <a:latin typeface="Consolas" panose="020B0609020204030204" pitchFamily="49" charset="0"/>
+            </a:endParaRPr>
+          </a:p>
+          <a:p>
+            <a:r>
+              <a:rPr lang="en-US" sz="1400" b="0" dirty="0">
+                <a:solidFill>
+                  <a:srgbClr val="D4D4D4"/>
+                </a:solidFill>
+                <a:effectLst/>
+                <a:latin typeface="Consolas" panose="020B0609020204030204" pitchFamily="49" charset="0"/>
+              </a:rPr>
+              <a:t>    print(</a:t>
+            </a:r>
+            <a:r>
+              <a:rPr lang="en-US" sz="1400" b="0" dirty="0">
+                <a:solidFill>
+                  <a:srgbClr val="CE9178"/>
+                </a:solidFill>
+                <a:effectLst/>
+                <a:latin typeface="Consolas" panose="020B0609020204030204" pitchFamily="49" charset="0"/>
+              </a:rPr>
+              <a:t>"An error occurred."</a:t>
+            </a:r>
+            <a:r>
+              <a:rPr lang="en-US" sz="1400" b="0" dirty="0">
+                <a:solidFill>
+                  <a:srgbClr val="D4D4D4"/>
+                </a:solidFill>
+                <a:effectLst/>
+                <a:latin typeface="Consolas" panose="020B0609020204030204" pitchFamily="49" charset="0"/>
+              </a:rPr>
+              <a:t>)</a:t>
+            </a:r>
+          </a:p>
+          <a:p>
+            <a:r>
+              <a:rPr lang="en-US" sz="1400" b="0" dirty="0">
+                <a:solidFill>
+                  <a:srgbClr val="D4D4D4"/>
+                </a:solidFill>
+                <a:effectLst/>
+                <a:latin typeface="Consolas" panose="020B0609020204030204" pitchFamily="49" charset="0"/>
+              </a:rPr>
+              <a:t>    print(</a:t>
+            </a:r>
+            <a:r>
+              <a:rPr lang="en-US" sz="1400" b="0" dirty="0">
+                <a:solidFill>
+                  <a:srgbClr val="CE9178"/>
+                </a:solidFill>
+                <a:effectLst/>
+                <a:latin typeface="Consolas" panose="020B0609020204030204" pitchFamily="49" charset="0"/>
+              </a:rPr>
+              <a:t>"Please enter a numerical argument."</a:t>
+            </a:r>
+            <a:r>
+              <a:rPr lang="en-US" sz="1400" b="0" dirty="0">
+                <a:solidFill>
+                  <a:srgbClr val="D4D4D4"/>
+                </a:solidFill>
+                <a:effectLst/>
+                <a:latin typeface="Consolas" panose="020B0609020204030204" pitchFamily="49" charset="0"/>
+              </a:rPr>
+              <a:t>)</a:t>
+            </a:r>
+          </a:p>
+          <a:p>
+            <a:br>
+              <a:rPr lang="en-US" sz="1400" b="0" dirty="0">
+                <a:solidFill>
+                  <a:srgbClr val="D4D4D4"/>
+                </a:solidFill>
+                <a:effectLst/>
+                <a:latin typeface="Consolas" panose="020B0609020204030204" pitchFamily="49" charset="0"/>
+              </a:rPr>
+            </a:br>
+            <a:r>
+              <a:rPr lang="en-US" sz="1400" b="0" dirty="0">
+                <a:solidFill>
+                  <a:srgbClr val="D4D4D4"/>
+                </a:solidFill>
+                <a:effectLst/>
+                <a:latin typeface="Consolas" panose="020B0609020204030204" pitchFamily="49" charset="0"/>
+              </a:rPr>
+              <a:t>print(</a:t>
+            </a:r>
+            <a:r>
+              <a:rPr lang="en-US" sz="1400" b="0" dirty="0">
+                <a:solidFill>
+                  <a:srgbClr val="CE9178"/>
+                </a:solidFill>
+                <a:effectLst/>
+                <a:latin typeface="Consolas" panose="020B0609020204030204" pitchFamily="49" charset="0"/>
+              </a:rPr>
+              <a:t>"Thank you for running me!"</a:t>
+            </a:r>
+            <a:r>
+              <a:rPr lang="en-US" sz="1400" b="0" dirty="0">
+                <a:solidFill>
+                  <a:srgbClr val="D4D4D4"/>
+                </a:solidFill>
+                <a:effectLst/>
+                <a:latin typeface="Consolas" panose="020B0609020204030204" pitchFamily="49" charset="0"/>
+              </a:rPr>
+              <a:t>)</a:t>
+            </a:r>
+          </a:p>
+        </p:txBody>
+      </p:sp>
+    </p:spTree>
+  </p:cSld>
+  <p:clrMapOvr>
+    <a:masterClrMapping/>
+  </p:clrMapOvr>
+</p:sld>
+</file>
+
+<file path=ppt/slides/slide50.xml><?xml version="1.0" encoding="utf-8"?>
 <p:sld xmlns:a="http://schemas.openxmlformats.org/drawingml/2006/main" xmlns:r="http://schemas.openxmlformats.org/officeDocument/2006/relationships" xmlns:p="http://schemas.openxmlformats.org/presentationml/2006/main">
   <p:cSld>
     <p:spTree>
@@ -39525,7 +40498,7 @@
 </p:sld>
 </file>
 
-<file path=ppt/slides/slide49.xml><?xml version="1.0" encoding="utf-8"?>
+<file path=ppt/slides/slide51.xml><?xml version="1.0" encoding="utf-8"?>
 <p:sld xmlns:a="http://schemas.openxmlformats.org/drawingml/2006/main" xmlns:r="http://schemas.openxmlformats.org/officeDocument/2006/relationships" xmlns:p="http://schemas.openxmlformats.org/presentationml/2006/main">
   <p:cSld>
     <p:spTree>
@@ -39736,703 +40709,7 @@
 </p:sld>
 </file>
 
-<file path=ppt/slides/slide5.xml><?xml version="1.0" encoding="utf-8"?>
-<p:sld xmlns:a="http://schemas.openxmlformats.org/drawingml/2006/main" xmlns:r="http://schemas.openxmlformats.org/officeDocument/2006/relationships" xmlns:p="http://schemas.openxmlformats.org/presentationml/2006/main">
-  <p:cSld>
-    <p:spTree>
-      <p:nvGrpSpPr>
-        <p:cNvPr id="1" name=""/>
-        <p:cNvGrpSpPr/>
-        <p:nvPr/>
-      </p:nvGrpSpPr>
-      <p:grpSpPr>
-        <a:xfrm>
-          <a:off x="0" y="0"/>
-          <a:ext cx="0" cy="0"/>
-          <a:chOff x="0" y="0"/>
-          <a:chExt cx="0" cy="0"/>
-        </a:xfrm>
-      </p:grpSpPr>
-      <p:sp>
-        <p:nvSpPr>
-          <p:cNvPr id="6146" name="Title 1">
-            <a:extLst>
-              <a:ext uri="{FF2B5EF4-FFF2-40B4-BE49-F238E27FC236}">
-                <a16:creationId xmlns:a16="http://schemas.microsoft.com/office/drawing/2014/main" id="{E73BA51B-CAD1-0F8D-2287-53BCD0A5D359}"/>
-              </a:ext>
-            </a:extLst>
-          </p:cNvPr>
-          <p:cNvSpPr>
-            <a:spLocks noGrp="1"/>
-          </p:cNvSpPr>
-          <p:nvPr>
-            <p:ph type="title"/>
-          </p:nvPr>
-        </p:nvSpPr>
-        <p:spPr/>
-        <p:txBody>
-          <a:bodyPr/>
-          <a:lstStyle/>
-          <a:p>
-            <a:pPr>
-              <a:defRPr/>
-            </a:pPr>
-            <a:r>
-              <a:rPr lang="en-US" altLang="en-US" dirty="0"/>
-              <a:t>‘Handling’ exceptions</a:t>
-            </a:r>
-          </a:p>
-        </p:txBody>
-      </p:sp>
-      <p:sp>
-        <p:nvSpPr>
-          <p:cNvPr id="3" name="Content Placeholder 2">
-            <a:extLst>
-              <a:ext uri="{FF2B5EF4-FFF2-40B4-BE49-F238E27FC236}">
-                <a16:creationId xmlns:a16="http://schemas.microsoft.com/office/drawing/2014/main" id="{4C782D61-3162-B937-976D-D9C3DEBBC1FA}"/>
-              </a:ext>
-            </a:extLst>
-          </p:cNvPr>
-          <p:cNvSpPr>
-            <a:spLocks noGrp="1"/>
-          </p:cNvSpPr>
-          <p:nvPr>
-            <p:ph idx="1"/>
-          </p:nvPr>
-        </p:nvSpPr>
-        <p:spPr>
-          <a:xfrm>
-            <a:off x="152400" y="1752600"/>
-            <a:ext cx="8686800" cy="4572000"/>
-          </a:xfrm>
-        </p:spPr>
-        <p:txBody>
-          <a:bodyPr/>
-          <a:lstStyle/>
-          <a:p>
-            <a:pPr marL="0" indent="0">
-              <a:buFontTx/>
-              <a:buNone/>
-              <a:defRPr/>
-            </a:pPr>
-            <a:endParaRPr lang="en-US" sz="2000" dirty="0"/>
-          </a:p>
-          <a:p>
-            <a:pPr marL="0" indent="0">
-              <a:buFontTx/>
-              <a:buNone/>
-              <a:defRPr/>
-            </a:pPr>
-            <a:endParaRPr lang="en-US" sz="1600" dirty="0"/>
-          </a:p>
-          <a:p>
-            <a:pPr>
-              <a:defRPr/>
-            </a:pPr>
-            <a:endParaRPr lang="en-US" sz="2400" dirty="0"/>
-          </a:p>
-          <a:p>
-            <a:pPr>
-              <a:defRPr/>
-            </a:pPr>
-            <a:endParaRPr lang="en-US" sz="2400" dirty="0"/>
-          </a:p>
-          <a:p>
-            <a:pPr>
-              <a:defRPr/>
-            </a:pPr>
-            <a:endParaRPr lang="en-US" sz="2400" dirty="0"/>
-          </a:p>
-          <a:p>
-            <a:pPr>
-              <a:defRPr/>
-            </a:pPr>
-            <a:r>
-              <a:rPr lang="en-US" sz="1800" dirty="0"/>
-              <a:t>How it works:</a:t>
-            </a:r>
-          </a:p>
-          <a:p>
-            <a:pPr lvl="1">
-              <a:defRPr/>
-            </a:pPr>
-            <a:r>
-              <a:rPr lang="en-US" sz="1400" dirty="0"/>
-              <a:t>If an exception occurs in the try block, the </a:t>
-            </a:r>
-            <a:r>
-              <a:rPr lang="en-US" sz="1400" i="1" dirty="0"/>
-              <a:t>rest of the </a:t>
-            </a:r>
-            <a:r>
-              <a:rPr lang="en-US" sz="1400" b="1" i="1" dirty="0">
-                <a:solidFill>
-                  <a:srgbClr val="6588A5"/>
-                </a:solidFill>
-              </a:rPr>
-              <a:t>try</a:t>
-            </a:r>
-            <a:r>
-              <a:rPr lang="en-US" sz="1400" i="1" dirty="0"/>
-              <a:t> block is skipped</a:t>
-            </a:r>
-            <a:r>
-              <a:rPr lang="en-US" sz="1400" dirty="0"/>
-              <a:t> and execution jumps to the except block. E.g., input is "5 meters":</a:t>
-            </a:r>
-            <a:br>
-              <a:rPr lang="en-US" sz="1400" dirty="0"/>
-            </a:br>
-            <a:br>
-              <a:rPr lang="en-US" sz="1400" dirty="0"/>
-            </a:br>
-            <a:r>
-              <a:rPr lang="en-US" sz="1400" dirty="0"/>
-              <a:t>&gt;&gt;&gt; </a:t>
-            </a:r>
-            <a:r>
-              <a:rPr lang="en-US" sz="1400" dirty="0">
-                <a:solidFill>
-                  <a:srgbClr val="FFCCCC"/>
-                </a:solidFill>
-              </a:rPr>
-              <a:t>An error occurred.</a:t>
-            </a:r>
-            <a:br>
-              <a:rPr lang="en-US" sz="1400" dirty="0">
-                <a:solidFill>
-                  <a:srgbClr val="FFCCCC"/>
-                </a:solidFill>
-              </a:rPr>
-            </a:br>
-            <a:r>
-              <a:rPr lang="en-US" sz="1400" dirty="0">
-                <a:solidFill>
-                  <a:srgbClr val="FFCCCC"/>
-                </a:solidFill>
-              </a:rPr>
-              <a:t>Please enter a numerical argument.</a:t>
-            </a:r>
-            <a:br>
-              <a:rPr lang="en-US" sz="1400" dirty="0">
-                <a:solidFill>
-                  <a:srgbClr val="FFCCCC"/>
-                </a:solidFill>
-              </a:rPr>
-            </a:br>
-            <a:r>
-              <a:rPr lang="en-US" sz="1400" dirty="0">
-                <a:solidFill>
-                  <a:srgbClr val="FFCCCC"/>
-                </a:solidFill>
-              </a:rPr>
-              <a:t>Thank you for running me!</a:t>
-            </a:r>
-          </a:p>
-          <a:p>
-            <a:pPr lvl="1">
-              <a:defRPr/>
-            </a:pPr>
-            <a:endParaRPr lang="en-US" sz="1400" dirty="0"/>
-          </a:p>
-          <a:p>
-            <a:pPr lvl="1">
-              <a:defRPr/>
-            </a:pPr>
-            <a:r>
-              <a:rPr lang="en-US" sz="1400" dirty="0"/>
-              <a:t>If no exceptions occur, </a:t>
-            </a:r>
-            <a:r>
-              <a:rPr lang="en-US" sz="1400" i="1" dirty="0"/>
-              <a:t>the </a:t>
-            </a:r>
-            <a:r>
-              <a:rPr lang="en-US" sz="1400" b="1" i="1" dirty="0">
-                <a:solidFill>
-                  <a:srgbClr val="6588A5"/>
-                </a:solidFill>
-              </a:rPr>
-              <a:t>except</a:t>
-            </a:r>
-            <a:r>
-              <a:rPr lang="en-US" sz="1400" i="1" dirty="0"/>
-              <a:t> block is skipped entirely</a:t>
-            </a:r>
-            <a:r>
-              <a:rPr lang="en-US" sz="1400" dirty="0"/>
-              <a:t>. E.g., the input is 5, the script prints the following:</a:t>
-            </a:r>
-            <a:br>
-              <a:rPr lang="en-US" sz="1400" dirty="0"/>
-            </a:br>
-            <a:br>
-              <a:rPr lang="en-US" sz="1400" dirty="0"/>
-            </a:br>
-            <a:r>
-              <a:rPr lang="en-US" sz="1400" dirty="0"/>
-              <a:t>&gt;&gt;&gt; </a:t>
-            </a:r>
-            <a:r>
-              <a:rPr lang="en-US" sz="1400" dirty="0">
-                <a:solidFill>
-                  <a:srgbClr val="FFCCCC"/>
-                </a:solidFill>
-              </a:rPr>
-              <a:t>The doubled number is 10.0</a:t>
-            </a:r>
-            <a:br>
-              <a:rPr lang="en-US" sz="1400" dirty="0">
-                <a:solidFill>
-                  <a:srgbClr val="FFCCCC"/>
-                </a:solidFill>
-              </a:rPr>
-            </a:br>
-            <a:r>
-              <a:rPr lang="en-US" sz="1400" dirty="0">
-                <a:solidFill>
-                  <a:srgbClr val="FFCCCC"/>
-                </a:solidFill>
-              </a:rPr>
-              <a:t>Thank you for running me!</a:t>
-            </a:r>
-          </a:p>
-          <a:p>
-            <a:pPr lvl="1">
-              <a:defRPr/>
-            </a:pPr>
-            <a:endParaRPr lang="en-US" sz="1800" dirty="0"/>
-          </a:p>
-        </p:txBody>
-      </p:sp>
-      <p:sp>
-        <p:nvSpPr>
-          <p:cNvPr id="4" name="TextBox 3">
-            <a:extLst>
-              <a:ext uri="{FF2B5EF4-FFF2-40B4-BE49-F238E27FC236}">
-                <a16:creationId xmlns:a16="http://schemas.microsoft.com/office/drawing/2014/main" id="{4F56BEDF-E9AB-1D29-48E0-D58563DD47E0}"/>
-              </a:ext>
-            </a:extLst>
-          </p:cNvPr>
-          <p:cNvSpPr txBox="1"/>
-          <p:nvPr/>
-        </p:nvSpPr>
-        <p:spPr>
-          <a:xfrm>
-            <a:off x="1638300" y="914400"/>
-            <a:ext cx="5867400" cy="2677656"/>
-          </a:xfrm>
-          <a:prstGeom prst="rect">
-            <a:avLst/>
-          </a:prstGeom>
-          <a:noFill/>
-        </p:spPr>
-        <p:txBody>
-          <a:bodyPr wrap="square">
-            <a:spAutoFit/>
-          </a:bodyPr>
-          <a:lstStyle/>
-          <a:p>
-            <a:r>
-              <a:rPr lang="en-US" sz="1400" b="0" dirty="0">
-                <a:solidFill>
-                  <a:srgbClr val="6A9955"/>
-                </a:solidFill>
-                <a:effectLst/>
-                <a:latin typeface="Consolas" panose="020B0609020204030204" pitchFamily="49" charset="0"/>
-              </a:rPr>
-              <a:t># doubleMyNumber.py</a:t>
-            </a:r>
-            <a:endParaRPr lang="en-US" sz="1400" b="0" dirty="0">
-              <a:solidFill>
-                <a:srgbClr val="D4D4D4"/>
-              </a:solidFill>
-              <a:effectLst/>
-              <a:latin typeface="Consolas" panose="020B0609020204030204" pitchFamily="49" charset="0"/>
-            </a:endParaRPr>
-          </a:p>
-          <a:p>
-            <a:r>
-              <a:rPr lang="en-US" sz="1400" b="0" dirty="0">
-                <a:solidFill>
-                  <a:srgbClr val="569CD6"/>
-                </a:solidFill>
-                <a:effectLst/>
-                <a:latin typeface="Consolas" panose="020B0609020204030204" pitchFamily="49" charset="0"/>
-              </a:rPr>
-              <a:t>import</a:t>
-            </a:r>
-            <a:r>
-              <a:rPr lang="en-US" sz="1400" b="0" dirty="0">
-                <a:solidFill>
-                  <a:srgbClr val="D4D4D4"/>
-                </a:solidFill>
-                <a:effectLst/>
-                <a:latin typeface="Consolas" panose="020B0609020204030204" pitchFamily="49" charset="0"/>
-              </a:rPr>
-              <a:t> sys</a:t>
-            </a:r>
-          </a:p>
-          <a:p>
-            <a:br>
-              <a:rPr lang="en-US" sz="1400" b="0" dirty="0">
-                <a:solidFill>
-                  <a:srgbClr val="D4D4D4"/>
-                </a:solidFill>
-                <a:effectLst/>
-                <a:latin typeface="Consolas" panose="020B0609020204030204" pitchFamily="49" charset="0"/>
-              </a:rPr>
-            </a:br>
-            <a:r>
-              <a:rPr lang="en-US" sz="1400" b="0" dirty="0">
-                <a:solidFill>
-                  <a:srgbClr val="569CD6"/>
-                </a:solidFill>
-                <a:effectLst/>
-                <a:latin typeface="Consolas" panose="020B0609020204030204" pitchFamily="49" charset="0"/>
-              </a:rPr>
-              <a:t>try</a:t>
-            </a:r>
-            <a:r>
-              <a:rPr lang="en-US" sz="1400" b="0" dirty="0">
-                <a:solidFill>
-                  <a:srgbClr val="D4D4D4"/>
-                </a:solidFill>
-                <a:effectLst/>
-                <a:latin typeface="Consolas" panose="020B0609020204030204" pitchFamily="49" charset="0"/>
-              </a:rPr>
-              <a:t>:</a:t>
-            </a:r>
-          </a:p>
-          <a:p>
-            <a:r>
-              <a:rPr lang="en-US" sz="1400" b="0" dirty="0">
-                <a:solidFill>
-                  <a:srgbClr val="D4D4D4"/>
-                </a:solidFill>
-                <a:effectLst/>
-                <a:latin typeface="Consolas" panose="020B0609020204030204" pitchFamily="49" charset="0"/>
-              </a:rPr>
-              <a:t>    number = float(</a:t>
-            </a:r>
-            <a:r>
-              <a:rPr lang="en-US" sz="1400" b="0" dirty="0" err="1">
-                <a:solidFill>
-                  <a:srgbClr val="D4D4D4"/>
-                </a:solidFill>
-                <a:effectLst/>
-                <a:latin typeface="Consolas" panose="020B0609020204030204" pitchFamily="49" charset="0"/>
-              </a:rPr>
-              <a:t>sys.argv</a:t>
-            </a:r>
-            <a:r>
-              <a:rPr lang="en-US" sz="1400" b="0" dirty="0">
-                <a:solidFill>
-                  <a:srgbClr val="D4D4D4"/>
-                </a:solidFill>
-                <a:effectLst/>
-                <a:latin typeface="Consolas" panose="020B0609020204030204" pitchFamily="49" charset="0"/>
-              </a:rPr>
-              <a:t>[</a:t>
-            </a:r>
-            <a:r>
-              <a:rPr lang="en-US" sz="1400" b="0" dirty="0">
-                <a:solidFill>
-                  <a:srgbClr val="B5CEA8"/>
-                </a:solidFill>
-                <a:effectLst/>
-                <a:latin typeface="Consolas" panose="020B0609020204030204" pitchFamily="49" charset="0"/>
-              </a:rPr>
-              <a:t>1</a:t>
-            </a:r>
-            <a:r>
-              <a:rPr lang="en-US" sz="1400" b="0" dirty="0">
-                <a:solidFill>
-                  <a:srgbClr val="D4D4D4"/>
-                </a:solidFill>
-                <a:effectLst/>
-                <a:latin typeface="Consolas" panose="020B0609020204030204" pitchFamily="49" charset="0"/>
-              </a:rPr>
-              <a:t>])</a:t>
-            </a:r>
-          </a:p>
-          <a:p>
-            <a:r>
-              <a:rPr lang="en-US" sz="1400" b="0" dirty="0">
-                <a:solidFill>
-                  <a:srgbClr val="D4D4D4"/>
-                </a:solidFill>
-                <a:effectLst/>
-                <a:latin typeface="Consolas" panose="020B0609020204030204" pitchFamily="49" charset="0"/>
-              </a:rPr>
-              <a:t>    product = </a:t>
-            </a:r>
-            <a:r>
-              <a:rPr lang="en-US" sz="1400" b="0" dirty="0">
-                <a:solidFill>
-                  <a:srgbClr val="B5CEA8"/>
-                </a:solidFill>
-                <a:effectLst/>
-                <a:latin typeface="Consolas" panose="020B0609020204030204" pitchFamily="49" charset="0"/>
-              </a:rPr>
-              <a:t>2</a:t>
-            </a:r>
-            <a:r>
-              <a:rPr lang="en-US" sz="1400" b="0" dirty="0">
-                <a:solidFill>
-                  <a:srgbClr val="D4D4D4"/>
-                </a:solidFill>
-                <a:effectLst/>
-                <a:latin typeface="Consolas" panose="020B0609020204030204" pitchFamily="49" charset="0"/>
-              </a:rPr>
-              <a:t>*number</a:t>
-            </a:r>
-          </a:p>
-          <a:p>
-            <a:r>
-              <a:rPr lang="en-US" sz="1400" b="0" dirty="0">
-                <a:solidFill>
-                  <a:srgbClr val="D4D4D4"/>
-                </a:solidFill>
-                <a:effectLst/>
-                <a:latin typeface="Consolas" panose="020B0609020204030204" pitchFamily="49" charset="0"/>
-              </a:rPr>
-              <a:t>    print(</a:t>
-            </a:r>
-            <a:r>
-              <a:rPr lang="en-US" sz="1400" b="0" dirty="0" err="1">
-                <a:solidFill>
-                  <a:srgbClr val="569CD6"/>
-                </a:solidFill>
-                <a:effectLst/>
-                <a:latin typeface="Consolas" panose="020B0609020204030204" pitchFamily="49" charset="0"/>
-              </a:rPr>
-              <a:t>f</a:t>
-            </a:r>
-            <a:r>
-              <a:rPr lang="en-US" sz="1400" b="0" dirty="0" err="1">
-                <a:solidFill>
-                  <a:srgbClr val="CE9178"/>
-                </a:solidFill>
-                <a:effectLst/>
-                <a:latin typeface="Consolas" panose="020B0609020204030204" pitchFamily="49" charset="0"/>
-              </a:rPr>
-              <a:t>"The</a:t>
-            </a:r>
-            <a:r>
-              <a:rPr lang="en-US" sz="1400" b="0" dirty="0">
-                <a:solidFill>
-                  <a:srgbClr val="CE9178"/>
-                </a:solidFill>
-                <a:effectLst/>
-                <a:latin typeface="Consolas" panose="020B0609020204030204" pitchFamily="49" charset="0"/>
-              </a:rPr>
-              <a:t> doubled number is </a:t>
-            </a:r>
-            <a:r>
-              <a:rPr lang="en-US" sz="1400" b="0" dirty="0">
-                <a:solidFill>
-                  <a:srgbClr val="D4D4D4"/>
-                </a:solidFill>
-                <a:effectLst/>
-                <a:latin typeface="Consolas" panose="020B0609020204030204" pitchFamily="49" charset="0"/>
-              </a:rPr>
-              <a:t>{product}</a:t>
-            </a:r>
-            <a:r>
-              <a:rPr lang="en-US" sz="1400" b="0" dirty="0">
-                <a:solidFill>
-                  <a:srgbClr val="CE9178"/>
-                </a:solidFill>
-                <a:effectLst/>
-                <a:latin typeface="Consolas" panose="020B0609020204030204" pitchFamily="49" charset="0"/>
-              </a:rPr>
-              <a:t>"</a:t>
-            </a:r>
-            <a:r>
-              <a:rPr lang="en-US" sz="1400" b="0" dirty="0">
-                <a:solidFill>
-                  <a:srgbClr val="D4D4D4"/>
-                </a:solidFill>
-                <a:effectLst/>
-                <a:latin typeface="Consolas" panose="020B0609020204030204" pitchFamily="49" charset="0"/>
-              </a:rPr>
-              <a:t>)</a:t>
-            </a:r>
-          </a:p>
-          <a:p>
-            <a:r>
-              <a:rPr lang="en-US" sz="1400" b="0" dirty="0">
-                <a:solidFill>
-                  <a:srgbClr val="569CD6"/>
-                </a:solidFill>
-                <a:effectLst/>
-                <a:latin typeface="Consolas" panose="020B0609020204030204" pitchFamily="49" charset="0"/>
-              </a:rPr>
-              <a:t>except</a:t>
-            </a:r>
-            <a:r>
-              <a:rPr lang="en-US" sz="1400" b="0" dirty="0">
-                <a:solidFill>
-                  <a:srgbClr val="D4D4D4"/>
-                </a:solidFill>
-                <a:effectLst/>
-                <a:latin typeface="Consolas" panose="020B0609020204030204" pitchFamily="49" charset="0"/>
-              </a:rPr>
-              <a:t> </a:t>
-            </a:r>
-            <a:r>
-              <a:rPr lang="en-US" sz="1400" b="0" dirty="0" err="1">
-                <a:solidFill>
-                  <a:srgbClr val="D4D4D4"/>
-                </a:solidFill>
-                <a:effectLst/>
-                <a:latin typeface="Consolas" panose="020B0609020204030204" pitchFamily="49" charset="0"/>
-              </a:rPr>
-              <a:t>Value</a:t>
-            </a:r>
-            <a:r>
-              <a:rPr lang="en-US" sz="1400" dirty="0" err="1">
-                <a:solidFill>
-                  <a:srgbClr val="D4D4D4"/>
-                </a:solidFill>
-                <a:latin typeface="Consolas" panose="020B0609020204030204" pitchFamily="49" charset="0"/>
-              </a:rPr>
-              <a:t>Error</a:t>
-            </a:r>
-            <a:r>
-              <a:rPr lang="en-US" sz="1400" dirty="0">
-                <a:solidFill>
-                  <a:srgbClr val="D4D4D4"/>
-                </a:solidFill>
-                <a:latin typeface="Consolas" panose="020B0609020204030204" pitchFamily="49" charset="0"/>
-              </a:rPr>
-              <a:t>:</a:t>
-            </a:r>
-            <a:endParaRPr lang="en-US" sz="1400" b="0" dirty="0">
-              <a:solidFill>
-                <a:srgbClr val="D4D4D4"/>
-              </a:solidFill>
-              <a:effectLst/>
-              <a:latin typeface="Consolas" panose="020B0609020204030204" pitchFamily="49" charset="0"/>
-            </a:endParaRPr>
-          </a:p>
-          <a:p>
-            <a:r>
-              <a:rPr lang="en-US" sz="1400" b="0" dirty="0">
-                <a:solidFill>
-                  <a:srgbClr val="D4D4D4"/>
-                </a:solidFill>
-                <a:effectLst/>
-                <a:latin typeface="Consolas" panose="020B0609020204030204" pitchFamily="49" charset="0"/>
-              </a:rPr>
-              <a:t>    print(</a:t>
-            </a:r>
-            <a:r>
-              <a:rPr lang="en-US" sz="1400" b="0" dirty="0">
-                <a:solidFill>
-                  <a:srgbClr val="CE9178"/>
-                </a:solidFill>
-                <a:effectLst/>
-                <a:latin typeface="Consolas" panose="020B0609020204030204" pitchFamily="49" charset="0"/>
-              </a:rPr>
-              <a:t>"An error occurred."</a:t>
-            </a:r>
-            <a:r>
-              <a:rPr lang="en-US" sz="1400" b="0" dirty="0">
-                <a:solidFill>
-                  <a:srgbClr val="D4D4D4"/>
-                </a:solidFill>
-                <a:effectLst/>
-                <a:latin typeface="Consolas" panose="020B0609020204030204" pitchFamily="49" charset="0"/>
-              </a:rPr>
-              <a:t>)</a:t>
-            </a:r>
-          </a:p>
-          <a:p>
-            <a:r>
-              <a:rPr lang="en-US" sz="1400" b="0" dirty="0">
-                <a:solidFill>
-                  <a:srgbClr val="D4D4D4"/>
-                </a:solidFill>
-                <a:effectLst/>
-                <a:latin typeface="Consolas" panose="020B0609020204030204" pitchFamily="49" charset="0"/>
-              </a:rPr>
-              <a:t>    print(</a:t>
-            </a:r>
-            <a:r>
-              <a:rPr lang="en-US" sz="1400" b="0" dirty="0">
-                <a:solidFill>
-                  <a:srgbClr val="CE9178"/>
-                </a:solidFill>
-                <a:effectLst/>
-                <a:latin typeface="Consolas" panose="020B0609020204030204" pitchFamily="49" charset="0"/>
-              </a:rPr>
-              <a:t>"Please enter a numerical argument."</a:t>
-            </a:r>
-            <a:r>
-              <a:rPr lang="en-US" sz="1400" b="0" dirty="0">
-                <a:solidFill>
-                  <a:srgbClr val="D4D4D4"/>
-                </a:solidFill>
-                <a:effectLst/>
-                <a:latin typeface="Consolas" panose="020B0609020204030204" pitchFamily="49" charset="0"/>
-              </a:rPr>
-              <a:t>)</a:t>
-            </a:r>
-          </a:p>
-          <a:p>
-            <a:br>
-              <a:rPr lang="en-US" sz="1400" b="0" dirty="0">
-                <a:solidFill>
-                  <a:srgbClr val="D4D4D4"/>
-                </a:solidFill>
-                <a:effectLst/>
-                <a:latin typeface="Consolas" panose="020B0609020204030204" pitchFamily="49" charset="0"/>
-              </a:rPr>
-            </a:br>
-            <a:r>
-              <a:rPr lang="en-US" sz="1400" b="0" dirty="0">
-                <a:solidFill>
-                  <a:srgbClr val="D4D4D4"/>
-                </a:solidFill>
-                <a:effectLst/>
-                <a:latin typeface="Consolas" panose="020B0609020204030204" pitchFamily="49" charset="0"/>
-              </a:rPr>
-              <a:t>print(</a:t>
-            </a:r>
-            <a:r>
-              <a:rPr lang="en-US" sz="1400" b="0" dirty="0">
-                <a:solidFill>
-                  <a:srgbClr val="CE9178"/>
-                </a:solidFill>
-                <a:effectLst/>
-                <a:latin typeface="Consolas" panose="020B0609020204030204" pitchFamily="49" charset="0"/>
-              </a:rPr>
-              <a:t>"Thank you for running me!"</a:t>
-            </a:r>
-            <a:r>
-              <a:rPr lang="en-US" sz="1400" b="0" dirty="0">
-                <a:solidFill>
-                  <a:srgbClr val="D4D4D4"/>
-                </a:solidFill>
-                <a:effectLst/>
-                <a:latin typeface="Consolas" panose="020B0609020204030204" pitchFamily="49" charset="0"/>
-              </a:rPr>
-              <a:t>)</a:t>
-            </a:r>
-          </a:p>
-        </p:txBody>
-      </p:sp>
-    </p:spTree>
-  </p:cSld>
-  <p:clrMapOvr>
-    <a:masterClrMapping/>
-  </p:clrMapOvr>
-</p:sld>
-</file>
-
-<file path=ppt/slides/slide50.xml><?xml version="1.0" encoding="utf-8"?>
+<file path=ppt/slides/slide52.xml><?xml version="1.0" encoding="utf-8"?>
 <p:sld xmlns:a="http://schemas.openxmlformats.org/drawingml/2006/main" xmlns:r="http://schemas.openxmlformats.org/officeDocument/2006/relationships" xmlns:p="http://schemas.openxmlformats.org/presentationml/2006/main">
   <p:cSld>
     <p:spTree>
